--- a/docs/presentation/fx-pulse-final-draft.pptx
+++ b/docs/presentation/fx-pulse-final-draft.pptx
@@ -9,9 +9,10 @@
     <p:sldId id="257" r:id="rId3"/>
     <p:sldId id="258" r:id="rId4"/>
     <p:sldId id="259" r:id="rId5"/>
+    <p:sldId id="260" r:id="rId6"/>
   </p:sldIdLst>
   <p:notesMasterIdLst>
-    <p:notesMasterId r:id="rId6"/>
+    <p:notesMasterId r:id="rId7"/>
   </p:notesMasterIdLst>
   <p:sldSz cx="12192000" cy="6858000"/>
   <p:notesSz cx="6858000" cy="12192000"/>
@@ -793,6 +794,94 @@
             <a:fld id="{F7021451-1387-4CA6-816F-3879F97B5CBC}" type="slidenum">
               <a:rPr lang="en-US"/>
               <a:t>4</a:t>
+            </a:fld>
+            <a:endParaRPr lang="en-US"/>
+          </a:p>
+        </p:txBody>
+      </p:sp>
+    </p:spTree>
+    <p:extLst>
+      <p:ext uri="{BB962C8B-B14F-4D97-AF65-F5344CB8AC3E}">
+        <p14:creationId xmlns:p14="http://schemas.microsoft.com/office/powerpoint/2010/main" val="1024086991"/>
+      </p:ext>
+    </p:extLst>
+  </p:cSld>
+  <p:clrMapOvr>
+    <a:masterClrMapping/>
+  </p:clrMapOvr>
+</p:notes>
+</file>
+
+<file path=ppt/notesSlides/notesSlide5.xml><?xml version="1.0" encoding="utf-8"?>
+<p:notes xmlns:a="http://schemas.openxmlformats.org/drawingml/2006/main" xmlns:r="http://schemas.openxmlformats.org/officeDocument/2006/relationships" xmlns:p="http://schemas.openxmlformats.org/presentationml/2006/main">
+  <p:cSld>
+    <p:spTree>
+      <p:nvGrpSpPr>
+        <p:cNvPr id="1" name=""/>
+        <p:cNvGrpSpPr/>
+        <p:nvPr/>
+      </p:nvGrpSpPr>
+      <p:grpSpPr>
+        <a:xfrm>
+          <a:off x="0" y="0"/>
+          <a:ext cx="0" cy="0"/>
+          <a:chOff x="0" y="0"/>
+          <a:chExt cx="0" cy="0"/>
+        </a:xfrm>
+      </p:grpSpPr>
+      <p:sp>
+        <p:nvSpPr>
+          <p:cNvPr id="2" name="Slide Image Placeholder 1"/>
+          <p:cNvSpPr>
+            <a:spLocks noGrp="1" noRot="1" noChangeAspect="1"/>
+          </p:cNvSpPr>
+          <p:nvPr>
+            <p:ph type="sldImg"/>
+          </p:nvPr>
+        </p:nvSpPr>
+        <p:spPr/>
+      </p:sp>
+      <p:sp>
+        <p:nvSpPr>
+          <p:cNvPr id="3" name="Notes Placeholder 2"/>
+          <p:cNvSpPr>
+            <a:spLocks noGrp="1"/>
+          </p:cNvSpPr>
+          <p:nvPr>
+            <p:ph type="body" idx="1"/>
+          </p:nvPr>
+        </p:nvSpPr>
+        <p:spPr/>
+        <p:txBody>
+          <a:bodyPr/>
+          <a:lstStyle/>
+          <a:p>
+            <a:r>
+              <a:rPr lang="en-US" dirty="0"/>
+              <a:t/>
+            </a:r>
+            <a:endParaRPr lang="en-US" dirty="0"/>
+          </a:p>
+        </p:txBody>
+      </p:sp>
+      <p:sp>
+        <p:nvSpPr>
+          <p:cNvPr id="4" name="Slide Number Placeholder 3"/>
+          <p:cNvSpPr>
+            <a:spLocks noGrp="1"/>
+          </p:cNvSpPr>
+          <p:nvPr>
+            <p:ph type="sldNum" sz="quarter" idx="10"/>
+          </p:nvPr>
+        </p:nvSpPr>
+        <p:spPr/>
+        <p:txBody>
+          <a:bodyPr/>
+          <a:lstStyle/>
+          <a:p>
+            <a:fld id="{F7021451-1387-4CA6-816F-3879F97B5CBC}" type="slidenum">
+              <a:rPr lang="en-US"/>
+              <a:t>5</a:t>
             </a:fld>
             <a:endParaRPr lang="en-US"/>
           </a:p>
@@ -1124,7 +1213,7 @@
     <p:bg>
       <p:bgPr>
         <a:solidFill>
-          <a:srgbClr val="EBEBEB"/>
+          <a:srgbClr val="6C2BF5"/>
         </a:solidFill>
       </p:bgPr>
     </p:bg>
@@ -1150,8 +1239,8 @@
         </p:nvSpPr>
         <p:spPr>
           <a:xfrm rot="-300000">
-            <a:off x="10317175" y="219456"/>
-            <a:ext cx="1353312" cy="453542"/>
+            <a:off x="502920" y="411480"/>
+            <a:ext cx="2029968" cy="680314"/>
           </a:xfrm>
           <a:prstGeom prst="rect">
             <a:avLst/>
@@ -1170,8 +1259,8 @@
         </p:nvSpPr>
         <p:spPr>
           <a:xfrm rot="-300000">
-            <a:off x="10317175" y="234086"/>
-            <a:ext cx="1353312" cy="219456"/>
+            <a:off x="502920" y="433426"/>
+            <a:ext cx="2029968" cy="329184"/>
           </a:xfrm>
           <a:prstGeom prst="rect">
             <a:avLst/>
@@ -1187,7 +1276,7 @@
               <a:buNone/>
             </a:pPr>
             <a:r>
-              <a:rPr lang="en-US" sz="1040" b="1" dirty="0">
+              <a:rPr lang="en-US" sz="1560" b="1" dirty="0">
                 <a:solidFill>
                   <a:srgbClr val="FFFFFF"/>
                 </a:solidFill>
@@ -1197,7 +1286,7 @@
               </a:rPr>
               <a:t>АЛЬФА</a:t>
             </a:r>
-            <a:endParaRPr lang="en-US" sz="1040" dirty="0"/>
+            <a:endParaRPr lang="en-US" sz="1560" dirty="0"/>
           </a:p>
         </p:txBody>
       </p:sp>
@@ -1209,8 +1298,8 @@
         </p:nvSpPr>
         <p:spPr>
           <a:xfrm rot="-300000">
-            <a:off x="10317175" y="431597"/>
-            <a:ext cx="1353312" cy="219456"/>
+            <a:off x="502920" y="729691"/>
+            <a:ext cx="2029968" cy="329184"/>
           </a:xfrm>
           <a:prstGeom prst="rect">
             <a:avLst/>
@@ -1226,7 +1315,7 @@
               <a:buNone/>
             </a:pPr>
             <a:r>
-              <a:rPr lang="en-US" sz="1040" b="1" dirty="0">
+              <a:rPr lang="en-US" sz="1560" b="1" dirty="0">
                 <a:solidFill>
                   <a:srgbClr val="FFFFFF"/>
                 </a:solidFill>
@@ -1236,20 +1325,42 @@
               </a:rPr>
               <a:t>БУДУЩЕЕ</a:t>
             </a:r>
-            <a:endParaRPr lang="en-US" sz="1040" dirty="0"/>
+            <a:endParaRPr lang="en-US" sz="1560" dirty="0"/>
           </a:p>
         </p:txBody>
       </p:sp>
       <p:sp>
         <p:nvSpPr>
-          <p:cNvPr id="5" name="Text 3"/>
+          <p:cNvPr id="5" name="Shape 3"/>
+          <p:cNvSpPr/>
+          <p:nvPr/>
+        </p:nvSpPr>
+        <p:spPr>
+          <a:xfrm>
+            <a:off x="9814255" y="457200"/>
+            <a:ext cx="1828800" cy="502920"/>
+          </a:xfrm>
+          <a:prstGeom prst="roundRect">
+            <a:avLst>
+              <a:gd name="adj" fmla="val 49091"/>
+            </a:avLst>
+          </a:prstGeom>
+          <a:solidFill>
+            <a:srgbClr val="EF3124"/>
+          </a:solidFill>
+          <a:ln/>
+        </p:spPr>
+      </p:sp>
+      <p:sp>
+        <p:nvSpPr>
+          <p:cNvPr id="6" name="Text 4"/>
           <p:cNvSpPr txBox="1"/>
           <p:nvPr/>
         </p:nvSpPr>
         <p:spPr>
           <a:xfrm>
-            <a:off x="457200" y="256032"/>
-            <a:ext cx="9601200" cy="640080"/>
+            <a:off x="9814255" y="457200"/>
+            <a:ext cx="1828800" cy="502920"/>
           </a:xfrm>
           <a:prstGeom prst="rect">
             <a:avLst/>
@@ -1261,48 +1372,34 @@
           <a:bodyPr wrap="square" lIns="0" tIns="0" rIns="0" bIns="0" rtlCol="0" anchor="ctr"/>
           <a:lstStyle/>
           <a:p>
-            <a:pPr indent="0" marL="0">
-              <a:buNone/>
-            </a:pPr>
-            <a:r>
-              <a:rPr lang="en-US" sz="3400" b="1" dirty="0">
-                <a:solidFill>
-                  <a:srgbClr val="EF3124"/>
-                </a:solidFill>
-                <a:latin typeface="Arial" pitchFamily="34" charset="0"/>
-                <a:ea typeface="Arial" pitchFamily="34" charset="-122"/>
-                <a:cs typeface="Arial" pitchFamily="34" charset="-120"/>
-              </a:rPr>
-              <a:t>Проблема</a:t>
-            </a:r>
-            <a:pPr indent="0" marL="0">
-              <a:buNone/>
-            </a:pPr>
-            <a:r>
-              <a:rPr lang="en-US" sz="3400" b="1" dirty="0">
-                <a:solidFill>
-                  <a:srgbClr val="111111"/>
-                </a:solidFill>
-                <a:latin typeface="Arial" pitchFamily="34" charset="0"/>
-                <a:ea typeface="Arial" pitchFamily="34" charset="-122"/>
-                <a:cs typeface="Arial" pitchFamily="34" charset="-120"/>
-              </a:rPr>
-              <a:t> и альтернативы</a:t>
-            </a:r>
-            <a:endParaRPr lang="en-US" sz="3400" dirty="0"/>
+            <a:pPr algn="ctr" indent="0" marL="0">
+              <a:buNone/>
+            </a:pPr>
+            <a:r>
+              <a:rPr lang="en-US" sz="1600" b="1" dirty="0">
+                <a:solidFill>
+                  <a:srgbClr val="FFFFFF"/>
+                </a:solidFill>
+                <a:latin typeface="Arial" pitchFamily="34" charset="0"/>
+                <a:ea typeface="Arial" pitchFamily="34" charset="-122"/>
+                <a:cs typeface="Arial" pitchFamily="34" charset="-120"/>
+              </a:rPr>
+              <a:t>Альфа Банк</a:t>
+            </a:r>
+            <a:endParaRPr lang="en-US" sz="1600" dirty="0"/>
           </a:p>
         </p:txBody>
       </p:sp>
       <p:sp>
         <p:nvSpPr>
-          <p:cNvPr id="6" name="Text 4"/>
+          <p:cNvPr id="7" name="Text 5"/>
           <p:cNvSpPr txBox="1"/>
           <p:nvPr/>
         </p:nvSpPr>
         <p:spPr>
           <a:xfrm>
-            <a:off x="10317175" y="868680"/>
-            <a:ext cx="1417320" cy="274320"/>
+            <a:off x="640080" y="2286000"/>
+            <a:ext cx="10881360" cy="1828800"/>
           </a:xfrm>
           <a:prstGeom prst="rect">
             <a:avLst/>
@@ -1314,52 +1411,46 @@
           <a:bodyPr wrap="square" lIns="0" tIns="0" rIns="0" bIns="0" rtlCol="0" anchor="ctr"/>
           <a:lstStyle/>
           <a:p>
-            <a:pPr algn="ctr" indent="0" marL="0">
-              <a:buNone/>
-            </a:pPr>
-            <a:r>
-              <a:rPr lang="en-US" sz="1300" dirty="0">
-                <a:solidFill>
-                  <a:srgbClr val="5E5E5E"/>
-                </a:solidFill>
-                <a:latin typeface="Arial" pitchFamily="34" charset="0"/>
-                <a:ea typeface="Arial" pitchFamily="34" charset="-122"/>
-                <a:cs typeface="Arial" pitchFamily="34" charset="-120"/>
-              </a:rPr>
-              <a:t>30 секунд</a:t>
-            </a:r>
-            <a:endParaRPr lang="en-US" sz="1300" dirty="0"/>
+            <a:pPr indent="0" marL="0">
+              <a:lnSpc>
+                <a:spcPct val="105000"/>
+              </a:lnSpc>
+              <a:buNone/>
+            </a:pPr>
+            <a:r>
+              <a:rPr lang="en-US" sz="4800" b="1" dirty="0">
+                <a:solidFill>
+                  <a:srgbClr val="FFFFFF"/>
+                </a:solidFill>
+                <a:latin typeface="Arial" pitchFamily="34" charset="0"/>
+                <a:ea typeface="Arial" pitchFamily="34" charset="-122"/>
+                <a:cs typeface="Arial" pitchFamily="34" charset="-120"/>
+              </a:rPr>
+              <a:t>Триггерная модель</a:t>
+            </a:r>
+            <a:endParaRPr lang="en-US" sz="4800" dirty="0"/>
+          </a:p>
+          <a:p>
+            <a:pPr indent="0" marL="0">
+              <a:lnSpc>
+                <a:spcPct val="105000"/>
+              </a:lnSpc>
+              <a:buNone/>
+            </a:pPr>
+            <a:r>
+              <a:rPr lang="en-US" sz="4800" b="1" dirty="0">
+                <a:solidFill>
+                  <a:srgbClr val="FFFFFF"/>
+                </a:solidFill>
+                <a:latin typeface="Arial" pitchFamily="34" charset="0"/>
+                <a:ea typeface="Arial" pitchFamily="34" charset="-122"/>
+                <a:cs typeface="Arial" pitchFamily="34" charset="-120"/>
+              </a:rPr>
+              <a:t>для трансграничных переводов</a:t>
+            </a:r>
+            <a:endParaRPr lang="en-US" sz="4800" dirty="0"/>
           </a:p>
         </p:txBody>
-      </p:sp>
-      <p:sp>
-        <p:nvSpPr>
-          <p:cNvPr id="7" name="Shape 5"/>
-          <p:cNvSpPr/>
-          <p:nvPr/>
-        </p:nvSpPr>
-        <p:spPr>
-          <a:xfrm>
-            <a:off x="457200" y="1143000"/>
-            <a:ext cx="11274552" cy="1481328"/>
-          </a:xfrm>
-          <a:prstGeom prst="roundRect">
-            <a:avLst>
-              <a:gd name="adj" fmla="val 8642"/>
-            </a:avLst>
-          </a:prstGeom>
-          <a:solidFill>
-            <a:srgbClr val="FDEAE8"/>
-          </a:solidFill>
-          <a:ln/>
-          <a:effectLst>
-            <a:outerShdw sx="100000" sy="100000" kx="0" ky="0" algn="bl" rotWithShape="0" blurRad="101600" dist="12700" dir="5400000">
-              <a:srgbClr val="9A9A9A">
-                <a:alpha val="18000"/>
-              </a:srgbClr>
-            </a:outerShdw>
-          </a:effectLst>
-        </p:spPr>
       </p:sp>
       <p:sp>
         <p:nvSpPr>
@@ -1369,8 +1460,8 @@
         </p:nvSpPr>
         <p:spPr>
           <a:xfrm>
-            <a:off x="777240" y="1298448"/>
-            <a:ext cx="3108960" cy="868680"/>
+            <a:off x="658368" y="4297680"/>
+            <a:ext cx="10881360" cy="502920"/>
           </a:xfrm>
           <a:prstGeom prst="rect">
             <a:avLst/>
@@ -1386,475 +1477,34 @@
               <a:buNone/>
             </a:pPr>
             <a:r>
-              <a:rPr lang="en-US" sz="5200" b="1" dirty="0">
-                <a:solidFill>
-                  <a:srgbClr val="EF3124"/>
-                </a:solidFill>
-                <a:latin typeface="Arial" pitchFamily="34" charset="0"/>
-                <a:ea typeface="Arial" pitchFamily="34" charset="-122"/>
-                <a:cs typeface="Arial" pitchFamily="34" charset="-120"/>
-              </a:rPr>
-              <a:t>4,87 %</a:t>
-            </a:r>
-            <a:endParaRPr lang="en-US" sz="5200" dirty="0"/>
+              <a:rPr lang="en-US" sz="3000" dirty="0">
+                <a:solidFill>
+                  <a:srgbClr val="E4D8FF"/>
+                </a:solidFill>
+                <a:latin typeface="Arial" pitchFamily="34" charset="0"/>
+                <a:ea typeface="Arial" pitchFamily="34" charset="-122"/>
+                <a:cs typeface="Arial" pitchFamily="34" charset="-120"/>
+              </a:rPr>
+              <a:t>Когда подсказать клиенту момент для перевода домой</a:t>
+            </a:r>
+            <a:endParaRPr lang="en-US" sz="3000" dirty="0"/>
           </a:p>
         </p:txBody>
       </p:sp>
       <p:sp>
         <p:nvSpPr>
-          <p:cNvPr id="9" name="Text 7"/>
-          <p:cNvSpPr txBox="1"/>
+          <p:cNvPr id="9" name="Shape 7"/>
+          <p:cNvSpPr/>
           <p:nvPr/>
         </p:nvSpPr>
         <p:spPr>
           <a:xfrm>
-            <a:off x="3977640" y="1371600"/>
-            <a:ext cx="7498080" cy="914400"/>
-          </a:xfrm>
-          <a:prstGeom prst="rect">
-            <a:avLst/>
-          </a:prstGeom>
-          <a:noFill/>
-          <a:ln/>
-        </p:spPr>
-        <p:txBody>
-          <a:bodyPr wrap="square" lIns="0" tIns="0" rIns="0" bIns="0" rtlCol="0" anchor="t"/>
-          <a:lstStyle/>
-          <a:p>
-            <a:pPr indent="0" marL="0">
-              <a:lnSpc>
-                <a:spcPct val="100000"/>
-              </a:lnSpc>
-              <a:buNone/>
-            </a:pPr>
-            <a:r>
-              <a:rPr lang="en-US" sz="3000" dirty="0">
-                <a:solidFill>
-                  <a:srgbClr val="3A3A3A"/>
-                </a:solidFill>
-                <a:latin typeface="Arial" pitchFamily="34" charset="0"/>
-                <a:ea typeface="Arial" pitchFamily="34" charset="-122"/>
-                <a:cs typeface="Arial" pitchFamily="34" charset="-120"/>
-              </a:rPr>
-              <a:t>размах курса внутри месяца.</a:t>
-            </a:r>
-            <a:endParaRPr lang="en-US" sz="3000" dirty="0"/>
-          </a:p>
-          <a:p>
-            <a:pPr indent="0" marL="0">
-              <a:lnSpc>
-                <a:spcPct val="100000"/>
-              </a:lnSpc>
-              <a:buNone/>
-            </a:pPr>
-            <a:r>
-              <a:rPr lang="en-US" sz="3000" dirty="0">
-                <a:solidFill>
-                  <a:srgbClr val="3A3A3A"/>
-                </a:solidFill>
-                <a:latin typeface="Arial" pitchFamily="34" charset="0"/>
-                <a:ea typeface="Arial" pitchFamily="34" charset="-122"/>
-                <a:cs typeface="Arial" pitchFamily="34" charset="-120"/>
-              </a:rPr>
-              <a:t>Столько стоит выбор дня</a:t>
-            </a:r>
-            <a:endParaRPr lang="en-US" sz="3000" dirty="0"/>
-          </a:p>
-        </p:txBody>
-      </p:sp>
-      <p:sp>
-        <p:nvSpPr>
-          <p:cNvPr id="10" name="Shape 8"/>
-          <p:cNvSpPr/>
-          <p:nvPr/>
-        </p:nvSpPr>
-        <p:spPr>
-          <a:xfrm>
-            <a:off x="457200" y="2788920"/>
-            <a:ext cx="5532120" cy="1554480"/>
+            <a:off x="640080" y="5257800"/>
+            <a:ext cx="4754880" cy="566928"/>
           </a:xfrm>
           <a:prstGeom prst="roundRect">
             <a:avLst>
-              <a:gd name="adj" fmla="val 8235"/>
-            </a:avLst>
-          </a:prstGeom>
-          <a:solidFill>
-            <a:srgbClr val="FFFFFF"/>
-          </a:solidFill>
-          <a:ln/>
-          <a:effectLst>
-            <a:outerShdw sx="100000" sy="100000" kx="0" ky="0" algn="bl" rotWithShape="0" blurRad="101600" dist="12700" dir="5400000">
-              <a:srgbClr val="9A9A9A">
-                <a:alpha val="18000"/>
-              </a:srgbClr>
-            </a:outerShdw>
-          </a:effectLst>
-        </p:spPr>
-      </p:sp>
-      <p:sp>
-        <p:nvSpPr>
-          <p:cNvPr id="11" name="Text 9"/>
-          <p:cNvSpPr txBox="1"/>
-          <p:nvPr/>
-        </p:nvSpPr>
-        <p:spPr>
-          <a:xfrm>
-            <a:off x="731520" y="2944368"/>
-            <a:ext cx="4983480" cy="914400"/>
-          </a:xfrm>
-          <a:prstGeom prst="rect">
-            <a:avLst/>
-          </a:prstGeom>
-          <a:noFill/>
-          <a:ln/>
-        </p:spPr>
-        <p:txBody>
-          <a:bodyPr wrap="square" lIns="0" tIns="0" rIns="0" bIns="0" rtlCol="0" anchor="t"/>
-          <a:lstStyle/>
-          <a:p>
-            <a:pPr indent="0" marL="0">
-              <a:lnSpc>
-                <a:spcPct val="100000"/>
-              </a:lnSpc>
-              <a:buNone/>
-            </a:pPr>
-            <a:r>
-              <a:rPr lang="en-US" sz="3000" b="1" dirty="0">
-                <a:solidFill>
-                  <a:srgbClr val="111111"/>
-                </a:solidFill>
-                <a:latin typeface="Arial" pitchFamily="34" charset="0"/>
-                <a:ea typeface="Arial" pitchFamily="34" charset="-122"/>
-                <a:cs typeface="Arial" pitchFamily="34" charset="-120"/>
-              </a:rPr>
-              <a:t>День выбирает</a:t>
-            </a:r>
-            <a:endParaRPr lang="en-US" sz="3000" dirty="0"/>
-          </a:p>
-          <a:p>
-            <a:pPr indent="0" marL="0">
-              <a:lnSpc>
-                <a:spcPct val="100000"/>
-              </a:lnSpc>
-              <a:buNone/>
-            </a:pPr>
-            <a:r>
-              <a:rPr lang="en-US" sz="3000" b="1" dirty="0">
-                <a:solidFill>
-                  <a:srgbClr val="111111"/>
-                </a:solidFill>
-                <a:latin typeface="Arial" pitchFamily="34" charset="0"/>
-                <a:ea typeface="Arial" pitchFamily="34" charset="-122"/>
-                <a:cs typeface="Arial" pitchFamily="34" charset="-120"/>
-              </a:rPr>
-              <a:t>сам клиент</a:t>
-            </a:r>
-            <a:endParaRPr lang="en-US" sz="3000" dirty="0"/>
-          </a:p>
-        </p:txBody>
-      </p:sp>
-      <p:sp>
-        <p:nvSpPr>
-          <p:cNvPr id="12" name="Text 10"/>
-          <p:cNvSpPr txBox="1"/>
-          <p:nvPr/>
-        </p:nvSpPr>
-        <p:spPr>
-          <a:xfrm>
-            <a:off x="731520" y="3822192"/>
-            <a:ext cx="4983480" cy="457200"/>
-          </a:xfrm>
-          <a:prstGeom prst="rect">
-            <a:avLst/>
-          </a:prstGeom>
-          <a:noFill/>
-          <a:ln/>
-        </p:spPr>
-        <p:txBody>
-          <a:bodyPr wrap="square" lIns="0" tIns="0" rIns="0" bIns="0" rtlCol="0" anchor="t"/>
-          <a:lstStyle/>
-          <a:p>
-            <a:pPr indent="0" marL="0">
-              <a:lnSpc>
-                <a:spcPct val="100000"/>
-              </a:lnSpc>
-              <a:buNone/>
-            </a:pPr>
-            <a:r>
-              <a:rPr lang="en-US" sz="3000" dirty="0">
-                <a:solidFill>
-                  <a:srgbClr val="3A3A3A"/>
-                </a:solidFill>
-                <a:latin typeface="Arial" pitchFamily="34" charset="0"/>
-                <a:ea typeface="Arial" pitchFamily="34" charset="-122"/>
-                <a:cs typeface="Arial" pitchFamily="34" charset="-120"/>
-              </a:rPr>
-              <a:t>Подсказки нет</a:t>
-            </a:r>
-            <a:endParaRPr lang="en-US" sz="3000" dirty="0"/>
-          </a:p>
-        </p:txBody>
-      </p:sp>
-      <p:sp>
-        <p:nvSpPr>
-          <p:cNvPr id="13" name="Shape 11"/>
-          <p:cNvSpPr/>
-          <p:nvPr/>
-        </p:nvSpPr>
-        <p:spPr>
-          <a:xfrm>
-            <a:off x="6199632" y="2788920"/>
-            <a:ext cx="5532120" cy="1554480"/>
-          </a:xfrm>
-          <a:prstGeom prst="roundRect">
-            <a:avLst>
-              <a:gd name="adj" fmla="val 8235"/>
-            </a:avLst>
-          </a:prstGeom>
-          <a:solidFill>
-            <a:srgbClr val="FFFFFF"/>
-          </a:solidFill>
-          <a:ln/>
-          <a:effectLst>
-            <a:outerShdw sx="100000" sy="100000" kx="0" ky="0" algn="bl" rotWithShape="0" blurRad="101600" dist="12700" dir="5400000">
-              <a:srgbClr val="9A9A9A">
-                <a:alpha val="18000"/>
-              </a:srgbClr>
-            </a:outerShdw>
-          </a:effectLst>
-        </p:spPr>
-      </p:sp>
-      <p:sp>
-        <p:nvSpPr>
-          <p:cNvPr id="14" name="Text 12"/>
-          <p:cNvSpPr txBox="1"/>
-          <p:nvPr/>
-        </p:nvSpPr>
-        <p:spPr>
-          <a:xfrm>
-            <a:off x="6473952" y="2944368"/>
-            <a:ext cx="4983480" cy="457200"/>
-          </a:xfrm>
-          <a:prstGeom prst="rect">
-            <a:avLst/>
-          </a:prstGeom>
-          <a:noFill/>
-          <a:ln/>
-        </p:spPr>
-        <p:txBody>
-          <a:bodyPr wrap="square" lIns="0" tIns="0" rIns="0" bIns="0" rtlCol="0" anchor="t"/>
-          <a:lstStyle/>
-          <a:p>
-            <a:pPr indent="0" marL="0">
-              <a:lnSpc>
-                <a:spcPct val="100000"/>
-              </a:lnSpc>
-              <a:buNone/>
-            </a:pPr>
-            <a:r>
-              <a:rPr lang="en-US" sz="3000" b="1" dirty="0">
-                <a:solidFill>
-                  <a:srgbClr val="111111"/>
-                </a:solidFill>
-                <a:latin typeface="Arial" pitchFamily="34" charset="0"/>
-                <a:ea typeface="Arial" pitchFamily="34" charset="-122"/>
-                <a:cs typeface="Arial" pitchFamily="34" charset="-120"/>
-              </a:rPr>
-              <a:t>Курса не видно</a:t>
-            </a:r>
-            <a:endParaRPr lang="en-US" sz="3000" dirty="0"/>
-          </a:p>
-        </p:txBody>
-      </p:sp>
-      <p:sp>
-        <p:nvSpPr>
-          <p:cNvPr id="15" name="Text 13"/>
-          <p:cNvSpPr txBox="1"/>
-          <p:nvPr/>
-        </p:nvSpPr>
-        <p:spPr>
-          <a:xfrm>
-            <a:off x="6473952" y="3401568"/>
-            <a:ext cx="4983480" cy="914400"/>
-          </a:xfrm>
-          <a:prstGeom prst="rect">
-            <a:avLst/>
-          </a:prstGeom>
-          <a:noFill/>
-          <a:ln/>
-        </p:spPr>
-        <p:txBody>
-          <a:bodyPr wrap="square" lIns="0" tIns="0" rIns="0" bIns="0" rtlCol="0" anchor="t"/>
-          <a:lstStyle/>
-          <a:p>
-            <a:pPr indent="0" marL="0">
-              <a:lnSpc>
-                <a:spcPct val="100000"/>
-              </a:lnSpc>
-              <a:buNone/>
-            </a:pPr>
-            <a:r>
-              <a:rPr lang="en-US" sz="3000" dirty="0">
-                <a:solidFill>
-                  <a:srgbClr val="3A3A3A"/>
-                </a:solidFill>
-                <a:latin typeface="Arial" pitchFamily="34" charset="0"/>
-                <a:ea typeface="Arial" pitchFamily="34" charset="-122"/>
-                <a:cs typeface="Arial" pitchFamily="34" charset="-120"/>
-              </a:rPr>
-              <a:t>В основном сценарии —</a:t>
-            </a:r>
-            <a:endParaRPr lang="en-US" sz="3000" dirty="0"/>
-          </a:p>
-          <a:p>
-            <a:pPr indent="0" marL="0">
-              <a:lnSpc>
-                <a:spcPct val="100000"/>
-              </a:lnSpc>
-              <a:buNone/>
-            </a:pPr>
-            <a:r>
-              <a:rPr lang="en-US" sz="3000" dirty="0">
-                <a:solidFill>
-                  <a:srgbClr val="3A3A3A"/>
-                </a:solidFill>
-                <a:latin typeface="Arial" pitchFamily="34" charset="0"/>
-                <a:ea typeface="Arial" pitchFamily="34" charset="-122"/>
-                <a:cs typeface="Arial" pitchFamily="34" charset="-120"/>
-              </a:rPr>
-              <a:t>по номеру телефона</a:t>
-            </a:r>
-            <a:endParaRPr lang="en-US" sz="3000" dirty="0"/>
-          </a:p>
-        </p:txBody>
-      </p:sp>
-      <p:sp>
-        <p:nvSpPr>
-          <p:cNvPr id="16" name="Shape 14"/>
-          <p:cNvSpPr/>
-          <p:nvPr/>
-        </p:nvSpPr>
-        <p:spPr>
-          <a:xfrm>
-            <a:off x="457200" y="4526280"/>
-            <a:ext cx="11274552" cy="1783080"/>
-          </a:xfrm>
-          <a:prstGeom prst="roundRect">
-            <a:avLst>
-              <a:gd name="adj" fmla="val 7179"/>
-            </a:avLst>
-          </a:prstGeom>
-          <a:solidFill>
-            <a:srgbClr val="FFFFFF"/>
-          </a:solidFill>
-          <a:ln/>
-          <a:effectLst>
-            <a:outerShdw sx="100000" sy="100000" kx="0" ky="0" algn="bl" rotWithShape="0" blurRad="101600" dist="12700" dir="5400000">
-              <a:srgbClr val="9A9A9A">
-                <a:alpha val="18000"/>
-              </a:srgbClr>
-            </a:outerShdw>
-          </a:effectLst>
-        </p:spPr>
-      </p:sp>
-      <p:sp>
-        <p:nvSpPr>
-          <p:cNvPr id="17" name="Text 15"/>
-          <p:cNvSpPr txBox="1"/>
-          <p:nvPr/>
-        </p:nvSpPr>
-        <p:spPr>
-          <a:xfrm>
-            <a:off x="777240" y="4681728"/>
-            <a:ext cx="10607040" cy="457200"/>
-          </a:xfrm>
-          <a:prstGeom prst="rect">
-            <a:avLst/>
-          </a:prstGeom>
-          <a:noFill/>
-          <a:ln/>
-        </p:spPr>
-        <p:txBody>
-          <a:bodyPr wrap="square" lIns="0" tIns="0" rIns="0" bIns="0" rtlCol="0" anchor="t"/>
-          <a:lstStyle/>
-          <a:p>
-            <a:pPr indent="0" marL="0">
-              <a:lnSpc>
-                <a:spcPct val="100000"/>
-              </a:lnSpc>
-              <a:buNone/>
-            </a:pPr>
-            <a:r>
-              <a:rPr lang="en-US" sz="3000" b="1" dirty="0">
-                <a:solidFill>
-                  <a:srgbClr val="EF3124"/>
-                </a:solidFill>
-                <a:latin typeface="Arial" pitchFamily="34" charset="0"/>
-                <a:ea typeface="Arial" pitchFamily="34" charset="-122"/>
-                <a:cs typeface="Arial" pitchFamily="34" charset="-120"/>
-              </a:rPr>
-              <a:t>Альтернативы: следить самому,</a:t>
-            </a:r>
-            <a:endParaRPr lang="en-US" sz="3000" dirty="0"/>
-          </a:p>
-        </p:txBody>
-      </p:sp>
-      <p:sp>
-        <p:nvSpPr>
-          <p:cNvPr id="18" name="Text 16"/>
-          <p:cNvSpPr txBox="1"/>
-          <p:nvPr/>
-        </p:nvSpPr>
-        <p:spPr>
-          <a:xfrm>
-            <a:off x="777240" y="5138928"/>
-            <a:ext cx="10607040" cy="457200"/>
-          </a:xfrm>
-          <a:prstGeom prst="rect">
-            <a:avLst/>
-          </a:prstGeom>
-          <a:noFill/>
-          <a:ln/>
-        </p:spPr>
-        <p:txBody>
-          <a:bodyPr wrap="square" lIns="0" tIns="0" rIns="0" bIns="0" rtlCol="0" anchor="t"/>
-          <a:lstStyle/>
-          <a:p>
-            <a:pPr indent="0" marL="0">
-              <a:lnSpc>
-                <a:spcPct val="100000"/>
-              </a:lnSpc>
-              <a:buNone/>
-            </a:pPr>
-            <a:r>
-              <a:rPr lang="en-US" sz="3000" b="1" dirty="0">
-                <a:solidFill>
-                  <a:srgbClr val="EF3124"/>
-                </a:solidFill>
-                <a:latin typeface="Arial" pitchFamily="34" charset="0"/>
-                <a:ea typeface="Arial" pitchFamily="34" charset="-122"/>
-                <a:cs typeface="Arial" pitchFamily="34" charset="-120"/>
-              </a:rPr>
-              <a:t>алерты Wise и Xe, ничего не делать</a:t>
-            </a:r>
-            <a:endParaRPr lang="en-US" sz="3000" dirty="0"/>
-          </a:p>
-        </p:txBody>
-      </p:sp>
-      <p:sp>
-        <p:nvSpPr>
-          <p:cNvPr id="19" name="Shape 17"/>
-          <p:cNvSpPr/>
-          <p:nvPr/>
-        </p:nvSpPr>
-        <p:spPr>
-          <a:xfrm>
-            <a:off x="777240" y="5687568"/>
-            <a:ext cx="10607040" cy="457200"/>
-          </a:xfrm>
-          <a:prstGeom prst="roundRect">
-            <a:avLst>
-              <a:gd name="adj" fmla="val 24000"/>
+              <a:gd name="adj" fmla="val 22581"/>
             </a:avLst>
           </a:prstGeom>
           <a:solidFill>
@@ -1865,14 +1515,14 @@
       </p:sp>
       <p:sp>
         <p:nvSpPr>
-          <p:cNvPr id="20" name="Text 18"/>
+          <p:cNvPr id="10" name="Text 8"/>
           <p:cNvSpPr txBox="1"/>
           <p:nvPr/>
         </p:nvSpPr>
         <p:spPr>
           <a:xfrm>
-            <a:off x="914400" y="5687568"/>
-            <a:ext cx="10332720" cy="457200"/>
+            <a:off x="640080" y="5257800"/>
+            <a:ext cx="4754880" cy="566928"/>
           </a:xfrm>
           <a:prstGeom prst="rect">
             <a:avLst/>
@@ -1884,7 +1534,7 @@
           <a:bodyPr wrap="square" lIns="0" tIns="0" rIns="0" bIns="0" rtlCol="0" anchor="ctr"/>
           <a:lstStyle/>
           <a:p>
-            <a:pPr indent="0" marL="0">
+            <a:pPr algn="ctr" indent="0" marL="0">
               <a:buNone/>
             </a:pPr>
             <a:r>
@@ -1896,9 +1546,48 @@
                 <a:ea typeface="Arial" pitchFamily="34" charset="-122"/>
                 <a:cs typeface="Arial" pitchFamily="34" charset="-120"/>
               </a:rPr>
-              <a:t>Момент выбирает банк — так не делает никто</a:t>
+              <a:t>Коридор RUB → UZS</a:t>
             </a:r>
             <a:endParaRPr lang="en-US" sz="3000" dirty="0"/>
+          </a:p>
+        </p:txBody>
+      </p:sp>
+      <p:sp>
+        <p:nvSpPr>
+          <p:cNvPr id="11" name="Text 9"/>
+          <p:cNvSpPr txBox="1"/>
+          <p:nvPr/>
+        </p:nvSpPr>
+        <p:spPr>
+          <a:xfrm>
+            <a:off x="5669280" y="5321808"/>
+            <a:ext cx="5943600" cy="457200"/>
+          </a:xfrm>
+          <a:prstGeom prst="rect">
+            <a:avLst/>
+          </a:prstGeom>
+          <a:noFill/>
+          <a:ln/>
+        </p:spPr>
+        <p:txBody>
+          <a:bodyPr wrap="square" lIns="0" tIns="0" rIns="0" bIns="0" rtlCol="0" anchor="ctr"/>
+          <a:lstStyle/>
+          <a:p>
+            <a:pPr algn="r" indent="0" marL="0">
+              <a:buNone/>
+            </a:pPr>
+            <a:r>
+              <a:rPr lang="en-US" sz="2000" dirty="0">
+                <a:solidFill>
+                  <a:srgbClr val="C9B4FF"/>
+                </a:solidFill>
+                <a:latin typeface="Arial" pitchFamily="34" charset="0"/>
+                <a:ea typeface="Arial" pitchFamily="34" charset="-122"/>
+                <a:cs typeface="Arial" pitchFamily="34" charset="-120"/>
+              </a:rPr>
+              <a:t>Сырых Ольга · Бикинеев Амир · Немкин Кирилл</a:t>
+            </a:r>
+            <a:endParaRPr lang="en-US" sz="2000" dirty="0"/>
           </a:p>
         </p:txBody>
       </p:sp>
@@ -2065,7 +1754,7 @@
                 <a:ea typeface="Arial" pitchFamily="34" charset="-122"/>
                 <a:cs typeface="Arial" pitchFamily="34" charset="-120"/>
               </a:rPr>
-              <a:t>Ценность</a:t>
+              <a:t>Проблема</a:t>
             </a:r>
             <a:pPr indent="0" marL="0">
               <a:buNone/>
@@ -2079,7 +1768,7 @@
                 <a:ea typeface="Arial" pitchFamily="34" charset="-122"/>
                 <a:cs typeface="Arial" pitchFamily="34" charset="-120"/>
               </a:rPr>
-              <a:t> и выбор коридора</a:t>
+              <a:t> и кто с ней живёт</a:t>
             </a:r>
             <a:endParaRPr lang="en-US" sz="3400" dirty="0"/>
           </a:p>
@@ -2087,57 +1776,18 @@
       </p:sp>
       <p:sp>
         <p:nvSpPr>
-          <p:cNvPr id="6" name="Text 4"/>
-          <p:cNvSpPr txBox="1"/>
+          <p:cNvPr id="6" name="Shape 4"/>
+          <p:cNvSpPr/>
           <p:nvPr/>
         </p:nvSpPr>
         <p:spPr>
           <a:xfrm>
-            <a:off x="10317175" y="868680"/>
-            <a:ext cx="1417320" cy="274320"/>
-          </a:xfrm>
-          <a:prstGeom prst="rect">
-            <a:avLst/>
-          </a:prstGeom>
-          <a:noFill/>
-          <a:ln/>
-        </p:spPr>
-        <p:txBody>
-          <a:bodyPr wrap="square" lIns="0" tIns="0" rIns="0" bIns="0" rtlCol="0" anchor="ctr"/>
-          <a:lstStyle/>
-          <a:p>
-            <a:pPr algn="ctr" indent="0" marL="0">
-              <a:buNone/>
-            </a:pPr>
-            <a:r>
-              <a:rPr lang="en-US" sz="1300" dirty="0">
-                <a:solidFill>
-                  <a:srgbClr val="5E5E5E"/>
-                </a:solidFill>
-                <a:latin typeface="Arial" pitchFamily="34" charset="0"/>
-                <a:ea typeface="Arial" pitchFamily="34" charset="-122"/>
-                <a:cs typeface="Arial" pitchFamily="34" charset="-120"/>
-              </a:rPr>
-              <a:t>30 секунд</a:t>
-            </a:r>
-            <a:endParaRPr lang="en-US" sz="1300" dirty="0"/>
-          </a:p>
-        </p:txBody>
-      </p:sp>
-      <p:sp>
-        <p:nvSpPr>
-          <p:cNvPr id="7" name="Shape 5"/>
-          <p:cNvSpPr/>
-          <p:nvPr/>
-        </p:nvSpPr>
-        <p:spPr>
-          <a:xfrm>
-            <a:off x="457200" y="1143000"/>
-            <a:ext cx="5532120" cy="1783080"/>
+            <a:off x="457200" y="1097280"/>
+            <a:ext cx="5532120" cy="2240280"/>
           </a:xfrm>
           <a:prstGeom prst="roundRect">
             <a:avLst>
-              <a:gd name="adj" fmla="val 7179"/>
+              <a:gd name="adj" fmla="val 5714"/>
             </a:avLst>
           </a:prstGeom>
           <a:solidFill>
@@ -2155,13 +1805,13 @@
       </p:sp>
       <p:sp>
         <p:nvSpPr>
-          <p:cNvPr id="8" name="Text 6"/>
+          <p:cNvPr id="7" name="Text 5"/>
           <p:cNvSpPr txBox="1"/>
           <p:nvPr/>
         </p:nvSpPr>
         <p:spPr>
           <a:xfrm>
-            <a:off x="731520" y="1280160"/>
+            <a:off x="731520" y="1225296"/>
             <a:ext cx="4983480" cy="457200"/>
           </a:xfrm>
           <a:prstGeom prst="rect">
@@ -2189,7 +1839,7 @@
                 <a:ea typeface="Arial" pitchFamily="34" charset="-122"/>
                 <a:cs typeface="Arial" pitchFamily="34" charset="-120"/>
               </a:rPr>
-              <a:t>Клиенту</a:t>
+              <a:t>Наш клиент</a:t>
             </a:r>
             <a:endParaRPr lang="en-US" sz="3000" dirty="0"/>
           </a:p>
@@ -2197,53 +1847,14 @@
       </p:sp>
       <p:sp>
         <p:nvSpPr>
-          <p:cNvPr id="9" name="Text 7"/>
+          <p:cNvPr id="8" name="Text 6"/>
           <p:cNvSpPr txBox="1"/>
           <p:nvPr/>
         </p:nvSpPr>
         <p:spPr>
           <a:xfrm>
-            <a:off x="731520" y="1719072"/>
-            <a:ext cx="4983480" cy="685800"/>
-          </a:xfrm>
-          <a:prstGeom prst="rect">
-            <a:avLst/>
-          </a:prstGeom>
-          <a:noFill/>
-          <a:ln/>
-        </p:spPr>
-        <p:txBody>
-          <a:bodyPr wrap="square" lIns="0" tIns="0" rIns="0" bIns="0" rtlCol="0" anchor="ctr"/>
-          <a:lstStyle/>
-          <a:p>
-            <a:pPr indent="0" marL="0">
-              <a:buNone/>
-            </a:pPr>
-            <a:r>
-              <a:rPr lang="en-US" sz="4600" b="1" dirty="0">
-                <a:solidFill>
-                  <a:srgbClr val="111111"/>
-                </a:solidFill>
-                <a:latin typeface="Arial" pitchFamily="34" charset="0"/>
-                <a:ea typeface="Arial" pitchFamily="34" charset="-122"/>
-                <a:cs typeface="Arial" pitchFamily="34" charset="-120"/>
-              </a:rPr>
-              <a:t>88 %</a:t>
-            </a:r>
-            <a:endParaRPr lang="en-US" sz="4600" dirty="0"/>
-          </a:p>
-        </p:txBody>
-      </p:sp>
-      <p:sp>
-        <p:nvSpPr>
-          <p:cNvPr id="10" name="Text 8"/>
-          <p:cNvSpPr txBox="1"/>
-          <p:nvPr/>
-        </p:nvSpPr>
-        <p:spPr>
-          <a:xfrm>
-            <a:off x="731520" y="2423160"/>
-            <a:ext cx="4983480" cy="457200"/>
+            <a:off x="731520" y="1737360"/>
+            <a:ext cx="4983480" cy="1371600"/>
           </a:xfrm>
           <a:prstGeom prst="rect">
             <a:avLst/>
@@ -2270,26 +1881,66 @@
                 <a:ea typeface="Arial" pitchFamily="34" charset="-122"/>
                 <a:cs typeface="Arial" pitchFamily="34" charset="-120"/>
               </a:rPr>
-              <a:t>зарплаты дома — перевод</a:t>
+              <a:t>Работает в Москве,</a:t>
             </a:r>
             <a:endParaRPr lang="en-US" sz="3000" dirty="0"/>
           </a:p>
+          <a:p>
+            <a:pPr indent="0" marL="0">
+              <a:lnSpc>
+                <a:spcPct val="100000"/>
+              </a:lnSpc>
+              <a:buNone/>
+            </a:pPr>
+            <a:r>
+              <a:rPr lang="en-US" sz="3000" dirty="0">
+                <a:solidFill>
+                  <a:srgbClr val="3A3A3A"/>
+                </a:solidFill>
+                <a:latin typeface="Arial" pitchFamily="34" charset="0"/>
+                <a:ea typeface="Arial" pitchFamily="34" charset="-122"/>
+                <a:cs typeface="Arial" pitchFamily="34" charset="-120"/>
+              </a:rPr>
+              <a:t>шлёт домой раз в месяц</a:t>
+            </a:r>
+            <a:endParaRPr lang="en-US" sz="3000" dirty="0"/>
+          </a:p>
+          <a:p>
+            <a:pPr indent="0" marL="0">
+              <a:lnSpc>
+                <a:spcPct val="100000"/>
+              </a:lnSpc>
+              <a:buNone/>
+            </a:pPr>
+            <a:r>
+              <a:rPr lang="en-US" sz="3000" dirty="0">
+                <a:solidFill>
+                  <a:srgbClr val="3A3A3A"/>
+                </a:solidFill>
+                <a:latin typeface="Arial" pitchFamily="34" charset="0"/>
+                <a:ea typeface="Arial" pitchFamily="34" charset="-122"/>
+                <a:cs typeface="Arial" pitchFamily="34" charset="-120"/>
+              </a:rPr>
+              <a:t>после расчёта</a:t>
+            </a:r>
+            <a:endParaRPr lang="en-US" sz="3000" dirty="0"/>
+          </a:p>
         </p:txBody>
       </p:sp>
       <p:sp>
         <p:nvSpPr>
-          <p:cNvPr id="11" name="Shape 9"/>
+          <p:cNvPr id="9" name="Shape 7"/>
           <p:cNvSpPr/>
           <p:nvPr/>
         </p:nvSpPr>
         <p:spPr>
           <a:xfrm>
-            <a:off x="6199632" y="1143000"/>
-            <a:ext cx="5532120" cy="1783080"/>
+            <a:off x="6199632" y="1097280"/>
+            <a:ext cx="5532120" cy="2240280"/>
           </a:xfrm>
           <a:prstGeom prst="roundRect">
             <a:avLst>
-              <a:gd name="adj" fmla="val 7179"/>
+              <a:gd name="adj" fmla="val 5714"/>
             </a:avLst>
           </a:prstGeom>
           <a:solidFill>
@@ -2307,13 +1958,13 @@
       </p:sp>
       <p:sp>
         <p:nvSpPr>
-          <p:cNvPr id="12" name="Text 10"/>
+          <p:cNvPr id="10" name="Text 8"/>
           <p:cNvSpPr txBox="1"/>
           <p:nvPr/>
         </p:nvSpPr>
         <p:spPr>
           <a:xfrm>
-            <a:off x="6473952" y="1280160"/>
+            <a:off x="6473952" y="1225296"/>
             <a:ext cx="4983480" cy="457200"/>
           </a:xfrm>
           <a:prstGeom prst="rect">
@@ -2341,7 +1992,7 @@
                 <a:ea typeface="Arial" pitchFamily="34" charset="-122"/>
                 <a:cs typeface="Arial" pitchFamily="34" charset="-120"/>
               </a:rPr>
-              <a:t>Банку</a:t>
+              <a:t>Чего он не видит</a:t>
             </a:r>
             <a:endParaRPr lang="en-US" sz="3000" dirty="0"/>
           </a:p>
@@ -2349,53 +2000,14 @@
       </p:sp>
       <p:sp>
         <p:nvSpPr>
-          <p:cNvPr id="13" name="Text 11"/>
+          <p:cNvPr id="11" name="Text 9"/>
           <p:cNvSpPr txBox="1"/>
           <p:nvPr/>
         </p:nvSpPr>
         <p:spPr>
           <a:xfrm>
-            <a:off x="6473952" y="1719072"/>
-            <a:ext cx="4983480" cy="685800"/>
-          </a:xfrm>
-          <a:prstGeom prst="rect">
-            <a:avLst/>
-          </a:prstGeom>
-          <a:noFill/>
-          <a:ln/>
-        </p:spPr>
-        <p:txBody>
-          <a:bodyPr wrap="square" lIns="0" tIns="0" rIns="0" bIns="0" rtlCol="0" anchor="ctr"/>
-          <a:lstStyle/>
-          <a:p>
-            <a:pPr indent="0" marL="0">
-              <a:buNone/>
-            </a:pPr>
-            <a:r>
-              <a:rPr lang="en-US" sz="4600" b="1" dirty="0">
-                <a:solidFill>
-                  <a:srgbClr val="111111"/>
-                </a:solidFill>
-                <a:latin typeface="Arial" pitchFamily="34" charset="0"/>
-                <a:ea typeface="Arial" pitchFamily="34" charset="-122"/>
-                <a:cs typeface="Arial" pitchFamily="34" charset="-120"/>
-              </a:rPr>
-              <a:t>40,5 млн ₽</a:t>
-            </a:r>
-            <a:endParaRPr lang="en-US" sz="4600" dirty="0"/>
-          </a:p>
-        </p:txBody>
-      </p:sp>
-      <p:sp>
-        <p:nvSpPr>
-          <p:cNvPr id="14" name="Text 12"/>
-          <p:cNvSpPr txBox="1"/>
-          <p:nvPr/>
-        </p:nvSpPr>
-        <p:spPr>
-          <a:xfrm>
-            <a:off x="6473952" y="2423160"/>
-            <a:ext cx="4983480" cy="457200"/>
+            <a:off x="6473952" y="1737360"/>
+            <a:ext cx="4983480" cy="1371600"/>
           </a:xfrm>
           <a:prstGeom prst="rect">
             <a:avLst/>
@@ -2422,30 +2034,70 @@
                 <a:ea typeface="Arial" pitchFamily="34" charset="-122"/>
                 <a:cs typeface="Arial" pitchFamily="34" charset="-120"/>
               </a:rPr>
-              <a:t>в год на 100 тыс. клиентов</a:t>
+              <a:t>Сколько дойдёт домой.</a:t>
             </a:r>
             <a:endParaRPr lang="en-US" sz="3000" dirty="0"/>
           </a:p>
+          <a:p>
+            <a:pPr indent="0" marL="0">
+              <a:lnSpc>
+                <a:spcPct val="100000"/>
+              </a:lnSpc>
+              <a:buNone/>
+            </a:pPr>
+            <a:r>
+              <a:rPr lang="en-US" sz="3000" dirty="0">
+                <a:solidFill>
+                  <a:srgbClr val="3A3A3A"/>
+                </a:solidFill>
+                <a:latin typeface="Arial" pitchFamily="34" charset="0"/>
+                <a:ea typeface="Arial" pitchFamily="34" charset="-122"/>
+                <a:cs typeface="Arial" pitchFamily="34" charset="-120"/>
+              </a:rPr>
+              <a:t>В переводе по телефону</a:t>
+            </a:r>
+            <a:endParaRPr lang="en-US" sz="3000" dirty="0"/>
+          </a:p>
+          <a:p>
+            <a:pPr indent="0" marL="0">
+              <a:lnSpc>
+                <a:spcPct val="100000"/>
+              </a:lnSpc>
+              <a:buNone/>
+            </a:pPr>
+            <a:r>
+              <a:rPr lang="en-US" sz="3000" dirty="0">
+                <a:solidFill>
+                  <a:srgbClr val="3A3A3A"/>
+                </a:solidFill>
+                <a:latin typeface="Arial" pitchFamily="34" charset="0"/>
+                <a:ea typeface="Arial" pitchFamily="34" charset="-122"/>
+                <a:cs typeface="Arial" pitchFamily="34" charset="-120"/>
+              </a:rPr>
+              <a:t>курса нет вообще</a:t>
+            </a:r>
+            <a:endParaRPr lang="en-US" sz="3000" dirty="0"/>
+          </a:p>
         </p:txBody>
       </p:sp>
       <p:sp>
         <p:nvSpPr>
-          <p:cNvPr id="15" name="Shape 13"/>
+          <p:cNvPr id="12" name="Shape 10"/>
           <p:cNvSpPr/>
           <p:nvPr/>
         </p:nvSpPr>
         <p:spPr>
           <a:xfrm>
-            <a:off x="457200" y="3127248"/>
-            <a:ext cx="11274552" cy="3246120"/>
+            <a:off x="457200" y="3474720"/>
+            <a:ext cx="11274552" cy="1371600"/>
           </a:xfrm>
           <a:prstGeom prst="roundRect">
             <a:avLst>
-              <a:gd name="adj" fmla="val 3944"/>
+              <a:gd name="adj" fmla="val 9333"/>
             </a:avLst>
           </a:prstGeom>
           <a:solidFill>
-            <a:srgbClr val="FFFFFF"/>
+            <a:srgbClr val="FDEAE8"/>
           </a:solidFill>
           <a:ln/>
           <a:effectLst>
@@ -2459,14 +2111,53 @@
       </p:sp>
       <p:sp>
         <p:nvSpPr>
-          <p:cNvPr id="16" name="Text 14"/>
+          <p:cNvPr id="13" name="Text 11"/>
           <p:cNvSpPr txBox="1"/>
           <p:nvPr/>
         </p:nvSpPr>
         <p:spPr>
           <a:xfrm>
-            <a:off x="777240" y="3255264"/>
-            <a:ext cx="10607040" cy="457200"/>
+            <a:off x="777240" y="3602736"/>
+            <a:ext cx="2743200" cy="731520"/>
+          </a:xfrm>
+          <a:prstGeom prst="rect">
+            <a:avLst/>
+          </a:prstGeom>
+          <a:noFill/>
+          <a:ln/>
+        </p:spPr>
+        <p:txBody>
+          <a:bodyPr wrap="square" lIns="0" tIns="0" rIns="0" bIns="0" rtlCol="0" anchor="ctr"/>
+          <a:lstStyle/>
+          <a:p>
+            <a:pPr indent="0" marL="0">
+              <a:buNone/>
+            </a:pPr>
+            <a:r>
+              <a:rPr lang="en-US" sz="4400" b="1" dirty="0">
+                <a:solidFill>
+                  <a:srgbClr val="EF3124"/>
+                </a:solidFill>
+                <a:latin typeface="Arial" pitchFamily="34" charset="0"/>
+                <a:ea typeface="Arial" pitchFamily="34" charset="-122"/>
+                <a:cs typeface="Arial" pitchFamily="34" charset="-120"/>
+              </a:rPr>
+              <a:t>4,87 %</a:t>
+            </a:r>
+            <a:endParaRPr lang="en-US" sz="4400" dirty="0"/>
+          </a:p>
+        </p:txBody>
+      </p:sp>
+      <p:sp>
+        <p:nvSpPr>
+          <p:cNvPr id="14" name="Text 12"/>
+          <p:cNvSpPr txBox="1"/>
+          <p:nvPr/>
+        </p:nvSpPr>
+        <p:spPr>
+          <a:xfrm>
+            <a:off x="3657600" y="3639312"/>
+            <a:ext cx="7863840" cy="457200"/>
           </a:xfrm>
           <a:prstGeom prst="rect">
             <a:avLst/>
@@ -2493,15 +2184,353 @@
                 <a:ea typeface="Arial" pitchFamily="34" charset="-122"/>
                 <a:cs typeface="Arial" pitchFamily="34" charset="-120"/>
               </a:rPr>
-              <a:t>Масштаб → выгода → метрика</a:t>
+              <a:t>столько курс ходит за месяц.</a:t>
             </a:r>
             <a:endParaRPr lang="en-US" sz="3000" dirty="0"/>
+          </a:p>
+        </p:txBody>
+      </p:sp>
+      <p:sp>
+        <p:nvSpPr>
+          <p:cNvPr id="15" name="Text 13"/>
+          <p:cNvSpPr txBox="1"/>
+          <p:nvPr/>
+        </p:nvSpPr>
+        <p:spPr>
+          <a:xfrm>
+            <a:off x="3657600" y="4096512"/>
+            <a:ext cx="7863840" cy="457200"/>
+          </a:xfrm>
+          <a:prstGeom prst="rect">
+            <a:avLst/>
+          </a:prstGeom>
+          <a:noFill/>
+          <a:ln/>
+        </p:spPr>
+        <p:txBody>
+          <a:bodyPr wrap="square" lIns="0" tIns="0" rIns="0" bIns="0" rtlCol="0" anchor="t"/>
+          <a:lstStyle/>
+          <a:p>
+            <a:pPr indent="0" marL="0">
+              <a:lnSpc>
+                <a:spcPct val="100000"/>
+              </a:lnSpc>
+              <a:buNone/>
+            </a:pPr>
+            <a:r>
+              <a:rPr lang="en-US" sz="3000" dirty="0">
+                <a:solidFill>
+                  <a:srgbClr val="3A3A3A"/>
+                </a:solidFill>
+                <a:latin typeface="Arial" pitchFamily="34" charset="0"/>
+                <a:ea typeface="Arial" pitchFamily="34" charset="-122"/>
+                <a:cs typeface="Arial" pitchFamily="34" charset="-120"/>
+              </a:rPr>
+              <a:t>Клиент выбирает день вслепую</a:t>
+            </a:r>
+            <a:endParaRPr lang="en-US" sz="3000" dirty="0"/>
+          </a:p>
+        </p:txBody>
+      </p:sp>
+      <p:sp>
+        <p:nvSpPr>
+          <p:cNvPr id="16" name="Shape 14"/>
+          <p:cNvSpPr/>
+          <p:nvPr/>
+        </p:nvSpPr>
+        <p:spPr>
+          <a:xfrm>
+            <a:off x="457200" y="4983480"/>
+            <a:ext cx="11274552" cy="1371600"/>
+          </a:xfrm>
+          <a:prstGeom prst="roundRect">
+            <a:avLst>
+              <a:gd name="adj" fmla="val 9333"/>
+            </a:avLst>
+          </a:prstGeom>
+          <a:solidFill>
+            <a:srgbClr val="FFFFFF"/>
+          </a:solidFill>
+          <a:ln/>
+          <a:effectLst>
+            <a:outerShdw sx="100000" sy="100000" kx="0" ky="0" algn="bl" rotWithShape="0" blurRad="101600" dist="12700" dir="5400000">
+              <a:srgbClr val="9A9A9A">
+                <a:alpha val="18000"/>
+              </a:srgbClr>
+            </a:outerShdw>
+          </a:effectLst>
+        </p:spPr>
+      </p:sp>
+      <p:sp>
+        <p:nvSpPr>
+          <p:cNvPr id="17" name="Text 15"/>
+          <p:cNvSpPr txBox="1"/>
+          <p:nvPr/>
+        </p:nvSpPr>
+        <p:spPr>
+          <a:xfrm>
+            <a:off x="777240" y="5120640"/>
+            <a:ext cx="10607040" cy="457200"/>
+          </a:xfrm>
+          <a:prstGeom prst="rect">
+            <a:avLst/>
+          </a:prstGeom>
+          <a:noFill/>
+          <a:ln/>
+        </p:spPr>
+        <p:txBody>
+          <a:bodyPr wrap="square" lIns="0" tIns="0" rIns="0" bIns="0" rtlCol="0" anchor="t"/>
+          <a:lstStyle/>
+          <a:p>
+            <a:pPr indent="0" marL="0">
+              <a:lnSpc>
+                <a:spcPct val="100000"/>
+              </a:lnSpc>
+              <a:buNone/>
+            </a:pPr>
+            <a:r>
+              <a:rPr lang="en-US" sz="3000" dirty="0">
+                <a:solidFill>
+                  <a:srgbClr val="3A3A3A"/>
+                </a:solidFill>
+                <a:latin typeface="Arial" pitchFamily="34" charset="0"/>
+                <a:ea typeface="Arial" pitchFamily="34" charset="-122"/>
+                <a:cs typeface="Arial" pitchFamily="34" charset="-120"/>
+              </a:rPr>
+              <a:t>Wise и Xe шлют алерт, когда курс дошёл до цели</a:t>
+            </a:r>
+            <a:endParaRPr lang="en-US" sz="3000" dirty="0"/>
+          </a:p>
+        </p:txBody>
+      </p:sp>
+      <p:sp>
+        <p:nvSpPr>
+          <p:cNvPr id="18" name="Text 16"/>
+          <p:cNvSpPr txBox="1"/>
+          <p:nvPr/>
+        </p:nvSpPr>
+        <p:spPr>
+          <a:xfrm>
+            <a:off x="777240" y="5623560"/>
+            <a:ext cx="10607040" cy="457200"/>
+          </a:xfrm>
+          <a:prstGeom prst="rect">
+            <a:avLst/>
+          </a:prstGeom>
+          <a:noFill/>
+          <a:ln/>
+        </p:spPr>
+        <p:txBody>
+          <a:bodyPr wrap="square" lIns="0" tIns="0" rIns="0" bIns="0" rtlCol="0" anchor="t"/>
+          <a:lstStyle/>
+          <a:p>
+            <a:pPr indent="0" marL="0">
+              <a:lnSpc>
+                <a:spcPct val="100000"/>
+              </a:lnSpc>
+              <a:buNone/>
+            </a:pPr>
+            <a:r>
+              <a:rPr lang="en-US" sz="3000" b="1" dirty="0">
+                <a:solidFill>
+                  <a:srgbClr val="111111"/>
+                </a:solidFill>
+                <a:latin typeface="Arial" pitchFamily="34" charset="0"/>
+                <a:ea typeface="Arial" pitchFamily="34" charset="-122"/>
+                <a:cs typeface="Arial" pitchFamily="34" charset="-120"/>
+              </a:rPr>
+              <a:t>Цель ставит клиент. За него момент не выбирает никто</a:t>
+            </a:r>
+            <a:endParaRPr lang="en-US" sz="3000" dirty="0"/>
+          </a:p>
+        </p:txBody>
+      </p:sp>
+    </p:spTree>
+  </p:cSld>
+  <p:clrMapOvr>
+    <a:masterClrMapping/>
+  </p:clrMapOvr>
+</p:sld>
+</file>
+
+<file path=ppt/slides/slide3.xml><?xml version="1.0" encoding="utf-8"?>
+<p:sld xmlns:a="http://schemas.openxmlformats.org/drawingml/2006/main" xmlns:r="http://schemas.openxmlformats.org/officeDocument/2006/relationships" xmlns:p="http://schemas.openxmlformats.org/presentationml/2006/main">
+  <p:cSld name="Slide 3">
+    <p:bg>
+      <p:bgPr>
+        <a:solidFill>
+          <a:srgbClr val="EBEBEB"/>
+        </a:solidFill>
+      </p:bgPr>
+    </p:bg>
+    <p:spTree>
+      <p:nvGrpSpPr>
+        <p:cNvPr id="1" name=""/>
+        <p:cNvGrpSpPr/>
+        <p:nvPr/>
+      </p:nvGrpSpPr>
+      <p:grpSpPr>
+        <a:xfrm>
+          <a:off x="0" y="0"/>
+          <a:ext cx="0" cy="0"/>
+          <a:chOff x="0" y="0"/>
+          <a:chExt cx="0" cy="0"/>
+        </a:xfrm>
+      </p:grpSpPr>
+      <p:sp>
+        <p:nvSpPr>
+          <p:cNvPr id="2" name="Shape 0"/>
+          <p:cNvSpPr/>
+          <p:nvPr/>
+        </p:nvSpPr>
+        <p:spPr>
+          <a:xfrm rot="-300000">
+            <a:off x="10317175" y="219456"/>
+            <a:ext cx="1353312" cy="453542"/>
+          </a:xfrm>
+          <a:prstGeom prst="rect">
+            <a:avLst/>
+          </a:prstGeom>
+          <a:solidFill>
+            <a:srgbClr val="EF3124"/>
+          </a:solidFill>
+          <a:ln/>
+        </p:spPr>
+      </p:sp>
+      <p:sp>
+        <p:nvSpPr>
+          <p:cNvPr id="3" name="Text 1"/>
+          <p:cNvSpPr txBox="1"/>
+          <p:nvPr/>
+        </p:nvSpPr>
+        <p:spPr>
+          <a:xfrm rot="-300000">
+            <a:off x="10317175" y="234086"/>
+            <a:ext cx="1353312" cy="219456"/>
+          </a:xfrm>
+          <a:prstGeom prst="rect">
+            <a:avLst/>
+          </a:prstGeom>
+          <a:noFill/>
+          <a:ln/>
+        </p:spPr>
+        <p:txBody>
+          <a:bodyPr wrap="square" lIns="0" tIns="0" rIns="0" bIns="0" rtlCol="0" anchor="ctr"/>
+          <a:lstStyle/>
+          <a:p>
+            <a:pPr algn="ctr" indent="0" marL="0">
+              <a:buNone/>
+            </a:pPr>
+            <a:r>
+              <a:rPr lang="en-US" sz="1040" b="1" dirty="0">
+                <a:solidFill>
+                  <a:srgbClr val="FFFFFF"/>
+                </a:solidFill>
+                <a:latin typeface="Arial" pitchFamily="34" charset="0"/>
+                <a:ea typeface="Arial" pitchFamily="34" charset="-122"/>
+                <a:cs typeface="Arial" pitchFamily="34" charset="-120"/>
+              </a:rPr>
+              <a:t>АЛЬФА</a:t>
+            </a:r>
+            <a:endParaRPr lang="en-US" sz="1040" dirty="0"/>
+          </a:p>
+        </p:txBody>
+      </p:sp>
+      <p:sp>
+        <p:nvSpPr>
+          <p:cNvPr id="4" name="Text 2"/>
+          <p:cNvSpPr txBox="1"/>
+          <p:nvPr/>
+        </p:nvSpPr>
+        <p:spPr>
+          <a:xfrm rot="-300000">
+            <a:off x="10317175" y="431597"/>
+            <a:ext cx="1353312" cy="219456"/>
+          </a:xfrm>
+          <a:prstGeom prst="rect">
+            <a:avLst/>
+          </a:prstGeom>
+          <a:noFill/>
+          <a:ln/>
+        </p:spPr>
+        <p:txBody>
+          <a:bodyPr wrap="square" lIns="0" tIns="0" rIns="0" bIns="0" rtlCol="0" anchor="ctr"/>
+          <a:lstStyle/>
+          <a:p>
+            <a:pPr algn="ctr" indent="0" marL="0">
+              <a:buNone/>
+            </a:pPr>
+            <a:r>
+              <a:rPr lang="en-US" sz="1040" b="1" dirty="0">
+                <a:solidFill>
+                  <a:srgbClr val="FFFFFF"/>
+                </a:solidFill>
+                <a:latin typeface="Arial" pitchFamily="34" charset="0"/>
+                <a:ea typeface="Arial" pitchFamily="34" charset="-122"/>
+                <a:cs typeface="Arial" pitchFamily="34" charset="-120"/>
+              </a:rPr>
+              <a:t>БУДУЩЕЕ</a:t>
+            </a:r>
+            <a:endParaRPr lang="en-US" sz="1040" dirty="0"/>
+          </a:p>
+        </p:txBody>
+      </p:sp>
+      <p:sp>
+        <p:nvSpPr>
+          <p:cNvPr id="5" name="Text 3"/>
+          <p:cNvSpPr txBox="1"/>
+          <p:nvPr/>
+        </p:nvSpPr>
+        <p:spPr>
+          <a:xfrm>
+            <a:off x="457200" y="256032"/>
+            <a:ext cx="9601200" cy="640080"/>
+          </a:xfrm>
+          <a:prstGeom prst="rect">
+            <a:avLst/>
+          </a:prstGeom>
+          <a:noFill/>
+          <a:ln/>
+        </p:spPr>
+        <p:txBody>
+          <a:bodyPr wrap="square" lIns="0" tIns="0" rIns="0" bIns="0" rtlCol="0" anchor="ctr"/>
+          <a:lstStyle/>
+          <a:p>
+            <a:pPr indent="0" marL="0">
+              <a:buNone/>
+            </a:pPr>
+            <a:r>
+              <a:rPr lang="en-US" sz="3400" b="1" dirty="0">
+                <a:solidFill>
+                  <a:srgbClr val="EF3124"/>
+                </a:solidFill>
+                <a:latin typeface="Arial" pitchFamily="34" charset="0"/>
+                <a:ea typeface="Arial" pitchFamily="34" charset="-122"/>
+                <a:cs typeface="Arial" pitchFamily="34" charset="-120"/>
+              </a:rPr>
+              <a:t>Какой коридор</a:t>
+            </a:r>
+            <a:pPr indent="0" marL="0">
+              <a:buNone/>
+            </a:pPr>
+            <a:r>
+              <a:rPr lang="en-US" sz="3400" b="1" dirty="0">
+                <a:solidFill>
+                  <a:srgbClr val="111111"/>
+                </a:solidFill>
+                <a:latin typeface="Arial" pitchFamily="34" charset="0"/>
+                <a:ea typeface="Arial" pitchFamily="34" charset="-122"/>
+                <a:cs typeface="Arial" pitchFamily="34" charset="-120"/>
+              </a:rPr>
+              <a:t> и почему</a:t>
+            </a:r>
+            <a:endParaRPr lang="en-US" sz="3400" dirty="0"/>
           </a:p>
         </p:txBody>
       </p:sp>
       <p:graphicFrame>
         <p:nvGraphicFramePr>
-          <p:cNvPr id="3" name="Table 0"/>
+          <p:cNvPr id="4" name="Table 0"/>
           <p:cNvGraphicFramePr>
             <a:graphicFrameLocks noGrp="1"/>
           </p:cNvGraphicFramePr>
@@ -2514,8 +2543,8 @@
           </p:nvPr>
         </p:nvGraphicFramePr>
         <p:xfrm>
-          <a:off x="777240" y="3767328"/>
-          <a:ext cx="10607040" cy="914400"/>
+          <a:off x="457200" y="1097280"/>
+          <a:ext cx="11274552" cy="914400"/>
         </p:xfrm>
         <a:graphic>
           <a:graphicData uri="http://schemas.openxmlformats.org/drawingml/2006/table">
@@ -2523,9 +2552,10 @@
               <a:tblPr/>
               <a:tblGrid>
                 <a:gridCol w="2743200"/>
-                <a:gridCol w="3108960"/>
-                <a:gridCol w="2011680"/>
-                <a:gridCol w="2743200"/>
+                <a:gridCol w="1463040"/>
+                <a:gridCol w="2194560"/>
+                <a:gridCol w="2560320"/>
+                <a:gridCol w="2313432"/>
               </a:tblGrid>
               <a:tr h="457200">
                 <a:tc>
@@ -2613,7 +2643,7 @@
                           <a:ea typeface="Arial" pitchFamily="34" charset="-122"/>
                           <a:cs typeface="Arial" pitchFamily="34" charset="-120"/>
                         </a:rPr>
-                        <a:t>Отправителей</a:t>
+                        <a:t>Lift</a:t>
                       </a:r>
                       <a:endParaRPr lang="en-US" sz="3000" dirty="0">
                         <a:latin typeface="Arial" charset="0"/>
@@ -2681,7 +2711,7 @@
                           <a:ea typeface="Arial" pitchFamily="34" charset="-122"/>
                           <a:cs typeface="Arial" pitchFamily="34" charset="-120"/>
                         </a:rPr>
-                        <a:t>Чек</a:t>
+                        <a:t>Сигналов</a:t>
                       </a:r>
                       <a:endParaRPr lang="en-US" sz="3000" dirty="0">
                         <a:latin typeface="Arial" charset="0"/>
@@ -2749,7 +2779,75 @@
                           <a:ea typeface="Arial" pitchFamily="34" charset="-122"/>
                           <a:cs typeface="Arial" pitchFamily="34" charset="-120"/>
                         </a:rPr>
-                        <a:t>Доля з/п</a:t>
+                        <a:t>На перевод</a:t>
+                      </a:r>
+                      <a:endParaRPr lang="en-US" sz="3000" dirty="0">
+                        <a:latin typeface="Arial" charset="0"/>
+                        <a:ea typeface="Arial" charset="0"/>
+                        <a:cs typeface="Arial" charset="0"/>
+                      </a:endParaRPr>
+                    </a:p>
+                  </a:txBody>
+                  <a:tcPr marL="91440" marR="91440" marT="45720" marB="45720" anchor="ctr">
+                    <a:lnL w="12700" cap="flat" cmpd="sng" algn="ctr">
+                      <a:solidFill>
+                        <a:srgbClr val="D6D6D6"/>
+                      </a:solidFill>
+                      <a:prstDash val="solid"/>
+                      <a:round/>
+                      <a:headEnd type="none" w="med" len="med"/>
+                      <a:tailEnd type="none" w="med" len="med"/>
+                    </a:lnL>
+                    <a:lnR w="12700" cap="flat" cmpd="sng" algn="ctr">
+                      <a:solidFill>
+                        <a:srgbClr val="D6D6D6"/>
+                      </a:solidFill>
+                      <a:prstDash val="solid"/>
+                      <a:round/>
+                      <a:headEnd type="none" w="med" len="med"/>
+                      <a:tailEnd type="none" w="med" len="med"/>
+                    </a:lnR>
+                    <a:lnT w="12700" cap="flat" cmpd="sng" algn="ctr">
+                      <a:solidFill>
+                        <a:srgbClr val="D6D6D6"/>
+                      </a:solidFill>
+                      <a:prstDash val="solid"/>
+                      <a:round/>
+                      <a:headEnd type="none" w="med" len="med"/>
+                      <a:tailEnd type="none" w="med" len="med"/>
+                    </a:lnT>
+                    <a:lnB w="12700" cap="flat" cmpd="sng" algn="ctr">
+                      <a:solidFill>
+                        <a:srgbClr val="D6D6D6"/>
+                      </a:solidFill>
+                      <a:prstDash val="solid"/>
+                      <a:round/>
+                      <a:headEnd type="none" w="med" len="med"/>
+                      <a:tailEnd type="none" w="med" len="med"/>
+                    </a:lnB>
+                    <a:solidFill>
+                      <a:srgbClr val="111111"/>
+                    </a:solidFill>
+                  </a:tcPr>
+                </a:tc>
+                <a:tc>
+                  <a:txBody>
+                    <a:bodyPr/>
+                    <a:lstStyle/>
+                    <a:p>
+                      <a:pPr indent="0" marL="0">
+                        <a:buNone/>
+                      </a:pPr>
+                      <a:r>
+                        <a:rPr lang="en-US" sz="3000" b="1" dirty="0">
+                          <a:solidFill>
+                            <a:srgbClr val="FFFFFF"/>
+                          </a:solidFill>
+                          <a:latin typeface="Arial" pitchFamily="34" charset="0"/>
+                          <a:ea typeface="Arial" pitchFamily="34" charset="-122"/>
+                          <a:cs typeface="Arial" pitchFamily="34" charset="-120"/>
+                        </a:rPr>
+                        <a:t>За год</a:t>
                       </a:r>
                       <a:endParaRPr lang="en-US" sz="3000" dirty="0">
                         <a:latin typeface="Arial" charset="0"/>
@@ -2887,7 +2985,7 @@
                           <a:ea typeface="Arial" pitchFamily="34" charset="-122"/>
                           <a:cs typeface="Arial" pitchFamily="34" charset="-120"/>
                         </a:rPr>
-                        <a:t>1,50 млн</a:t>
+                        <a:t>1,25</a:t>
                       </a:r>
                       <a:endParaRPr lang="en-US" sz="3000" dirty="0">
                         <a:latin typeface="Arial" charset="0"/>
@@ -2955,7 +3053,7 @@
                           <a:ea typeface="Arial" pitchFamily="34" charset="-122"/>
                           <a:cs typeface="Arial" pitchFamily="34" charset="-120"/>
                         </a:rPr>
-                        <a:t>45 000 ₽</a:t>
+                        <a:t>0,61</a:t>
                       </a:r>
                       <a:endParaRPr lang="en-US" sz="3000" dirty="0">
                         <a:latin typeface="Arial" charset="0"/>
@@ -3023,7 +3121,75 @@
                           <a:ea typeface="Arial" pitchFamily="34" charset="-122"/>
                           <a:cs typeface="Arial" pitchFamily="34" charset="-120"/>
                         </a:rPr>
-                        <a:t>88 %</a:t>
+                        <a:t>117 ₽</a:t>
+                      </a:r>
+                      <a:endParaRPr lang="en-US" sz="3000" dirty="0">
+                        <a:latin typeface="Arial" charset="0"/>
+                        <a:ea typeface="Arial" charset="0"/>
+                        <a:cs typeface="Arial" charset="0"/>
+                      </a:endParaRPr>
+                    </a:p>
+                  </a:txBody>
+                  <a:tcPr marL="91440" marR="91440" marT="45720" marB="45720" anchor="ctr">
+                    <a:lnL w="12700" cap="flat" cmpd="sng" algn="ctr">
+                      <a:solidFill>
+                        <a:srgbClr val="D6D6D6"/>
+                      </a:solidFill>
+                      <a:prstDash val="solid"/>
+                      <a:round/>
+                      <a:headEnd type="none" w="med" len="med"/>
+                      <a:tailEnd type="none" w="med" len="med"/>
+                    </a:lnL>
+                    <a:lnR w="12700" cap="flat" cmpd="sng" algn="ctr">
+                      <a:solidFill>
+                        <a:srgbClr val="D6D6D6"/>
+                      </a:solidFill>
+                      <a:prstDash val="solid"/>
+                      <a:round/>
+                      <a:headEnd type="none" w="med" len="med"/>
+                      <a:tailEnd type="none" w="med" len="med"/>
+                    </a:lnR>
+                    <a:lnT w="12700" cap="flat" cmpd="sng" algn="ctr">
+                      <a:solidFill>
+                        <a:srgbClr val="D6D6D6"/>
+                      </a:solidFill>
+                      <a:prstDash val="solid"/>
+                      <a:round/>
+                      <a:headEnd type="none" w="med" len="med"/>
+                      <a:tailEnd type="none" w="med" len="med"/>
+                    </a:lnT>
+                    <a:lnB w="12700" cap="flat" cmpd="sng" algn="ctr">
+                      <a:solidFill>
+                        <a:srgbClr val="D6D6D6"/>
+                      </a:solidFill>
+                      <a:prstDash val="solid"/>
+                      <a:round/>
+                      <a:headEnd type="none" w="med" len="med"/>
+                      <a:tailEnd type="none" w="med" len="med"/>
+                    </a:lnB>
+                    <a:solidFill>
+                      <a:srgbClr val="C3F53C"/>
+                    </a:solidFill>
+                  </a:tcPr>
+                </a:tc>
+                <a:tc>
+                  <a:txBody>
+                    <a:bodyPr/>
+                    <a:lstStyle/>
+                    <a:p>
+                      <a:pPr indent="0" marL="0">
+                        <a:buNone/>
+                      </a:pPr>
+                      <a:r>
+                        <a:rPr lang="en-US" sz="3000" b="1" dirty="0">
+                          <a:solidFill>
+                            <a:srgbClr val="111111"/>
+                          </a:solidFill>
+                          <a:latin typeface="Arial" pitchFamily="34" charset="0"/>
+                          <a:ea typeface="Arial" pitchFamily="34" charset="-122"/>
+                          <a:cs typeface="Arial" pitchFamily="34" charset="-120"/>
+                        </a:rPr>
+                        <a:t>1 053 ₽</a:t>
                       </a:r>
                       <a:endParaRPr lang="en-US" sz="3000" dirty="0">
                         <a:latin typeface="Arial" charset="0"/>
@@ -3161,7 +3327,7 @@
                           <a:ea typeface="Arial" pitchFamily="34" charset="-122"/>
                           <a:cs typeface="Arial" pitchFamily="34" charset="-120"/>
                         </a:rPr>
-                        <a:t>1,38 млн</a:t>
+                        <a:t>1,24</a:t>
                       </a:r>
                       <a:endParaRPr lang="en-US" sz="3000" dirty="0">
                         <a:latin typeface="Arial" charset="0"/>
@@ -3229,7 +3395,7 @@
                           <a:ea typeface="Arial" pitchFamily="34" charset="-122"/>
                           <a:cs typeface="Arial" pitchFamily="34" charset="-120"/>
                         </a:rPr>
-                        <a:t>20 000 ₽</a:t>
+                        <a:t>1,14</a:t>
                       </a:r>
                       <a:endParaRPr lang="en-US" sz="3000" dirty="0">
                         <a:latin typeface="Arial" charset="0"/>
@@ -3297,7 +3463,417 @@
                           <a:ea typeface="Arial" pitchFamily="34" charset="-122"/>
                           <a:cs typeface="Arial" pitchFamily="34" charset="-120"/>
                         </a:rPr>
-                        <a:t>151 %</a:t>
+                        <a:t>46 ₽</a:t>
+                      </a:r>
+                      <a:endParaRPr lang="en-US" sz="3000" dirty="0">
+                        <a:latin typeface="Arial" charset="0"/>
+                        <a:ea typeface="Arial" charset="0"/>
+                        <a:cs typeface="Arial" charset="0"/>
+                      </a:endParaRPr>
+                    </a:p>
+                  </a:txBody>
+                  <a:tcPr marL="91440" marR="91440" marT="45720" marB="45720" anchor="ctr">
+                    <a:lnL w="12700" cap="flat" cmpd="sng" algn="ctr">
+                      <a:solidFill>
+                        <a:srgbClr val="D6D6D6"/>
+                      </a:solidFill>
+                      <a:prstDash val="solid"/>
+                      <a:round/>
+                      <a:headEnd type="none" w="med" len="med"/>
+                      <a:tailEnd type="none" w="med" len="med"/>
+                    </a:lnL>
+                    <a:lnR w="12700" cap="flat" cmpd="sng" algn="ctr">
+                      <a:solidFill>
+                        <a:srgbClr val="D6D6D6"/>
+                      </a:solidFill>
+                      <a:prstDash val="solid"/>
+                      <a:round/>
+                      <a:headEnd type="none" w="med" len="med"/>
+                      <a:tailEnd type="none" w="med" len="med"/>
+                    </a:lnR>
+                    <a:lnT w="12700" cap="flat" cmpd="sng" algn="ctr">
+                      <a:solidFill>
+                        <a:srgbClr val="D6D6D6"/>
+                      </a:solidFill>
+                      <a:prstDash val="solid"/>
+                      <a:round/>
+                      <a:headEnd type="none" w="med" len="med"/>
+                      <a:tailEnd type="none" w="med" len="med"/>
+                    </a:lnT>
+                    <a:lnB w="12700" cap="flat" cmpd="sng" algn="ctr">
+                      <a:solidFill>
+                        <a:srgbClr val="D6D6D6"/>
+                      </a:solidFill>
+                      <a:prstDash val="solid"/>
+                      <a:round/>
+                      <a:headEnd type="none" w="med" len="med"/>
+                      <a:tailEnd type="none" w="med" len="med"/>
+                    </a:lnB>
+                    <a:solidFill>
+                      <a:srgbClr val="FFFFFF"/>
+                    </a:solidFill>
+                  </a:tcPr>
+                </a:tc>
+                <a:tc>
+                  <a:txBody>
+                    <a:bodyPr/>
+                    <a:lstStyle/>
+                    <a:p>
+                      <a:pPr indent="0" marL="0">
+                        <a:buNone/>
+                      </a:pPr>
+                      <a:r>
+                        <a:rPr lang="en-US" sz="3000" dirty="0">
+                          <a:solidFill>
+                            <a:srgbClr val="3A3A3A"/>
+                          </a:solidFill>
+                          <a:latin typeface="Arial" pitchFamily="34" charset="0"/>
+                          <a:ea typeface="Arial" pitchFamily="34" charset="-122"/>
+                          <a:cs typeface="Arial" pitchFamily="34" charset="-120"/>
+                        </a:rPr>
+                        <a:t>416 ₽</a:t>
+                      </a:r>
+                      <a:endParaRPr lang="en-US" sz="3000" dirty="0">
+                        <a:latin typeface="Arial" charset="0"/>
+                        <a:ea typeface="Arial" charset="0"/>
+                        <a:cs typeface="Arial" charset="0"/>
+                      </a:endParaRPr>
+                    </a:p>
+                  </a:txBody>
+                  <a:tcPr marL="91440" marR="91440" marT="45720" marB="45720" anchor="ctr">
+                    <a:lnL w="12700" cap="flat" cmpd="sng" algn="ctr">
+                      <a:solidFill>
+                        <a:srgbClr val="D6D6D6"/>
+                      </a:solidFill>
+                      <a:prstDash val="solid"/>
+                      <a:round/>
+                      <a:headEnd type="none" w="med" len="med"/>
+                      <a:tailEnd type="none" w="med" len="med"/>
+                    </a:lnL>
+                    <a:lnR w="12700" cap="flat" cmpd="sng" algn="ctr">
+                      <a:solidFill>
+                        <a:srgbClr val="D6D6D6"/>
+                      </a:solidFill>
+                      <a:prstDash val="solid"/>
+                      <a:round/>
+                      <a:headEnd type="none" w="med" len="med"/>
+                      <a:tailEnd type="none" w="med" len="med"/>
+                    </a:lnR>
+                    <a:lnT w="12700" cap="flat" cmpd="sng" algn="ctr">
+                      <a:solidFill>
+                        <a:srgbClr val="D6D6D6"/>
+                      </a:solidFill>
+                      <a:prstDash val="solid"/>
+                      <a:round/>
+                      <a:headEnd type="none" w="med" len="med"/>
+                      <a:tailEnd type="none" w="med" len="med"/>
+                    </a:lnT>
+                    <a:lnB w="12700" cap="flat" cmpd="sng" algn="ctr">
+                      <a:solidFill>
+                        <a:srgbClr val="D6D6D6"/>
+                      </a:solidFill>
+                      <a:prstDash val="solid"/>
+                      <a:round/>
+                      <a:headEnd type="none" w="med" len="med"/>
+                      <a:tailEnd type="none" w="med" len="med"/>
+                    </a:lnB>
+                    <a:solidFill>
+                      <a:srgbClr val="FFFFFF"/>
+                    </a:solidFill>
+                  </a:tcPr>
+                </a:tc>
+              </a:tr>
+              <a:tr h="457200">
+                <a:tc>
+                  <a:txBody>
+                    <a:bodyPr/>
+                    <a:lstStyle/>
+                    <a:p>
+                      <a:pPr indent="0" marL="0">
+                        <a:buNone/>
+                      </a:pPr>
+                      <a:r>
+                        <a:rPr lang="en-US" sz="3000" dirty="0">
+                          <a:solidFill>
+                            <a:srgbClr val="3A3A3A"/>
+                          </a:solidFill>
+                          <a:latin typeface="Arial" pitchFamily="34" charset="0"/>
+                          <a:ea typeface="Arial" pitchFamily="34" charset="-122"/>
+                          <a:cs typeface="Arial" pitchFamily="34" charset="-120"/>
+                        </a:rPr>
+                        <a:t>Армения</a:t>
+                      </a:r>
+                      <a:endParaRPr lang="en-US" sz="3000" dirty="0">
+                        <a:latin typeface="Arial" charset="0"/>
+                        <a:ea typeface="Arial" charset="0"/>
+                        <a:cs typeface="Arial" charset="0"/>
+                      </a:endParaRPr>
+                    </a:p>
+                  </a:txBody>
+                  <a:tcPr marL="91440" marR="91440" marT="45720" marB="45720" anchor="ctr">
+                    <a:lnL w="12700" cap="flat" cmpd="sng" algn="ctr">
+                      <a:solidFill>
+                        <a:srgbClr val="D6D6D6"/>
+                      </a:solidFill>
+                      <a:prstDash val="solid"/>
+                      <a:round/>
+                      <a:headEnd type="none" w="med" len="med"/>
+                      <a:tailEnd type="none" w="med" len="med"/>
+                    </a:lnL>
+                    <a:lnR w="12700" cap="flat" cmpd="sng" algn="ctr">
+                      <a:solidFill>
+                        <a:srgbClr val="D6D6D6"/>
+                      </a:solidFill>
+                      <a:prstDash val="solid"/>
+                      <a:round/>
+                      <a:headEnd type="none" w="med" len="med"/>
+                      <a:tailEnd type="none" w="med" len="med"/>
+                    </a:lnR>
+                    <a:lnT w="12700" cap="flat" cmpd="sng" algn="ctr">
+                      <a:solidFill>
+                        <a:srgbClr val="D6D6D6"/>
+                      </a:solidFill>
+                      <a:prstDash val="solid"/>
+                      <a:round/>
+                      <a:headEnd type="none" w="med" len="med"/>
+                      <a:tailEnd type="none" w="med" len="med"/>
+                    </a:lnT>
+                    <a:lnB w="12700" cap="flat" cmpd="sng" algn="ctr">
+                      <a:solidFill>
+                        <a:srgbClr val="D6D6D6"/>
+                      </a:solidFill>
+                      <a:prstDash val="solid"/>
+                      <a:round/>
+                      <a:headEnd type="none" w="med" len="med"/>
+                      <a:tailEnd type="none" w="med" len="med"/>
+                    </a:lnB>
+                    <a:solidFill>
+                      <a:srgbClr val="FFFFFF"/>
+                    </a:solidFill>
+                  </a:tcPr>
+                </a:tc>
+                <a:tc>
+                  <a:txBody>
+                    <a:bodyPr/>
+                    <a:lstStyle/>
+                    <a:p>
+                      <a:pPr indent="0" marL="0">
+                        <a:buNone/>
+                      </a:pPr>
+                      <a:r>
+                        <a:rPr lang="en-US" sz="3000" dirty="0">
+                          <a:solidFill>
+                            <a:srgbClr val="3A3A3A"/>
+                          </a:solidFill>
+                          <a:latin typeface="Arial" pitchFamily="34" charset="0"/>
+                          <a:ea typeface="Arial" pitchFamily="34" charset="-122"/>
+                          <a:cs typeface="Arial" pitchFamily="34" charset="-120"/>
+                        </a:rPr>
+                        <a:t>1,24</a:t>
+                      </a:r>
+                      <a:endParaRPr lang="en-US" sz="3000" dirty="0">
+                        <a:latin typeface="Arial" charset="0"/>
+                        <a:ea typeface="Arial" charset="0"/>
+                        <a:cs typeface="Arial" charset="0"/>
+                      </a:endParaRPr>
+                    </a:p>
+                  </a:txBody>
+                  <a:tcPr marL="91440" marR="91440" marT="45720" marB="45720" anchor="ctr">
+                    <a:lnL w="12700" cap="flat" cmpd="sng" algn="ctr">
+                      <a:solidFill>
+                        <a:srgbClr val="D6D6D6"/>
+                      </a:solidFill>
+                      <a:prstDash val="solid"/>
+                      <a:round/>
+                      <a:headEnd type="none" w="med" len="med"/>
+                      <a:tailEnd type="none" w="med" len="med"/>
+                    </a:lnL>
+                    <a:lnR w="12700" cap="flat" cmpd="sng" algn="ctr">
+                      <a:solidFill>
+                        <a:srgbClr val="D6D6D6"/>
+                      </a:solidFill>
+                      <a:prstDash val="solid"/>
+                      <a:round/>
+                      <a:headEnd type="none" w="med" len="med"/>
+                      <a:tailEnd type="none" w="med" len="med"/>
+                    </a:lnR>
+                    <a:lnT w="12700" cap="flat" cmpd="sng" algn="ctr">
+                      <a:solidFill>
+                        <a:srgbClr val="D6D6D6"/>
+                      </a:solidFill>
+                      <a:prstDash val="solid"/>
+                      <a:round/>
+                      <a:headEnd type="none" w="med" len="med"/>
+                      <a:tailEnd type="none" w="med" len="med"/>
+                    </a:lnT>
+                    <a:lnB w="12700" cap="flat" cmpd="sng" algn="ctr">
+                      <a:solidFill>
+                        <a:srgbClr val="D6D6D6"/>
+                      </a:solidFill>
+                      <a:prstDash val="solid"/>
+                      <a:round/>
+                      <a:headEnd type="none" w="med" len="med"/>
+                      <a:tailEnd type="none" w="med" len="med"/>
+                    </a:lnB>
+                    <a:solidFill>
+                      <a:srgbClr val="FFFFFF"/>
+                    </a:solidFill>
+                  </a:tcPr>
+                </a:tc>
+                <a:tc>
+                  <a:txBody>
+                    <a:bodyPr/>
+                    <a:lstStyle/>
+                    <a:p>
+                      <a:pPr indent="0" marL="0">
+                        <a:buNone/>
+                      </a:pPr>
+                      <a:r>
+                        <a:rPr lang="en-US" sz="3000" dirty="0">
+                          <a:solidFill>
+                            <a:srgbClr val="3A3A3A"/>
+                          </a:solidFill>
+                          <a:latin typeface="Arial" pitchFamily="34" charset="0"/>
+                          <a:ea typeface="Arial" pitchFamily="34" charset="-122"/>
+                          <a:cs typeface="Arial" pitchFamily="34" charset="-120"/>
+                        </a:rPr>
+                        <a:t>1,11</a:t>
+                      </a:r>
+                      <a:endParaRPr lang="en-US" sz="3000" dirty="0">
+                        <a:latin typeface="Arial" charset="0"/>
+                        <a:ea typeface="Arial" charset="0"/>
+                        <a:cs typeface="Arial" charset="0"/>
+                      </a:endParaRPr>
+                    </a:p>
+                  </a:txBody>
+                  <a:tcPr marL="91440" marR="91440" marT="45720" marB="45720" anchor="ctr">
+                    <a:lnL w="12700" cap="flat" cmpd="sng" algn="ctr">
+                      <a:solidFill>
+                        <a:srgbClr val="D6D6D6"/>
+                      </a:solidFill>
+                      <a:prstDash val="solid"/>
+                      <a:round/>
+                      <a:headEnd type="none" w="med" len="med"/>
+                      <a:tailEnd type="none" w="med" len="med"/>
+                    </a:lnL>
+                    <a:lnR w="12700" cap="flat" cmpd="sng" algn="ctr">
+                      <a:solidFill>
+                        <a:srgbClr val="D6D6D6"/>
+                      </a:solidFill>
+                      <a:prstDash val="solid"/>
+                      <a:round/>
+                      <a:headEnd type="none" w="med" len="med"/>
+                      <a:tailEnd type="none" w="med" len="med"/>
+                    </a:lnR>
+                    <a:lnT w="12700" cap="flat" cmpd="sng" algn="ctr">
+                      <a:solidFill>
+                        <a:srgbClr val="D6D6D6"/>
+                      </a:solidFill>
+                      <a:prstDash val="solid"/>
+                      <a:round/>
+                      <a:headEnd type="none" w="med" len="med"/>
+                      <a:tailEnd type="none" w="med" len="med"/>
+                    </a:lnT>
+                    <a:lnB w="12700" cap="flat" cmpd="sng" algn="ctr">
+                      <a:solidFill>
+                        <a:srgbClr val="D6D6D6"/>
+                      </a:solidFill>
+                      <a:prstDash val="solid"/>
+                      <a:round/>
+                      <a:headEnd type="none" w="med" len="med"/>
+                      <a:tailEnd type="none" w="med" len="med"/>
+                    </a:lnB>
+                    <a:solidFill>
+                      <a:srgbClr val="FFFFFF"/>
+                    </a:solidFill>
+                  </a:tcPr>
+                </a:tc>
+                <a:tc>
+                  <a:txBody>
+                    <a:bodyPr/>
+                    <a:lstStyle/>
+                    <a:p>
+                      <a:pPr indent="0" marL="0">
+                        <a:buNone/>
+                      </a:pPr>
+                      <a:r>
+                        <a:rPr lang="en-US" sz="3000" dirty="0">
+                          <a:solidFill>
+                            <a:srgbClr val="3A3A3A"/>
+                          </a:solidFill>
+                          <a:latin typeface="Arial" pitchFamily="34" charset="0"/>
+                          <a:ea typeface="Arial" pitchFamily="34" charset="-122"/>
+                          <a:cs typeface="Arial" pitchFamily="34" charset="-120"/>
+                        </a:rPr>
+                        <a:t>50 ₽</a:t>
+                      </a:r>
+                      <a:endParaRPr lang="en-US" sz="3000" dirty="0">
+                        <a:latin typeface="Arial" charset="0"/>
+                        <a:ea typeface="Arial" charset="0"/>
+                        <a:cs typeface="Arial" charset="0"/>
+                      </a:endParaRPr>
+                    </a:p>
+                  </a:txBody>
+                  <a:tcPr marL="91440" marR="91440" marT="45720" marB="45720" anchor="ctr">
+                    <a:lnL w="12700" cap="flat" cmpd="sng" algn="ctr">
+                      <a:solidFill>
+                        <a:srgbClr val="D6D6D6"/>
+                      </a:solidFill>
+                      <a:prstDash val="solid"/>
+                      <a:round/>
+                      <a:headEnd type="none" w="med" len="med"/>
+                      <a:tailEnd type="none" w="med" len="med"/>
+                    </a:lnL>
+                    <a:lnR w="12700" cap="flat" cmpd="sng" algn="ctr">
+                      <a:solidFill>
+                        <a:srgbClr val="D6D6D6"/>
+                      </a:solidFill>
+                      <a:prstDash val="solid"/>
+                      <a:round/>
+                      <a:headEnd type="none" w="med" len="med"/>
+                      <a:tailEnd type="none" w="med" len="med"/>
+                    </a:lnR>
+                    <a:lnT w="12700" cap="flat" cmpd="sng" algn="ctr">
+                      <a:solidFill>
+                        <a:srgbClr val="D6D6D6"/>
+                      </a:solidFill>
+                      <a:prstDash val="solid"/>
+                      <a:round/>
+                      <a:headEnd type="none" w="med" len="med"/>
+                      <a:tailEnd type="none" w="med" len="med"/>
+                    </a:lnT>
+                    <a:lnB w="12700" cap="flat" cmpd="sng" algn="ctr">
+                      <a:solidFill>
+                        <a:srgbClr val="D6D6D6"/>
+                      </a:solidFill>
+                      <a:prstDash val="solid"/>
+                      <a:round/>
+                      <a:headEnd type="none" w="med" len="med"/>
+                      <a:tailEnd type="none" w="med" len="med"/>
+                    </a:lnB>
+                    <a:solidFill>
+                      <a:srgbClr val="FFFFFF"/>
+                    </a:solidFill>
+                  </a:tcPr>
+                </a:tc>
+                <a:tc>
+                  <a:txBody>
+                    <a:bodyPr/>
+                    <a:lstStyle/>
+                    <a:p>
+                      <a:pPr indent="0" marL="0">
+                        <a:buNone/>
+                      </a:pPr>
+                      <a:r>
+                        <a:rPr lang="en-US" sz="3000" dirty="0">
+                          <a:solidFill>
+                            <a:srgbClr val="3A3A3A"/>
+                          </a:solidFill>
+                          <a:latin typeface="Arial" pitchFamily="34" charset="0"/>
+                          <a:ea typeface="Arial" pitchFamily="34" charset="-122"/>
+                          <a:cs typeface="Arial" pitchFamily="34" charset="-120"/>
+                        </a:rPr>
+                        <a:t>450 ₽</a:t>
                       </a:r>
                       <a:endParaRPr lang="en-US" sz="3000" dirty="0">
                         <a:latin typeface="Arial" charset="0"/>
@@ -3435,7 +4011,7 @@
                           <a:ea typeface="Arial" pitchFamily="34" charset="-122"/>
                           <a:cs typeface="Arial" pitchFamily="34" charset="-120"/>
                         </a:rPr>
-                        <a:t>1,36 млн</a:t>
+                        <a:t>1,20</a:t>
                       </a:r>
                       <a:endParaRPr lang="en-US" sz="3000" dirty="0">
                         <a:latin typeface="Arial" charset="0"/>
@@ -3503,7 +4079,7 @@
                           <a:ea typeface="Arial" pitchFamily="34" charset="-122"/>
                           <a:cs typeface="Arial" pitchFamily="34" charset="-120"/>
                         </a:rPr>
-                        <a:t>20 000 ₽</a:t>
+                        <a:t>1,11</a:t>
                       </a:r>
                       <a:endParaRPr lang="en-US" sz="3000" dirty="0">
                         <a:latin typeface="Arial" charset="0"/>
@@ -3571,7 +4147,75 @@
                           <a:ea typeface="Arial" pitchFamily="34" charset="-122"/>
                           <a:cs typeface="Arial" pitchFamily="34" charset="-120"/>
                         </a:rPr>
-                        <a:t>112 %</a:t>
+                        <a:t>38 ₽</a:t>
+                      </a:r>
+                      <a:endParaRPr lang="en-US" sz="3000" dirty="0">
+                        <a:latin typeface="Arial" charset="0"/>
+                        <a:ea typeface="Arial" charset="0"/>
+                        <a:cs typeface="Arial" charset="0"/>
+                      </a:endParaRPr>
+                    </a:p>
+                  </a:txBody>
+                  <a:tcPr marL="91440" marR="91440" marT="45720" marB="45720" anchor="ctr">
+                    <a:lnL w="12700" cap="flat" cmpd="sng" algn="ctr">
+                      <a:solidFill>
+                        <a:srgbClr val="D6D6D6"/>
+                      </a:solidFill>
+                      <a:prstDash val="solid"/>
+                      <a:round/>
+                      <a:headEnd type="none" w="med" len="med"/>
+                      <a:tailEnd type="none" w="med" len="med"/>
+                    </a:lnL>
+                    <a:lnR w="12700" cap="flat" cmpd="sng" algn="ctr">
+                      <a:solidFill>
+                        <a:srgbClr val="D6D6D6"/>
+                      </a:solidFill>
+                      <a:prstDash val="solid"/>
+                      <a:round/>
+                      <a:headEnd type="none" w="med" len="med"/>
+                      <a:tailEnd type="none" w="med" len="med"/>
+                    </a:lnR>
+                    <a:lnT w="12700" cap="flat" cmpd="sng" algn="ctr">
+                      <a:solidFill>
+                        <a:srgbClr val="D6D6D6"/>
+                      </a:solidFill>
+                      <a:prstDash val="solid"/>
+                      <a:round/>
+                      <a:headEnd type="none" w="med" len="med"/>
+                      <a:tailEnd type="none" w="med" len="med"/>
+                    </a:lnT>
+                    <a:lnB w="12700" cap="flat" cmpd="sng" algn="ctr">
+                      <a:solidFill>
+                        <a:srgbClr val="D6D6D6"/>
+                      </a:solidFill>
+                      <a:prstDash val="solid"/>
+                      <a:round/>
+                      <a:headEnd type="none" w="med" len="med"/>
+                      <a:tailEnd type="none" w="med" len="med"/>
+                    </a:lnB>
+                    <a:solidFill>
+                      <a:srgbClr val="FFFFFF"/>
+                    </a:solidFill>
+                  </a:tcPr>
+                </a:tc>
+                <a:tc>
+                  <a:txBody>
+                    <a:bodyPr/>
+                    <a:lstStyle/>
+                    <a:p>
+                      <a:pPr indent="0" marL="0">
+                        <a:buNone/>
+                      </a:pPr>
+                      <a:r>
+                        <a:rPr lang="en-US" sz="3000" dirty="0">
+                          <a:solidFill>
+                            <a:srgbClr val="3A3A3A"/>
+                          </a:solidFill>
+                          <a:latin typeface="Arial" pitchFamily="34" charset="0"/>
+                          <a:ea typeface="Arial" pitchFamily="34" charset="-122"/>
+                          <a:cs typeface="Arial" pitchFamily="34" charset="-120"/>
+                        </a:rPr>
+                        <a:t>341 ₽</a:t>
                       </a:r>
                       <a:endParaRPr lang="en-US" sz="3000" dirty="0">
                         <a:latin typeface="Arial" charset="0"/>
@@ -3641,7 +4285,7 @@
                           <a:ea typeface="Arial" pitchFamily="34" charset="-122"/>
                           <a:cs typeface="Arial" pitchFamily="34" charset="-120"/>
                         </a:rPr>
-                        <a:t>Армения</a:t>
+                        <a:t>Казахстан</a:t>
                       </a:r>
                       <a:endParaRPr lang="en-US" sz="3000" dirty="0">
                         <a:latin typeface="Arial" charset="0"/>
@@ -3709,7 +4353,7 @@
                           <a:ea typeface="Arial" pitchFamily="34" charset="-122"/>
                           <a:cs typeface="Arial" pitchFamily="34" charset="-120"/>
                         </a:rPr>
-                        <a:t>0,30 млн</a:t>
+                        <a:t>1,13</a:t>
                       </a:r>
                       <a:endParaRPr lang="en-US" sz="3000" dirty="0">
                         <a:latin typeface="Arial" charset="0"/>
@@ -3777,7 +4421,7 @@
                           <a:ea typeface="Arial" pitchFamily="34" charset="-122"/>
                           <a:cs typeface="Arial" pitchFamily="34" charset="-120"/>
                         </a:rPr>
-                        <a:t>35 000 ₽</a:t>
+                        <a:t>1,11</a:t>
                       </a:r>
                       <a:endParaRPr lang="en-US" sz="3000" dirty="0">
                         <a:latin typeface="Arial" charset="0"/>
@@ -3845,7 +4489,75 @@
                           <a:ea typeface="Arial" pitchFamily="34" charset="-122"/>
                           <a:cs typeface="Arial" pitchFamily="34" charset="-120"/>
                         </a:rPr>
-                        <a:t>60 %</a:t>
+                        <a:t>17 ₽</a:t>
+                      </a:r>
+                      <a:endParaRPr lang="en-US" sz="3000" dirty="0">
+                        <a:latin typeface="Arial" charset="0"/>
+                        <a:ea typeface="Arial" charset="0"/>
+                        <a:cs typeface="Arial" charset="0"/>
+                      </a:endParaRPr>
+                    </a:p>
+                  </a:txBody>
+                  <a:tcPr marL="91440" marR="91440" marT="45720" marB="45720" anchor="ctr">
+                    <a:lnL w="12700" cap="flat" cmpd="sng" algn="ctr">
+                      <a:solidFill>
+                        <a:srgbClr val="D6D6D6"/>
+                      </a:solidFill>
+                      <a:prstDash val="solid"/>
+                      <a:round/>
+                      <a:headEnd type="none" w="med" len="med"/>
+                      <a:tailEnd type="none" w="med" len="med"/>
+                    </a:lnL>
+                    <a:lnR w="12700" cap="flat" cmpd="sng" algn="ctr">
+                      <a:solidFill>
+                        <a:srgbClr val="D6D6D6"/>
+                      </a:solidFill>
+                      <a:prstDash val="solid"/>
+                      <a:round/>
+                      <a:headEnd type="none" w="med" len="med"/>
+                      <a:tailEnd type="none" w="med" len="med"/>
+                    </a:lnR>
+                    <a:lnT w="12700" cap="flat" cmpd="sng" algn="ctr">
+                      <a:solidFill>
+                        <a:srgbClr val="D6D6D6"/>
+                      </a:solidFill>
+                      <a:prstDash val="solid"/>
+                      <a:round/>
+                      <a:headEnd type="none" w="med" len="med"/>
+                      <a:tailEnd type="none" w="med" len="med"/>
+                    </a:lnT>
+                    <a:lnB w="12700" cap="flat" cmpd="sng" algn="ctr">
+                      <a:solidFill>
+                        <a:srgbClr val="D6D6D6"/>
+                      </a:solidFill>
+                      <a:prstDash val="solid"/>
+                      <a:round/>
+                      <a:headEnd type="none" w="med" len="med"/>
+                      <a:tailEnd type="none" w="med" len="med"/>
+                    </a:lnB>
+                    <a:solidFill>
+                      <a:srgbClr val="FFFFFF"/>
+                    </a:solidFill>
+                  </a:tcPr>
+                </a:tc>
+                <a:tc>
+                  <a:txBody>
+                    <a:bodyPr/>
+                    <a:lstStyle/>
+                    <a:p>
+                      <a:pPr indent="0" marL="0">
+                        <a:buNone/>
+                      </a:pPr>
+                      <a:r>
+                        <a:rPr lang="en-US" sz="3000" dirty="0">
+                          <a:solidFill>
+                            <a:srgbClr val="3A3A3A"/>
+                          </a:solidFill>
+                          <a:latin typeface="Arial" pitchFamily="34" charset="0"/>
+                          <a:ea typeface="Arial" pitchFamily="34" charset="-122"/>
+                          <a:cs typeface="Arial" pitchFamily="34" charset="-120"/>
+                        </a:rPr>
+                        <a:t>153 ₽</a:t>
                       </a:r>
                       <a:endParaRPr lang="en-US" sz="3000" dirty="0">
                         <a:latin typeface="Arial" charset="0"/>
@@ -3901,242 +4613,20 @@
           </a:graphicData>
         </a:graphic>
       </p:graphicFrame>
-    </p:spTree>
-  </p:cSld>
-  <p:clrMapOvr>
-    <a:masterClrMapping/>
-  </p:clrMapOvr>
-</p:sld>
-</file>
-
-<file path=ppt/slides/slide3.xml><?xml version="1.0" encoding="utf-8"?>
-<p:sld xmlns:a="http://schemas.openxmlformats.org/drawingml/2006/main" xmlns:r="http://schemas.openxmlformats.org/officeDocument/2006/relationships" xmlns:p="http://schemas.openxmlformats.org/presentationml/2006/main">
-  <p:cSld name="Slide 3">
-    <p:bg>
-      <p:bgPr>
-        <a:solidFill>
-          <a:srgbClr val="EBEBEB"/>
-        </a:solidFill>
-      </p:bgPr>
-    </p:bg>
-    <p:spTree>
-      <p:nvGrpSpPr>
-        <p:cNvPr id="1" name=""/>
-        <p:cNvGrpSpPr/>
-        <p:nvPr/>
-      </p:nvGrpSpPr>
-      <p:grpSpPr>
-        <a:xfrm>
-          <a:off x="0" y="0"/>
-          <a:ext cx="0" cy="0"/>
-          <a:chOff x="0" y="0"/>
-          <a:chExt cx="0" cy="0"/>
-        </a:xfrm>
-      </p:grpSpPr>
-      <p:sp>
-        <p:nvSpPr>
-          <p:cNvPr id="2" name="Shape 0"/>
+      <p:sp>
+        <p:nvSpPr>
+          <p:cNvPr id="7" name="Shape 4"/>
           <p:cNvSpPr/>
           <p:nvPr/>
         </p:nvSpPr>
         <p:spPr>
-          <a:xfrm rot="-300000">
-            <a:off x="10317175" y="219456"/>
-            <a:ext cx="1353312" cy="453542"/>
-          </a:xfrm>
-          <a:prstGeom prst="rect">
-            <a:avLst/>
-          </a:prstGeom>
-          <a:solidFill>
-            <a:srgbClr val="EF3124"/>
-          </a:solidFill>
-          <a:ln/>
-        </p:spPr>
-      </p:sp>
-      <p:sp>
-        <p:nvSpPr>
-          <p:cNvPr id="3" name="Text 1"/>
-          <p:cNvSpPr txBox="1"/>
-          <p:nvPr/>
-        </p:nvSpPr>
-        <p:spPr>
-          <a:xfrm rot="-300000">
-            <a:off x="10317175" y="234086"/>
-            <a:ext cx="1353312" cy="219456"/>
-          </a:xfrm>
-          <a:prstGeom prst="rect">
-            <a:avLst/>
-          </a:prstGeom>
-          <a:noFill/>
-          <a:ln/>
-        </p:spPr>
-        <p:txBody>
-          <a:bodyPr wrap="square" lIns="0" tIns="0" rIns="0" bIns="0" rtlCol="0" anchor="ctr"/>
-          <a:lstStyle/>
-          <a:p>
-            <a:pPr algn="ctr" indent="0" marL="0">
-              <a:buNone/>
-            </a:pPr>
-            <a:r>
-              <a:rPr lang="en-US" sz="1040" b="1" dirty="0">
-                <a:solidFill>
-                  <a:srgbClr val="FFFFFF"/>
-                </a:solidFill>
-                <a:latin typeface="Arial" pitchFamily="34" charset="0"/>
-                <a:ea typeface="Arial" pitchFamily="34" charset="-122"/>
-                <a:cs typeface="Arial" pitchFamily="34" charset="-120"/>
-              </a:rPr>
-              <a:t>АЛЬФА</a:t>
-            </a:r>
-            <a:endParaRPr lang="en-US" sz="1040" dirty="0"/>
-          </a:p>
-        </p:txBody>
-      </p:sp>
-      <p:sp>
-        <p:nvSpPr>
-          <p:cNvPr id="4" name="Text 2"/>
-          <p:cNvSpPr txBox="1"/>
-          <p:nvPr/>
-        </p:nvSpPr>
-        <p:spPr>
-          <a:xfrm rot="-300000">
-            <a:off x="10317175" y="431597"/>
-            <a:ext cx="1353312" cy="219456"/>
-          </a:xfrm>
-          <a:prstGeom prst="rect">
-            <a:avLst/>
-          </a:prstGeom>
-          <a:noFill/>
-          <a:ln/>
-        </p:spPr>
-        <p:txBody>
-          <a:bodyPr wrap="square" lIns="0" tIns="0" rIns="0" bIns="0" rtlCol="0" anchor="ctr"/>
-          <a:lstStyle/>
-          <a:p>
-            <a:pPr algn="ctr" indent="0" marL="0">
-              <a:buNone/>
-            </a:pPr>
-            <a:r>
-              <a:rPr lang="en-US" sz="1040" b="1" dirty="0">
-                <a:solidFill>
-                  <a:srgbClr val="FFFFFF"/>
-                </a:solidFill>
-                <a:latin typeface="Arial" pitchFamily="34" charset="0"/>
-                <a:ea typeface="Arial" pitchFamily="34" charset="-122"/>
-                <a:cs typeface="Arial" pitchFamily="34" charset="-120"/>
-              </a:rPr>
-              <a:t>БУДУЩЕЕ</a:t>
-            </a:r>
-            <a:endParaRPr lang="en-US" sz="1040" dirty="0"/>
-          </a:p>
-        </p:txBody>
-      </p:sp>
-      <p:sp>
-        <p:nvSpPr>
-          <p:cNvPr id="5" name="Text 3"/>
-          <p:cNvSpPr txBox="1"/>
-          <p:nvPr/>
-        </p:nvSpPr>
-        <p:spPr>
           <a:xfrm>
-            <a:off x="457200" y="256032"/>
-            <a:ext cx="9601200" cy="640080"/>
-          </a:xfrm>
-          <a:prstGeom prst="rect">
-            <a:avLst/>
-          </a:prstGeom>
-          <a:noFill/>
-          <a:ln/>
-        </p:spPr>
-        <p:txBody>
-          <a:bodyPr wrap="square" lIns="0" tIns="0" rIns="0" bIns="0" rtlCol="0" anchor="ctr"/>
-          <a:lstStyle/>
-          <a:p>
-            <a:pPr indent="0" marL="0">
-              <a:buNone/>
-            </a:pPr>
-            <a:r>
-              <a:rPr lang="en-US" sz="3400" b="1" dirty="0">
-                <a:solidFill>
-                  <a:srgbClr val="EF3124"/>
-                </a:solidFill>
-                <a:latin typeface="Arial" pitchFamily="34" charset="0"/>
-                <a:ea typeface="Arial" pitchFamily="34" charset="-122"/>
-                <a:cs typeface="Arial" pitchFamily="34" charset="-120"/>
-              </a:rPr>
-              <a:t>Как это</a:t>
-            </a:r>
-            <a:pPr indent="0" marL="0">
-              <a:buNone/>
-            </a:pPr>
-            <a:r>
-              <a:rPr lang="en-US" sz="3400" b="1" dirty="0">
-                <a:solidFill>
-                  <a:srgbClr val="111111"/>
-                </a:solidFill>
-                <a:latin typeface="Arial" pitchFamily="34" charset="0"/>
-                <a:ea typeface="Arial" pitchFamily="34" charset="-122"/>
-                <a:cs typeface="Arial" pitchFamily="34" charset="-120"/>
-              </a:rPr>
-              <a:t> устроено</a:t>
-            </a:r>
-            <a:endParaRPr lang="en-US" sz="3400" dirty="0"/>
-          </a:p>
-        </p:txBody>
-      </p:sp>
-      <p:sp>
-        <p:nvSpPr>
-          <p:cNvPr id="6" name="Text 4"/>
-          <p:cNvSpPr txBox="1"/>
-          <p:nvPr/>
-        </p:nvSpPr>
-        <p:spPr>
-          <a:xfrm>
-            <a:off x="10317175" y="868680"/>
-            <a:ext cx="1417320" cy="274320"/>
-          </a:xfrm>
-          <a:prstGeom prst="rect">
-            <a:avLst/>
-          </a:prstGeom>
-          <a:noFill/>
-          <a:ln/>
-        </p:spPr>
-        <p:txBody>
-          <a:bodyPr wrap="square" lIns="0" tIns="0" rIns="0" bIns="0" rtlCol="0" anchor="ctr"/>
-          <a:lstStyle/>
-          <a:p>
-            <a:pPr algn="ctr" indent="0" marL="0">
-              <a:buNone/>
-            </a:pPr>
-            <a:r>
-              <a:rPr lang="en-US" sz="1300" dirty="0">
-                <a:solidFill>
-                  <a:srgbClr val="5E5E5E"/>
-                </a:solidFill>
-                <a:latin typeface="Arial" pitchFamily="34" charset="0"/>
-                <a:ea typeface="Arial" pitchFamily="34" charset="-122"/>
-                <a:cs typeface="Arial" pitchFamily="34" charset="-120"/>
-              </a:rPr>
-              <a:t>1 минута</a:t>
-            </a:r>
-            <a:endParaRPr lang="en-US" sz="1300" dirty="0"/>
-          </a:p>
-        </p:txBody>
-      </p:sp>
-      <p:sp>
-        <p:nvSpPr>
-          <p:cNvPr id="7" name="Shape 5"/>
-          <p:cNvSpPr/>
-          <p:nvPr/>
-        </p:nvSpPr>
-        <p:spPr>
-          <a:xfrm>
-            <a:off x="457200" y="1143000"/>
-            <a:ext cx="3703320" cy="2286000"/>
+            <a:off x="457200" y="4617720"/>
+            <a:ext cx="5532120" cy="1737360"/>
           </a:xfrm>
           <a:prstGeom prst="roundRect">
             <a:avLst>
-              <a:gd name="adj" fmla="val 5600"/>
+              <a:gd name="adj" fmla="val 7368"/>
             </a:avLst>
           </a:prstGeom>
           <a:solidFill>
@@ -4154,14 +4644,14 @@
       </p:sp>
       <p:sp>
         <p:nvSpPr>
-          <p:cNvPr id="8" name="Text 6"/>
+          <p:cNvPr id="8" name="Text 5"/>
           <p:cNvSpPr txBox="1"/>
           <p:nvPr/>
         </p:nvSpPr>
         <p:spPr>
           <a:xfrm>
-            <a:off x="713232" y="1280160"/>
-            <a:ext cx="3200400" cy="457200"/>
+            <a:off x="731520" y="4736592"/>
+            <a:ext cx="4983480" cy="457200"/>
           </a:xfrm>
           <a:prstGeom prst="rect">
             <a:avLst/>
@@ -4188,7 +4678,7 @@
                 <a:ea typeface="Arial" pitchFamily="34" charset="-122"/>
                 <a:cs typeface="Arial" pitchFamily="34" charset="-120"/>
               </a:rPr>
-              <a:t>Данные</a:t>
+              <a:t>Взяли Узбекистан</a:t>
             </a:r>
             <a:endParaRPr lang="en-US" sz="3000" dirty="0"/>
           </a:p>
@@ -4196,14 +4686,14 @@
       </p:sp>
       <p:sp>
         <p:nvSpPr>
-          <p:cNvPr id="9" name="Text 7"/>
+          <p:cNvPr id="9" name="Text 6"/>
           <p:cNvSpPr txBox="1"/>
           <p:nvPr/>
         </p:nvSpPr>
         <p:spPr>
           <a:xfrm>
-            <a:off x="713232" y="1783080"/>
-            <a:ext cx="3246120" cy="1371600"/>
+            <a:off x="731520" y="5230368"/>
+            <a:ext cx="4983480" cy="914400"/>
           </a:xfrm>
           <a:prstGeom prst="rect">
             <a:avLst/>
@@ -4230,7 +4720,7 @@
                 <a:ea typeface="Arial" pitchFamily="34" charset="-122"/>
                 <a:cs typeface="Arial" pitchFamily="34" charset="-120"/>
               </a:rPr>
-              <a:t>ЦБ РФ 2018–2026</a:t>
+              <a:t>Лучшая модель, вдвое</a:t>
             </a:r>
             <a:endParaRPr lang="en-US" sz="3000" dirty="0"/>
           </a:p>
@@ -4250,50 +4740,30 @@
                 <a:ea typeface="Arial" pitchFamily="34" charset="-122"/>
                 <a:cs typeface="Arial" pitchFamily="34" charset="-120"/>
               </a:rPr>
-              <a:t>MOEX, нацбанки</a:t>
+              <a:t>больше денег клиенту</a:t>
             </a:r>
             <a:endParaRPr lang="en-US" sz="3000" dirty="0"/>
           </a:p>
-          <a:p>
-            <a:pPr indent="0" marL="0">
-              <a:lnSpc>
-                <a:spcPct val="100000"/>
-              </a:lnSpc>
-              <a:buNone/>
-            </a:pPr>
-            <a:r>
-              <a:rPr lang="en-US" sz="3000" dirty="0">
-                <a:solidFill>
-                  <a:srgbClr val="3A3A3A"/>
-                </a:solidFill>
-                <a:latin typeface="Arial" pitchFamily="34" charset="0"/>
-                <a:ea typeface="Arial" pitchFamily="34" charset="-122"/>
-                <a:cs typeface="Arial" pitchFamily="34" charset="-120"/>
-              </a:rPr>
-              <a:t>новости GDELT</a:t>
-            </a:r>
-            <a:endParaRPr lang="en-US" sz="3000" dirty="0"/>
-          </a:p>
         </p:txBody>
       </p:sp>
       <p:sp>
         <p:nvSpPr>
-          <p:cNvPr id="10" name="Shape 8"/>
+          <p:cNvPr id="10" name="Shape 7"/>
           <p:cNvSpPr/>
           <p:nvPr/>
         </p:nvSpPr>
         <p:spPr>
           <a:xfrm>
-            <a:off x="4370832" y="1143000"/>
-            <a:ext cx="3703320" cy="2286000"/>
+            <a:off x="6199632" y="4617720"/>
+            <a:ext cx="5532120" cy="1737360"/>
           </a:xfrm>
           <a:prstGeom prst="roundRect">
             <a:avLst>
-              <a:gd name="adj" fmla="val 5600"/>
+              <a:gd name="adj" fmla="val 7368"/>
             </a:avLst>
           </a:prstGeom>
           <a:solidFill>
-            <a:srgbClr val="FFFFFF"/>
+            <a:srgbClr val="FDEAE8"/>
           </a:solidFill>
           <a:ln/>
           <a:effectLst>
@@ -4307,14 +4777,14 @@
       </p:sp>
       <p:sp>
         <p:nvSpPr>
-          <p:cNvPr id="11" name="Text 9"/>
+          <p:cNvPr id="11" name="Text 8"/>
           <p:cNvSpPr txBox="1"/>
           <p:nvPr/>
         </p:nvSpPr>
         <p:spPr>
           <a:xfrm>
-            <a:off x="4626864" y="1280160"/>
-            <a:ext cx="3200400" cy="457200"/>
+            <a:off x="6473952" y="4736592"/>
+            <a:ext cx="4983480" cy="457200"/>
           </a:xfrm>
           <a:prstGeom prst="rect">
             <a:avLst/>
@@ -4341,7 +4811,7 @@
                 <a:ea typeface="Arial" pitchFamily="34" charset="-122"/>
                 <a:cs typeface="Arial" pitchFamily="34" charset="-120"/>
               </a:rPr>
-              <a:t>Модель</a:t>
+              <a:t>Чем платим</a:t>
             </a:r>
             <a:endParaRPr lang="en-US" sz="3000" dirty="0"/>
           </a:p>
@@ -4349,14 +4819,14 @@
       </p:sp>
       <p:sp>
         <p:nvSpPr>
-          <p:cNvPr id="12" name="Text 10"/>
+          <p:cNvPr id="12" name="Text 9"/>
           <p:cNvSpPr txBox="1"/>
           <p:nvPr/>
         </p:nvSpPr>
         <p:spPr>
           <a:xfrm>
-            <a:off x="4626864" y="1783080"/>
-            <a:ext cx="3246120" cy="1371600"/>
+            <a:off x="6473952" y="5230368"/>
+            <a:ext cx="4983480" cy="914400"/>
           </a:xfrm>
           <a:prstGeom prst="rect">
             <a:avLst/>
@@ -4383,7 +4853,7 @@
                 <a:ea typeface="Arial" pitchFamily="34" charset="-122"/>
                 <a:cs typeface="Arial" pitchFamily="34" charset="-120"/>
               </a:rPr>
-              <a:t>CatBoost, UZS</a:t>
+              <a:t>0,61 сигнала в неделю</a:t>
             </a:r>
             <a:endParaRPr lang="en-US" sz="3000" dirty="0"/>
           </a:p>
@@ -4403,586 +4873,9 @@
                 <a:ea typeface="Arial" pitchFamily="34" charset="-122"/>
                 <a:cs typeface="Arial" pitchFamily="34" charset="-120"/>
               </a:rPr>
-              <a:t>горизонт 5 дней</a:t>
+              <a:t>вместо 1–2</a:t>
             </a:r>
             <a:endParaRPr lang="en-US" sz="3000" dirty="0"/>
-          </a:p>
-          <a:p>
-            <a:pPr indent="0" marL="0">
-              <a:lnSpc>
-                <a:spcPct val="100000"/>
-              </a:lnSpc>
-              <a:buNone/>
-            </a:pPr>
-            <a:r>
-              <a:rPr lang="en-US" sz="3000" dirty="0">
-                <a:solidFill>
-                  <a:srgbClr val="3A3A3A"/>
-                </a:solidFill>
-                <a:latin typeface="Arial" pitchFamily="34" charset="0"/>
-                <a:ea typeface="Arial" pitchFamily="34" charset="-122"/>
-                <a:cs typeface="Arial" pitchFamily="34" charset="-120"/>
-              </a:rPr>
-              <a:t>5 коридоров</a:t>
-            </a:r>
-            <a:endParaRPr lang="en-US" sz="3000" dirty="0"/>
-          </a:p>
-        </p:txBody>
-      </p:sp>
-      <p:sp>
-        <p:nvSpPr>
-          <p:cNvPr id="13" name="Shape 11"/>
-          <p:cNvSpPr/>
-          <p:nvPr/>
-        </p:nvSpPr>
-        <p:spPr>
-          <a:xfrm>
-            <a:off x="8284464" y="1143000"/>
-            <a:ext cx="3703320" cy="2286000"/>
-          </a:xfrm>
-          <a:prstGeom prst="roundRect">
-            <a:avLst>
-              <a:gd name="adj" fmla="val 5600"/>
-            </a:avLst>
-          </a:prstGeom>
-          <a:solidFill>
-            <a:srgbClr val="FFFFFF"/>
-          </a:solidFill>
-          <a:ln/>
-          <a:effectLst>
-            <a:outerShdw sx="100000" sy="100000" kx="0" ky="0" algn="bl" rotWithShape="0" blurRad="101600" dist="12700" dir="5400000">
-              <a:srgbClr val="9A9A9A">
-                <a:alpha val="18000"/>
-              </a:srgbClr>
-            </a:outerShdw>
-          </a:effectLst>
-        </p:spPr>
-      </p:sp>
-      <p:sp>
-        <p:nvSpPr>
-          <p:cNvPr id="14" name="Text 12"/>
-          <p:cNvSpPr txBox="1"/>
-          <p:nvPr/>
-        </p:nvSpPr>
-        <p:spPr>
-          <a:xfrm>
-            <a:off x="8540496" y="1280160"/>
-            <a:ext cx="3200400" cy="457200"/>
-          </a:xfrm>
-          <a:prstGeom prst="rect">
-            <a:avLst/>
-          </a:prstGeom>
-          <a:noFill/>
-          <a:ln/>
-        </p:spPr>
-        <p:txBody>
-          <a:bodyPr wrap="square" lIns="0" tIns="0" rIns="0" bIns="0" rtlCol="0" anchor="t"/>
-          <a:lstStyle/>
-          <a:p>
-            <a:pPr indent="0" marL="0">
-              <a:lnSpc>
-                <a:spcPct val="100000"/>
-              </a:lnSpc>
-              <a:buNone/>
-            </a:pPr>
-            <a:r>
-              <a:rPr lang="en-US" sz="3000" b="1" dirty="0">
-                <a:solidFill>
-                  <a:srgbClr val="EF3124"/>
-                </a:solidFill>
-                <a:latin typeface="Arial" pitchFamily="34" charset="0"/>
-                <a:ea typeface="Arial" pitchFamily="34" charset="-122"/>
-                <a:cs typeface="Arial" pitchFamily="34" charset="-120"/>
-              </a:rPr>
-              <a:t>Метрики</a:t>
-            </a:r>
-            <a:endParaRPr lang="en-US" sz="3000" dirty="0"/>
-          </a:p>
-        </p:txBody>
-      </p:sp>
-      <p:sp>
-        <p:nvSpPr>
-          <p:cNvPr id="15" name="Text 13"/>
-          <p:cNvSpPr txBox="1"/>
-          <p:nvPr/>
-        </p:nvSpPr>
-        <p:spPr>
-          <a:xfrm>
-            <a:off x="8540496" y="1783080"/>
-            <a:ext cx="3246120" cy="1371600"/>
-          </a:xfrm>
-          <a:prstGeom prst="rect">
-            <a:avLst/>
-          </a:prstGeom>
-          <a:noFill/>
-          <a:ln/>
-        </p:spPr>
-        <p:txBody>
-          <a:bodyPr wrap="square" lIns="0" tIns="0" rIns="0" bIns="0" rtlCol="0" anchor="t"/>
-          <a:lstStyle/>
-          <a:p>
-            <a:pPr indent="0" marL="0">
-              <a:lnSpc>
-                <a:spcPct val="100000"/>
-              </a:lnSpc>
-              <a:buNone/>
-            </a:pPr>
-            <a:r>
-              <a:rPr lang="en-US" sz="3000" dirty="0">
-                <a:solidFill>
-                  <a:srgbClr val="3A3A3A"/>
-                </a:solidFill>
-                <a:latin typeface="Arial" pitchFamily="34" charset="0"/>
-                <a:ea typeface="Arial" pitchFamily="34" charset="-122"/>
-                <a:cs typeface="Arial" pitchFamily="34" charset="-120"/>
-              </a:rPr>
-              <a:t>lift 1,25</a:t>
-            </a:r>
-            <a:endParaRPr lang="en-US" sz="3000" dirty="0"/>
-          </a:p>
-          <a:p>
-            <a:pPr indent="0" marL="0">
-              <a:lnSpc>
-                <a:spcPct val="100000"/>
-              </a:lnSpc>
-              <a:buNone/>
-            </a:pPr>
-            <a:r>
-              <a:rPr lang="en-US" sz="3000" dirty="0">
-                <a:solidFill>
-                  <a:srgbClr val="3A3A3A"/>
-                </a:solidFill>
-                <a:latin typeface="Arial" pitchFamily="34" charset="0"/>
-                <a:ea typeface="Arial" pitchFamily="34" charset="-122"/>
-                <a:cs typeface="Arial" pitchFamily="34" charset="-120"/>
-              </a:rPr>
-              <a:t>выгода 26 бп</a:t>
-            </a:r>
-            <a:endParaRPr lang="en-US" sz="3000" dirty="0"/>
-          </a:p>
-          <a:p>
-            <a:pPr indent="0" marL="0">
-              <a:lnSpc>
-                <a:spcPct val="100000"/>
-              </a:lnSpc>
-              <a:buNone/>
-            </a:pPr>
-            <a:r>
-              <a:rPr lang="en-US" sz="3000" dirty="0">
-                <a:solidFill>
-                  <a:srgbClr val="3A3A3A"/>
-                </a:solidFill>
-                <a:latin typeface="Arial" pitchFamily="34" charset="0"/>
-                <a:ea typeface="Arial" pitchFamily="34" charset="-122"/>
-                <a:cs typeface="Arial" pitchFamily="34" charset="-120"/>
-              </a:rPr>
-              <a:t>0,61 в неделю</a:t>
-            </a:r>
-            <a:endParaRPr lang="en-US" sz="3000" dirty="0"/>
-          </a:p>
-        </p:txBody>
-      </p:sp>
-      <p:sp>
-        <p:nvSpPr>
-          <p:cNvPr id="16" name="Shape 14"/>
-          <p:cNvSpPr/>
-          <p:nvPr/>
-        </p:nvSpPr>
-        <p:spPr>
-          <a:xfrm>
-            <a:off x="457200" y="3630168"/>
-            <a:ext cx="7360920" cy="2743200"/>
-          </a:xfrm>
-          <a:prstGeom prst="roundRect">
-            <a:avLst>
-              <a:gd name="adj" fmla="val 4667"/>
-            </a:avLst>
-          </a:prstGeom>
-          <a:solidFill>
-            <a:srgbClr val="FDEAE8"/>
-          </a:solidFill>
-          <a:ln/>
-          <a:effectLst>
-            <a:outerShdw sx="100000" sy="100000" kx="0" ky="0" algn="bl" rotWithShape="0" blurRad="101600" dist="12700" dir="5400000">
-              <a:srgbClr val="9A9A9A">
-                <a:alpha val="18000"/>
-              </a:srgbClr>
-            </a:outerShdw>
-          </a:effectLst>
-        </p:spPr>
-      </p:sp>
-      <p:sp>
-        <p:nvSpPr>
-          <p:cNvPr id="17" name="Text 15"/>
-          <p:cNvSpPr txBox="1"/>
-          <p:nvPr/>
-        </p:nvSpPr>
-        <p:spPr>
-          <a:xfrm>
-            <a:off x="731520" y="3767328"/>
-            <a:ext cx="6812280" cy="457200"/>
-          </a:xfrm>
-          <a:prstGeom prst="rect">
-            <a:avLst/>
-          </a:prstGeom>
-          <a:noFill/>
-          <a:ln/>
-        </p:spPr>
-        <p:txBody>
-          <a:bodyPr wrap="square" lIns="0" tIns="0" rIns="0" bIns="0" rtlCol="0" anchor="t"/>
-          <a:lstStyle/>
-          <a:p>
-            <a:pPr indent="0" marL="0">
-              <a:lnSpc>
-                <a:spcPct val="100000"/>
-              </a:lnSpc>
-              <a:buNone/>
-            </a:pPr>
-            <a:r>
-              <a:rPr lang="en-US" sz="3000" b="1" dirty="0">
-                <a:solidFill>
-                  <a:srgbClr val="111111"/>
-                </a:solidFill>
-                <a:latin typeface="Arial" pitchFamily="34" charset="0"/>
-                <a:ea typeface="Arial" pitchFamily="34" charset="-122"/>
-                <a:cs typeface="Arial" pitchFamily="34" charset="-120"/>
-              </a:rPr>
-              <a:t>Ограничения</a:t>
-            </a:r>
-            <a:endParaRPr lang="en-US" sz="3000" dirty="0"/>
-          </a:p>
-        </p:txBody>
-      </p:sp>
-      <p:sp>
-        <p:nvSpPr>
-          <p:cNvPr id="18" name="Text 16"/>
-          <p:cNvSpPr txBox="1"/>
-          <p:nvPr/>
-        </p:nvSpPr>
-        <p:spPr>
-          <a:xfrm>
-            <a:off x="731520" y="4279392"/>
-            <a:ext cx="6812280" cy="1828800"/>
-          </a:xfrm>
-          <a:prstGeom prst="rect">
-            <a:avLst/>
-          </a:prstGeom>
-          <a:noFill/>
-          <a:ln/>
-        </p:spPr>
-        <p:txBody>
-          <a:bodyPr wrap="square" lIns="0" tIns="0" rIns="0" bIns="0" rtlCol="0" anchor="t"/>
-          <a:lstStyle/>
-          <a:p>
-            <a:pPr indent="0" marL="0">
-              <a:lnSpc>
-                <a:spcPct val="100000"/>
-              </a:lnSpc>
-              <a:buNone/>
-            </a:pPr>
-            <a:r>
-              <a:rPr lang="en-US" sz="3000" dirty="0">
-                <a:solidFill>
-                  <a:srgbClr val="3A3A3A"/>
-                </a:solidFill>
-                <a:latin typeface="Arial" pitchFamily="34" charset="0"/>
-                <a:ea typeface="Arial" pitchFamily="34" charset="-122"/>
-                <a:cs typeface="Arial" pitchFamily="34" charset="-120"/>
-              </a:rPr>
-              <a:t>26 бп из 129 доступных —</a:t>
-            </a:r>
-            <a:endParaRPr lang="en-US" sz="3000" dirty="0"/>
-          </a:p>
-          <a:p>
-            <a:pPr indent="0" marL="0">
-              <a:lnSpc>
-                <a:spcPct val="100000"/>
-              </a:lnSpc>
-              <a:buNone/>
-            </a:pPr>
-            <a:r>
-              <a:rPr lang="en-US" sz="3000" dirty="0">
-                <a:solidFill>
-                  <a:srgbClr val="3A3A3A"/>
-                </a:solidFill>
-                <a:latin typeface="Arial" pitchFamily="34" charset="0"/>
-                <a:ea typeface="Arial" pitchFamily="34" charset="-122"/>
-                <a:cs typeface="Arial" pitchFamily="34" charset="-120"/>
-              </a:rPr>
-              <a:t>пятая часть потолка</a:t>
-            </a:r>
-            <a:endParaRPr lang="en-US" sz="3000" dirty="0"/>
-          </a:p>
-          <a:p>
-            <a:pPr indent="0" marL="0">
-              <a:lnSpc>
-                <a:spcPct val="100000"/>
-              </a:lnSpc>
-              <a:buNone/>
-            </a:pPr>
-            <a:r>
-              <a:rPr lang="en-US" sz="3000" dirty="0">
-                <a:solidFill>
-                  <a:srgbClr val="3A3A3A"/>
-                </a:solidFill>
-                <a:latin typeface="Arial" pitchFamily="34" charset="0"/>
-                <a:ea typeface="Arial" pitchFamily="34" charset="-122"/>
-                <a:cs typeface="Arial" pitchFamily="34" charset="-120"/>
-              </a:rPr>
-              <a:t>Частота 0,61 против 1–2</a:t>
-            </a:r>
-            <a:endParaRPr lang="en-US" sz="3000" dirty="0"/>
-          </a:p>
-          <a:p>
-            <a:pPr indent="0" marL="0">
-              <a:lnSpc>
-                <a:spcPct val="100000"/>
-              </a:lnSpc>
-              <a:buNone/>
-            </a:pPr>
-            <a:r>
-              <a:rPr lang="en-US" sz="3000" dirty="0">
-                <a:solidFill>
-                  <a:srgbClr val="3A3A3A"/>
-                </a:solidFill>
-                <a:latin typeface="Arial" pitchFamily="34" charset="0"/>
-                <a:ea typeface="Arial" pitchFamily="34" charset="-122"/>
-                <a:cs typeface="Arial" pitchFamily="34" charset="-120"/>
-              </a:rPr>
-              <a:t>Курс ЦБ — не курс сделки</a:t>
-            </a:r>
-            <a:endParaRPr lang="en-US" sz="3000" dirty="0"/>
-          </a:p>
-        </p:txBody>
-      </p:sp>
-      <p:sp>
-        <p:nvSpPr>
-          <p:cNvPr id="19" name="Shape 17"/>
-          <p:cNvSpPr/>
-          <p:nvPr/>
-        </p:nvSpPr>
-        <p:spPr>
-          <a:xfrm>
-            <a:off x="8028432" y="3630168"/>
-            <a:ext cx="3703320" cy="2743200"/>
-          </a:xfrm>
-          <a:prstGeom prst="roundRect">
-            <a:avLst>
-              <a:gd name="adj" fmla="val 4667"/>
-            </a:avLst>
-          </a:prstGeom>
-          <a:solidFill>
-            <a:srgbClr val="FFFFFF"/>
-          </a:solidFill>
-          <a:ln/>
-          <a:effectLst>
-            <a:outerShdw sx="100000" sy="100000" kx="0" ky="0" algn="bl" rotWithShape="0" blurRad="101600" dist="12700" dir="5400000">
-              <a:srgbClr val="9A9A9A">
-                <a:alpha val="18000"/>
-              </a:srgbClr>
-            </a:outerShdw>
-          </a:effectLst>
-        </p:spPr>
-      </p:sp>
-      <p:sp>
-        <p:nvSpPr>
-          <p:cNvPr id="20" name="Text 18"/>
-          <p:cNvSpPr txBox="1"/>
-          <p:nvPr/>
-        </p:nvSpPr>
-        <p:spPr>
-          <a:xfrm>
-            <a:off x="8284464" y="3767328"/>
-            <a:ext cx="3200400" cy="457200"/>
-          </a:xfrm>
-          <a:prstGeom prst="rect">
-            <a:avLst/>
-          </a:prstGeom>
-          <a:noFill/>
-          <a:ln/>
-        </p:spPr>
-        <p:txBody>
-          <a:bodyPr wrap="square" lIns="0" tIns="0" rIns="0" bIns="0" rtlCol="0" anchor="t"/>
-          <a:lstStyle/>
-          <a:p>
-            <a:pPr indent="0" marL="0">
-              <a:lnSpc>
-                <a:spcPct val="100000"/>
-              </a:lnSpc>
-              <a:buNone/>
-            </a:pPr>
-            <a:r>
-              <a:rPr lang="en-US" sz="3000" b="1" dirty="0">
-                <a:solidFill>
-                  <a:srgbClr val="EF3124"/>
-                </a:solidFill>
-                <a:latin typeface="Arial" pitchFamily="34" charset="0"/>
-                <a:ea typeface="Arial" pitchFamily="34" charset="-122"/>
-                <a:cs typeface="Arial" pitchFamily="34" charset="-120"/>
-              </a:rPr>
-              <a:t>Команда</a:t>
-            </a:r>
-            <a:endParaRPr lang="en-US" sz="3000" dirty="0"/>
-          </a:p>
-        </p:txBody>
-      </p:sp>
-      <p:sp>
-        <p:nvSpPr>
-          <p:cNvPr id="21" name="Text 19"/>
-          <p:cNvSpPr txBox="1"/>
-          <p:nvPr/>
-        </p:nvSpPr>
-        <p:spPr>
-          <a:xfrm>
-            <a:off x="8284464" y="4279392"/>
-            <a:ext cx="3246120" cy="3200400"/>
-          </a:xfrm>
-          <a:prstGeom prst="rect">
-            <a:avLst/>
-          </a:prstGeom>
-          <a:noFill/>
-          <a:ln/>
-        </p:spPr>
-        <p:txBody>
-          <a:bodyPr wrap="square" lIns="0" tIns="0" rIns="0" bIns="0" rtlCol="0" anchor="t"/>
-          <a:lstStyle/>
-          <a:p>
-            <a:pPr indent="0" marL="0">
-              <a:lnSpc>
-                <a:spcPct val="100000"/>
-              </a:lnSpc>
-              <a:buNone/>
-            </a:pPr>
-            <a:r>
-              <a:rPr lang="en-US" sz="2000" dirty="0">
-                <a:solidFill>
-                  <a:srgbClr val="3A3A3A"/>
-                </a:solidFill>
-                <a:latin typeface="Arial" pitchFamily="34" charset="0"/>
-                <a:ea typeface="Arial" pitchFamily="34" charset="-122"/>
-                <a:cs typeface="Arial" pitchFamily="34" charset="-120"/>
-              </a:rPr>
-              <a:t>Сырых Ольга</a:t>
-            </a:r>
-            <a:endParaRPr lang="en-US" sz="2000" dirty="0"/>
-          </a:p>
-          <a:p>
-            <a:pPr indent="0" marL="0">
-              <a:lnSpc>
-                <a:spcPct val="100000"/>
-              </a:lnSpc>
-              <a:buNone/>
-            </a:pPr>
-            <a:r>
-              <a:rPr lang="en-US" sz="2000" dirty="0">
-                <a:solidFill>
-                  <a:srgbClr val="3A3A3A"/>
-                </a:solidFill>
-                <a:latin typeface="Arial" pitchFamily="34" charset="0"/>
-                <a:ea typeface="Arial" pitchFamily="34" charset="-122"/>
-                <a:cs typeface="Arial" pitchFamily="34" charset="-120"/>
-              </a:rPr>
-              <a:t>данные и ML</a:t>
-            </a:r>
-            <a:endParaRPr lang="en-US" sz="2000" dirty="0"/>
-          </a:p>
-          <a:p>
-            <a:pPr indent="0" marL="0">
-              <a:lnSpc>
-                <a:spcPct val="100000"/>
-              </a:lnSpc>
-              <a:buNone/>
-            </a:pPr>
-            <a:endParaRPr lang="en-US" sz="2000" dirty="0"/>
-          </a:p>
-          <a:p>
-            <a:pPr indent="0" marL="0">
-              <a:lnSpc>
-                <a:spcPct val="100000"/>
-              </a:lnSpc>
-              <a:buNone/>
-            </a:pPr>
-            <a:r>
-              <a:rPr lang="en-US" sz="2000" dirty="0">
-                <a:solidFill>
-                  <a:srgbClr val="3A3A3A"/>
-                </a:solidFill>
-                <a:latin typeface="Arial" pitchFamily="34" charset="0"/>
-                <a:ea typeface="Arial" pitchFamily="34" charset="-122"/>
-                <a:cs typeface="Arial" pitchFamily="34" charset="-120"/>
-              </a:rPr>
-              <a:t>Бикинеев Амир</a:t>
-            </a:r>
-            <a:endParaRPr lang="en-US" sz="2000" dirty="0"/>
-          </a:p>
-          <a:p>
-            <a:pPr indent="0" marL="0">
-              <a:lnSpc>
-                <a:spcPct val="100000"/>
-              </a:lnSpc>
-              <a:buNone/>
-            </a:pPr>
-            <a:r>
-              <a:rPr lang="en-US" sz="2000" dirty="0">
-                <a:solidFill>
-                  <a:srgbClr val="3A3A3A"/>
-                </a:solidFill>
-                <a:latin typeface="Arial" pitchFamily="34" charset="0"/>
-                <a:ea typeface="Arial" pitchFamily="34" charset="-122"/>
-                <a:cs typeface="Arial" pitchFamily="34" charset="-120"/>
-              </a:rPr>
-              <a:t>ML</a:t>
-            </a:r>
-            <a:endParaRPr lang="en-US" sz="2000" dirty="0"/>
-          </a:p>
-          <a:p>
-            <a:pPr indent="0" marL="0">
-              <a:lnSpc>
-                <a:spcPct val="100000"/>
-              </a:lnSpc>
-              <a:buNone/>
-            </a:pPr>
-            <a:endParaRPr lang="en-US" sz="2000" dirty="0"/>
-          </a:p>
-          <a:p>
-            <a:pPr indent="0" marL="0">
-              <a:lnSpc>
-                <a:spcPct val="100000"/>
-              </a:lnSpc>
-              <a:buNone/>
-            </a:pPr>
-            <a:r>
-              <a:rPr lang="en-US" sz="2000" dirty="0">
-                <a:solidFill>
-                  <a:srgbClr val="3A3A3A"/>
-                </a:solidFill>
-                <a:latin typeface="Arial" pitchFamily="34" charset="0"/>
-                <a:ea typeface="Arial" pitchFamily="34" charset="-122"/>
-                <a:cs typeface="Arial" pitchFamily="34" charset="-120"/>
-              </a:rPr>
-              <a:t>Немкин Кирилл</a:t>
-            </a:r>
-            <a:endParaRPr lang="en-US" sz="2000" dirty="0"/>
-          </a:p>
-          <a:p>
-            <a:pPr indent="0" marL="0">
-              <a:lnSpc>
-                <a:spcPct val="100000"/>
-              </a:lnSpc>
-              <a:buNone/>
-            </a:pPr>
-            <a:r>
-              <a:rPr lang="en-US" sz="2000" dirty="0">
-                <a:solidFill>
-                  <a:srgbClr val="3A3A3A"/>
-                </a:solidFill>
-                <a:latin typeface="Arial" pitchFamily="34" charset="0"/>
-                <a:ea typeface="Arial" pitchFamily="34" charset="-122"/>
-                <a:cs typeface="Arial" pitchFamily="34" charset="-120"/>
-              </a:rPr>
-              <a:t>продукт</a:t>
-            </a:r>
-            <a:endParaRPr lang="en-US" sz="2000" dirty="0"/>
           </a:p>
         </p:txBody>
       </p:sp>
@@ -5149,7 +5042,7 @@
                 <a:ea typeface="Arial" pitchFamily="34" charset="-122"/>
                 <a:cs typeface="Arial" pitchFamily="34" charset="-120"/>
               </a:rPr>
-              <a:t>Готовность</a:t>
+              <a:t>Как это</a:t>
             </a:r>
             <a:pPr indent="0" marL="0">
               <a:buNone/>
@@ -5163,7 +5056,7 @@
                 <a:ea typeface="Arial" pitchFamily="34" charset="-122"/>
                 <a:cs typeface="Arial" pitchFamily="34" charset="-120"/>
               </a:rPr>
-              <a:t> и следующий шаг</a:t>
+              <a:t> устроено</a:t>
             </a:r>
             <a:endParaRPr lang="en-US" sz="3400" dirty="0"/>
           </a:p>
@@ -5171,57 +5064,18 @@
       </p:sp>
       <p:sp>
         <p:nvSpPr>
-          <p:cNvPr id="6" name="Text 4"/>
-          <p:cNvSpPr txBox="1"/>
+          <p:cNvPr id="6" name="Shape 4"/>
+          <p:cNvSpPr/>
           <p:nvPr/>
         </p:nvSpPr>
         <p:spPr>
           <a:xfrm>
-            <a:off x="10317175" y="868680"/>
-            <a:ext cx="1417320" cy="274320"/>
-          </a:xfrm>
-          <a:prstGeom prst="rect">
-            <a:avLst/>
-          </a:prstGeom>
-          <a:noFill/>
-          <a:ln/>
-        </p:spPr>
-        <p:txBody>
-          <a:bodyPr wrap="square" lIns="0" tIns="0" rIns="0" bIns="0" rtlCol="0" anchor="ctr"/>
-          <a:lstStyle/>
-          <a:p>
-            <a:pPr algn="ctr" indent="0" marL="0">
-              <a:buNone/>
-            </a:pPr>
-            <a:r>
-              <a:rPr lang="en-US" sz="1300" dirty="0">
-                <a:solidFill>
-                  <a:srgbClr val="5E5E5E"/>
-                </a:solidFill>
-                <a:latin typeface="Arial" pitchFamily="34" charset="0"/>
-                <a:ea typeface="Arial" pitchFamily="34" charset="-122"/>
-                <a:cs typeface="Arial" pitchFamily="34" charset="-120"/>
-              </a:rPr>
-              <a:t>1 минута</a:t>
-            </a:r>
-            <a:endParaRPr lang="en-US" sz="1300" dirty="0"/>
-          </a:p>
-        </p:txBody>
-      </p:sp>
-      <p:sp>
-        <p:nvSpPr>
-          <p:cNvPr id="7" name="Shape 5"/>
-          <p:cNvSpPr/>
-          <p:nvPr/>
-        </p:nvSpPr>
-        <p:spPr>
-          <a:xfrm>
-            <a:off x="457200" y="1143000"/>
-            <a:ext cx="5532120" cy="3794760"/>
+            <a:off x="457200" y="1097280"/>
+            <a:ext cx="3703320" cy="2514600"/>
           </a:xfrm>
           <a:prstGeom prst="roundRect">
             <a:avLst>
-              <a:gd name="adj" fmla="val 3373"/>
+              <a:gd name="adj" fmla="val 5091"/>
             </a:avLst>
           </a:prstGeom>
           <a:solidFill>
@@ -5239,14 +5093,14 @@
       </p:sp>
       <p:sp>
         <p:nvSpPr>
-          <p:cNvPr id="8" name="Text 6"/>
+          <p:cNvPr id="7" name="Text 5"/>
           <p:cNvSpPr txBox="1"/>
           <p:nvPr/>
         </p:nvSpPr>
         <p:spPr>
           <a:xfrm>
-            <a:off x="731520" y="1280160"/>
-            <a:ext cx="4983480" cy="457200"/>
+            <a:off x="713232" y="1225296"/>
+            <a:ext cx="3200400" cy="457200"/>
           </a:xfrm>
           <a:prstGeom prst="rect">
             <a:avLst/>
@@ -5273,7 +5127,7 @@
                 <a:ea typeface="Arial" pitchFamily="34" charset="-122"/>
                 <a:cs typeface="Arial" pitchFamily="34" charset="-120"/>
               </a:rPr>
-              <a:t>Готово</a:t>
+              <a:t>Данные</a:t>
             </a:r>
             <a:endParaRPr lang="en-US" sz="3000" dirty="0"/>
           </a:p>
@@ -5281,14 +5135,14 @@
       </p:sp>
       <p:sp>
         <p:nvSpPr>
-          <p:cNvPr id="9" name="Text 7"/>
+          <p:cNvPr id="8" name="Text 6"/>
           <p:cNvSpPr txBox="1"/>
           <p:nvPr/>
         </p:nvSpPr>
         <p:spPr>
           <a:xfrm>
-            <a:off x="731520" y="1810512"/>
-            <a:ext cx="4983480" cy="2743200"/>
+            <a:off x="713232" y="1719072"/>
+            <a:ext cx="3246120" cy="1828800"/>
           </a:xfrm>
           <a:prstGeom prst="rect">
             <a:avLst/>
@@ -5315,7 +5169,7 @@
                 <a:ea typeface="Arial" pitchFamily="34" charset="-122"/>
                 <a:cs typeface="Arial" pitchFamily="34" charset="-120"/>
               </a:rPr>
-              <a:t>Сигнальный слой</a:t>
+              <a:t>Курсы ЦБ, 8 лет</a:t>
             </a:r>
             <a:endParaRPr lang="en-US" sz="3000" dirty="0"/>
           </a:p>
@@ -5335,7 +5189,7 @@
                 <a:ea typeface="Arial" pitchFamily="34" charset="-122"/>
                 <a:cs typeface="Arial" pitchFamily="34" charset="-120"/>
               </a:rPr>
-              <a:t>и бэктест</a:t>
+              <a:t>Биржа и нацбанки</a:t>
             </a:r>
             <a:endParaRPr lang="en-US" sz="3000" dirty="0"/>
           </a:p>
@@ -5355,86 +5209,26 @@
                 <a:ea typeface="Arial" pitchFamily="34" charset="-122"/>
                 <a:cs typeface="Arial" pitchFamily="34" charset="-120"/>
               </a:rPr>
-              <a:t>Срез на любую дату</a:t>
+              <a:t>Новостной фон</a:t>
             </a:r>
             <a:endParaRPr lang="en-US" sz="3000" dirty="0"/>
           </a:p>
-          <a:p>
-            <a:pPr indent="0" marL="0">
-              <a:lnSpc>
-                <a:spcPct val="100000"/>
-              </a:lnSpc>
-              <a:buNone/>
-            </a:pPr>
-            <a:r>
-              <a:rPr lang="en-US" sz="3000" dirty="0">
-                <a:solidFill>
-                  <a:srgbClr val="3A3A3A"/>
-                </a:solidFill>
-                <a:latin typeface="Arial" pitchFamily="34" charset="0"/>
-                <a:ea typeface="Arial" pitchFamily="34" charset="-122"/>
-                <a:cs typeface="Arial" pitchFamily="34" charset="-120"/>
-              </a:rPr>
-              <a:t>Прототип пути</a:t>
-            </a:r>
-            <a:endParaRPr lang="en-US" sz="3000" dirty="0"/>
-          </a:p>
-          <a:p>
-            <a:pPr indent="0" marL="0">
-              <a:lnSpc>
-                <a:spcPct val="100000"/>
-              </a:lnSpc>
-              <a:buNone/>
-            </a:pPr>
-            <a:r>
-              <a:rPr lang="en-US" sz="3000" dirty="0">
-                <a:solidFill>
-                  <a:srgbClr val="3A3A3A"/>
-                </a:solidFill>
-                <a:latin typeface="Arial" pitchFamily="34" charset="0"/>
-                <a:ea typeface="Arial" pitchFamily="34" charset="-122"/>
-                <a:cs typeface="Arial" pitchFamily="34" charset="-120"/>
-              </a:rPr>
-              <a:t>Тексты на персонах</a:t>
-            </a:r>
-            <a:endParaRPr lang="en-US" sz="3000" dirty="0"/>
-          </a:p>
-          <a:p>
-            <a:pPr indent="0" marL="0">
-              <a:lnSpc>
-                <a:spcPct val="100000"/>
-              </a:lnSpc>
-              <a:buNone/>
-            </a:pPr>
-            <a:r>
-              <a:rPr lang="en-US" sz="3000" dirty="0">
-                <a:solidFill>
-                  <a:srgbClr val="3A3A3A"/>
-                </a:solidFill>
-                <a:latin typeface="Arial" pitchFamily="34" charset="0"/>
-                <a:ea typeface="Arial" pitchFamily="34" charset="-122"/>
-                <a:cs typeface="Arial" pitchFamily="34" charset="-120"/>
-              </a:rPr>
-              <a:t>Предзаполнение</a:t>
-            </a:r>
-            <a:endParaRPr lang="en-US" sz="3000" dirty="0"/>
-          </a:p>
         </p:txBody>
       </p:sp>
       <p:sp>
         <p:nvSpPr>
-          <p:cNvPr id="10" name="Shape 8"/>
+          <p:cNvPr id="9" name="Shape 7"/>
           <p:cNvSpPr/>
           <p:nvPr/>
         </p:nvSpPr>
         <p:spPr>
           <a:xfrm>
-            <a:off x="6199632" y="1143000"/>
-            <a:ext cx="5532120" cy="3794760"/>
+            <a:off x="4370832" y="1097280"/>
+            <a:ext cx="3703320" cy="2514600"/>
           </a:xfrm>
           <a:prstGeom prst="roundRect">
             <a:avLst>
-              <a:gd name="adj" fmla="val 3373"/>
+              <a:gd name="adj" fmla="val 5091"/>
             </a:avLst>
           </a:prstGeom>
           <a:solidFill>
@@ -5452,14 +5246,14 @@
       </p:sp>
       <p:sp>
         <p:nvSpPr>
-          <p:cNvPr id="11" name="Text 9"/>
+          <p:cNvPr id="10" name="Text 8"/>
           <p:cNvSpPr txBox="1"/>
           <p:nvPr/>
         </p:nvSpPr>
         <p:spPr>
           <a:xfrm>
-            <a:off x="6473952" y="1280160"/>
-            <a:ext cx="4983480" cy="457200"/>
+            <a:off x="4626864" y="1225296"/>
+            <a:ext cx="3200400" cy="457200"/>
           </a:xfrm>
           <a:prstGeom prst="rect">
             <a:avLst/>
@@ -5486,7 +5280,7 @@
                 <a:ea typeface="Arial" pitchFamily="34" charset="-122"/>
                 <a:cs typeface="Arial" pitchFamily="34" charset="-120"/>
               </a:rPr>
-              <a:t>Следующий шаг</a:t>
+              <a:t>Модель</a:t>
             </a:r>
             <a:endParaRPr lang="en-US" sz="3000" dirty="0"/>
           </a:p>
@@ -5494,14 +5288,14 @@
       </p:sp>
       <p:sp>
         <p:nvSpPr>
-          <p:cNvPr id="12" name="Text 10"/>
+          <p:cNvPr id="11" name="Text 9"/>
           <p:cNvSpPr txBox="1"/>
           <p:nvPr/>
         </p:nvSpPr>
         <p:spPr>
           <a:xfrm>
-            <a:off x="6473952" y="1810512"/>
-            <a:ext cx="4983480" cy="2743200"/>
+            <a:off x="4626864" y="1719072"/>
+            <a:ext cx="3246120" cy="1828800"/>
           </a:xfrm>
           <a:prstGeom prst="rect">
             <a:avLst/>
@@ -5528,7 +5322,7 @@
                 <a:ea typeface="Arial" pitchFamily="34" charset="-122"/>
                 <a:cs typeface="Arial" pitchFamily="34" charset="-120"/>
               </a:rPr>
-              <a:t>Пилот как A/B-тест</a:t>
+              <a:t>CatBoost</a:t>
             </a:r>
             <a:endParaRPr lang="en-US" sz="3000" dirty="0"/>
           </a:p>
@@ -5548,7 +5342,7 @@
                 <a:ea typeface="Arial" pitchFamily="34" charset="-122"/>
                 <a:cs typeface="Arial" pitchFamily="34" charset="-120"/>
               </a:rPr>
-              <a:t>20 000 в группу</a:t>
+              <a:t>5 торговых дней</a:t>
             </a:r>
             <a:endParaRPr lang="en-US" sz="3000" dirty="0"/>
           </a:p>
@@ -5568,7 +5362,7 @@
                 <a:ea typeface="Arial" pitchFamily="34" charset="-122"/>
                 <a:cs typeface="Arial" pitchFamily="34" charset="-120"/>
               </a:rPr>
-              <a:t>3 недели на сигнал</a:t>
+              <a:t>Проверка на пяти</a:t>
             </a:r>
             <a:endParaRPr lang="en-US" sz="3000" dirty="0"/>
           </a:p>
@@ -5588,10 +5382,61 @@
                 <a:ea typeface="Arial" pitchFamily="34" charset="-122"/>
                 <a:cs typeface="Arial" pitchFamily="34" charset="-120"/>
               </a:rPr>
-              <a:t>квартал на объём</a:t>
+              <a:t>коридорах</a:t>
             </a:r>
             <a:endParaRPr lang="en-US" sz="3000" dirty="0"/>
           </a:p>
+        </p:txBody>
+      </p:sp>
+      <p:sp>
+        <p:nvSpPr>
+          <p:cNvPr id="12" name="Shape 10"/>
+          <p:cNvSpPr/>
+          <p:nvPr/>
+        </p:nvSpPr>
+        <p:spPr>
+          <a:xfrm>
+            <a:off x="8284464" y="1097280"/>
+            <a:ext cx="3703320" cy="2514600"/>
+          </a:xfrm>
+          <a:prstGeom prst="roundRect">
+            <a:avLst>
+              <a:gd name="adj" fmla="val 5091"/>
+            </a:avLst>
+          </a:prstGeom>
+          <a:solidFill>
+            <a:srgbClr val="FFFFFF"/>
+          </a:solidFill>
+          <a:ln/>
+          <a:effectLst>
+            <a:outerShdw sx="100000" sy="100000" kx="0" ky="0" algn="bl" rotWithShape="0" blurRad="101600" dist="12700" dir="5400000">
+              <a:srgbClr val="9A9A9A">
+                <a:alpha val="18000"/>
+              </a:srgbClr>
+            </a:outerShdw>
+          </a:effectLst>
+        </p:spPr>
+      </p:sp>
+      <p:sp>
+        <p:nvSpPr>
+          <p:cNvPr id="13" name="Text 11"/>
+          <p:cNvSpPr txBox="1"/>
+          <p:nvPr/>
+        </p:nvSpPr>
+        <p:spPr>
+          <a:xfrm>
+            <a:off x="8540496" y="1225296"/>
+            <a:ext cx="3200400" cy="457200"/>
+          </a:xfrm>
+          <a:prstGeom prst="rect">
+            <a:avLst/>
+          </a:prstGeom>
+          <a:noFill/>
+          <a:ln/>
+        </p:spPr>
+        <p:txBody>
+          <a:bodyPr wrap="square" lIns="0" tIns="0" rIns="0" bIns="0" rtlCol="0" anchor="t"/>
+          <a:lstStyle/>
           <a:p>
             <a:pPr indent="0" marL="0">
               <a:lnSpc>
@@ -5600,18 +5445,40 @@
               <a:buNone/>
             </a:pPr>
             <a:r>
-              <a:rPr lang="en-US" sz="3000" dirty="0">
-                <a:solidFill>
-                  <a:srgbClr val="3A3A3A"/>
-                </a:solidFill>
-                <a:latin typeface="Arial" pitchFamily="34" charset="0"/>
-                <a:ea typeface="Arial" pitchFamily="34" charset="-122"/>
-                <a:cs typeface="Arial" pitchFamily="34" charset="-120"/>
-              </a:rPr>
-              <a:t>Метрика решения —</a:t>
+              <a:rPr lang="en-US" sz="3000" b="1" dirty="0">
+                <a:solidFill>
+                  <a:srgbClr val="EF3124"/>
+                </a:solidFill>
+                <a:latin typeface="Arial" pitchFamily="34" charset="0"/>
+                <a:ea typeface="Arial" pitchFamily="34" charset="-122"/>
+                <a:cs typeface="Arial" pitchFamily="34" charset="-120"/>
+              </a:rPr>
+              <a:t>Метрики</a:t>
             </a:r>
             <a:endParaRPr lang="en-US" sz="3000" dirty="0"/>
           </a:p>
+        </p:txBody>
+      </p:sp>
+      <p:sp>
+        <p:nvSpPr>
+          <p:cNvPr id="14" name="Text 12"/>
+          <p:cNvSpPr txBox="1"/>
+          <p:nvPr/>
+        </p:nvSpPr>
+        <p:spPr>
+          <a:xfrm>
+            <a:off x="8540496" y="1719072"/>
+            <a:ext cx="3246120" cy="1828800"/>
+          </a:xfrm>
+          <a:prstGeom prst="rect">
+            <a:avLst/>
+          </a:prstGeom>
+          <a:noFill/>
+          <a:ln/>
+        </p:spPr>
+        <p:txBody>
+          <a:bodyPr wrap="square" lIns="0" tIns="0" rIns="0" bIns="0" rtlCol="0" anchor="t"/>
+          <a:lstStyle/>
           <a:p>
             <a:pPr indent="0" marL="0">
               <a:lnSpc>
@@ -5628,54 +5495,10 @@
                 <a:ea typeface="Arial" pitchFamily="34" charset="-122"/>
                 <a:cs typeface="Arial" pitchFamily="34" charset="-120"/>
               </a:rPr>
-              <a:t>выгода в бп</a:t>
+              <a:t>Угадали 62 из 100</a:t>
             </a:r>
             <a:endParaRPr lang="en-US" sz="3000" dirty="0"/>
           </a:p>
-        </p:txBody>
-      </p:sp>
-      <p:sp>
-        <p:nvSpPr>
-          <p:cNvPr id="13" name="Shape 11"/>
-          <p:cNvSpPr/>
-          <p:nvPr/>
-        </p:nvSpPr>
-        <p:spPr>
-          <a:xfrm>
-            <a:off x="457200" y="5138928"/>
-            <a:ext cx="11274552" cy="1188720"/>
-          </a:xfrm>
-          <a:prstGeom prst="roundRect">
-            <a:avLst>
-              <a:gd name="adj" fmla="val 10769"/>
-            </a:avLst>
-          </a:prstGeom>
-          <a:solidFill>
-            <a:srgbClr val="C3F53C"/>
-          </a:solidFill>
-          <a:ln/>
-        </p:spPr>
-      </p:sp>
-      <p:sp>
-        <p:nvSpPr>
-          <p:cNvPr id="14" name="Text 12"/>
-          <p:cNvSpPr txBox="1"/>
-          <p:nvPr/>
-        </p:nvSpPr>
-        <p:spPr>
-          <a:xfrm>
-            <a:off x="777240" y="5257800"/>
-            <a:ext cx="10607040" cy="960120"/>
-          </a:xfrm>
-          <a:prstGeom prst="rect">
-            <a:avLst/>
-          </a:prstGeom>
-          <a:noFill/>
-          <a:ln/>
-        </p:spPr>
-        <p:txBody>
-          <a:bodyPr wrap="square" lIns="0" tIns="0" rIns="0" bIns="0" rtlCol="0" anchor="ctr"/>
-          <a:lstStyle/>
           <a:p>
             <a:pPr indent="0" marL="0">
               <a:lnSpc>
@@ -5684,15 +5507,15 @@
               <a:buNone/>
             </a:pPr>
             <a:r>
-              <a:rPr lang="en-US" sz="3000" b="1" dirty="0">
-                <a:solidFill>
-                  <a:srgbClr val="111111"/>
-                </a:solidFill>
-                <a:latin typeface="Arial" pitchFamily="34" charset="0"/>
-                <a:ea typeface="Arial" pitchFamily="34" charset="-122"/>
-                <a:cs typeface="Arial" pitchFamily="34" charset="-120"/>
-              </a:rPr>
-              <a:t>Мы не обещаем лучший день.</a:t>
+              <a:rPr lang="en-US" sz="3000" dirty="0">
+                <a:solidFill>
+                  <a:srgbClr val="3A3A3A"/>
+                </a:solidFill>
+                <a:latin typeface="Arial" pitchFamily="34" charset="0"/>
+                <a:ea typeface="Arial" pitchFamily="34" charset="-122"/>
+                <a:cs typeface="Arial" pitchFamily="34" charset="-120"/>
+              </a:rPr>
+              <a:t>Lift 1,25</a:t>
             </a:r>
             <a:endParaRPr lang="en-US" sz="3000" dirty="0"/>
           </a:p>
@@ -5704,6 +5527,77 @@
               <a:buNone/>
             </a:pPr>
             <a:r>
+              <a:rPr lang="en-US" sz="3000" dirty="0">
+                <a:solidFill>
+                  <a:srgbClr val="3A3A3A"/>
+                </a:solidFill>
+                <a:latin typeface="Arial" pitchFamily="34" charset="0"/>
+                <a:ea typeface="Arial" pitchFamily="34" charset="-122"/>
+                <a:cs typeface="Arial" pitchFamily="34" charset="-120"/>
+              </a:rPr>
+              <a:t>140 сигналов</a:t>
+            </a:r>
+            <a:endParaRPr lang="en-US" sz="3000" dirty="0"/>
+          </a:p>
+        </p:txBody>
+      </p:sp>
+      <p:sp>
+        <p:nvSpPr>
+          <p:cNvPr id="15" name="Shape 13"/>
+          <p:cNvSpPr/>
+          <p:nvPr/>
+        </p:nvSpPr>
+        <p:spPr>
+          <a:xfrm>
+            <a:off x="457200" y="3749040"/>
+            <a:ext cx="7360920" cy="2788920"/>
+          </a:xfrm>
+          <a:prstGeom prst="roundRect">
+            <a:avLst>
+              <a:gd name="adj" fmla="val 4590"/>
+            </a:avLst>
+          </a:prstGeom>
+          <a:solidFill>
+            <a:srgbClr val="FDEAE8"/>
+          </a:solidFill>
+          <a:ln/>
+          <a:effectLst>
+            <a:outerShdw sx="100000" sy="100000" kx="0" ky="0" algn="bl" rotWithShape="0" blurRad="101600" dist="12700" dir="5400000">
+              <a:srgbClr val="9A9A9A">
+                <a:alpha val="18000"/>
+              </a:srgbClr>
+            </a:outerShdw>
+          </a:effectLst>
+        </p:spPr>
+      </p:sp>
+      <p:sp>
+        <p:nvSpPr>
+          <p:cNvPr id="16" name="Text 14"/>
+          <p:cNvSpPr txBox="1"/>
+          <p:nvPr/>
+        </p:nvSpPr>
+        <p:spPr>
+          <a:xfrm>
+            <a:off x="731520" y="3877056"/>
+            <a:ext cx="6812280" cy="457200"/>
+          </a:xfrm>
+          <a:prstGeom prst="rect">
+            <a:avLst/>
+          </a:prstGeom>
+          <a:noFill/>
+          <a:ln/>
+        </p:spPr>
+        <p:txBody>
+          <a:bodyPr wrap="square" lIns="0" tIns="0" rIns="0" bIns="0" rtlCol="0" anchor="t"/>
+          <a:lstStyle/>
+          <a:p>
+            <a:pPr indent="0" marL="0">
+              <a:lnSpc>
+                <a:spcPct val="100000"/>
+              </a:lnSpc>
+              <a:buNone/>
+            </a:pPr>
+            <a:r>
               <a:rPr lang="en-US" sz="3000" b="1" dirty="0">
                 <a:solidFill>
                   <a:srgbClr val="111111"/>
@@ -5712,7 +5606,1087 @@
                 <a:ea typeface="Arial" pitchFamily="34" charset="-122"/>
                 <a:cs typeface="Arial" pitchFamily="34" charset="-120"/>
               </a:rPr>
-              <a:t>Мы показываем сумму, которой сегодня не видно.</a:t>
+              <a:t>Чего решение не умеет</a:t>
+            </a:r>
+            <a:endParaRPr lang="en-US" sz="3000" dirty="0"/>
+          </a:p>
+        </p:txBody>
+      </p:sp>
+      <p:sp>
+        <p:nvSpPr>
+          <p:cNvPr id="17" name="Text 15"/>
+          <p:cNvSpPr txBox="1"/>
+          <p:nvPr/>
+        </p:nvSpPr>
+        <p:spPr>
+          <a:xfrm>
+            <a:off x="731520" y="4370832"/>
+            <a:ext cx="6812280" cy="2743200"/>
+          </a:xfrm>
+          <a:prstGeom prst="rect">
+            <a:avLst/>
+          </a:prstGeom>
+          <a:noFill/>
+          <a:ln/>
+        </p:spPr>
+        <p:txBody>
+          <a:bodyPr wrap="square" lIns="0" tIns="0" rIns="0" bIns="0" rtlCol="0" anchor="t"/>
+          <a:lstStyle/>
+          <a:p>
+            <a:pPr indent="0" marL="0">
+              <a:lnSpc>
+                <a:spcPct val="100000"/>
+              </a:lnSpc>
+              <a:buNone/>
+            </a:pPr>
+            <a:r>
+              <a:rPr lang="en-US" sz="2400" dirty="0">
+                <a:solidFill>
+                  <a:srgbClr val="3A3A3A"/>
+                </a:solidFill>
+                <a:latin typeface="Arial" pitchFamily="34" charset="0"/>
+                <a:ea typeface="Arial" pitchFamily="34" charset="-122"/>
+                <a:cs typeface="Arial" pitchFamily="34" charset="-120"/>
+              </a:rPr>
+              <a:t>Не ловит лучший день — берёт 26 из 129</a:t>
+            </a:r>
+            <a:endParaRPr lang="en-US" sz="2400" dirty="0"/>
+          </a:p>
+          <a:p>
+            <a:pPr indent="0" marL="0">
+              <a:lnSpc>
+                <a:spcPct val="100000"/>
+              </a:lnSpc>
+              <a:buNone/>
+            </a:pPr>
+            <a:endParaRPr lang="en-US" sz="2400" dirty="0"/>
+          </a:p>
+          <a:p>
+            <a:pPr indent="0" marL="0">
+              <a:lnSpc>
+                <a:spcPct val="100000"/>
+              </a:lnSpc>
+              <a:buNone/>
+            </a:pPr>
+            <a:r>
+              <a:rPr lang="en-US" sz="2400" dirty="0">
+                <a:solidFill>
+                  <a:srgbClr val="3A3A3A"/>
+                </a:solidFill>
+                <a:latin typeface="Arial" pitchFamily="34" charset="0"/>
+                <a:ea typeface="Arial" pitchFamily="34" charset="-122"/>
+                <a:cs typeface="Arial" pitchFamily="34" charset="-120"/>
+              </a:rPr>
+              <a:t>Пишет реже, чем просит кейс</a:t>
+            </a:r>
+            <a:endParaRPr lang="en-US" sz="2400" dirty="0"/>
+          </a:p>
+          <a:p>
+            <a:pPr indent="0" marL="0">
+              <a:lnSpc>
+                <a:spcPct val="100000"/>
+              </a:lnSpc>
+              <a:buNone/>
+            </a:pPr>
+            <a:endParaRPr lang="en-US" sz="2400" dirty="0"/>
+          </a:p>
+          <a:p>
+            <a:pPr indent="0" marL="0">
+              <a:lnSpc>
+                <a:spcPct val="100000"/>
+              </a:lnSpc>
+              <a:buNone/>
+            </a:pPr>
+            <a:r>
+              <a:rPr lang="en-US" sz="2400" dirty="0">
+                <a:solidFill>
+                  <a:srgbClr val="3A3A3A"/>
+                </a:solidFill>
+                <a:latin typeface="Arial" pitchFamily="34" charset="0"/>
+                <a:ea typeface="Arial" pitchFamily="34" charset="-122"/>
+                <a:cs typeface="Arial" pitchFamily="34" charset="-120"/>
+              </a:rPr>
+              <a:t>Курс ЦБ — не тот курс, по которому</a:t>
+            </a:r>
+            <a:endParaRPr lang="en-US" sz="2400" dirty="0"/>
+          </a:p>
+          <a:p>
+            <a:pPr indent="0" marL="0">
+              <a:lnSpc>
+                <a:spcPct val="100000"/>
+              </a:lnSpc>
+              <a:buNone/>
+            </a:pPr>
+            <a:r>
+              <a:rPr lang="en-US" sz="2400" dirty="0">
+                <a:solidFill>
+                  <a:srgbClr val="3A3A3A"/>
+                </a:solidFill>
+                <a:latin typeface="Arial" pitchFamily="34" charset="0"/>
+                <a:ea typeface="Arial" pitchFamily="34" charset="-122"/>
+                <a:cs typeface="Arial" pitchFamily="34" charset="-120"/>
+              </a:rPr>
+              <a:t>клиент реально переводит</a:t>
+            </a:r>
+            <a:endParaRPr lang="en-US" sz="2400" dirty="0"/>
+          </a:p>
+        </p:txBody>
+      </p:sp>
+      <p:sp>
+        <p:nvSpPr>
+          <p:cNvPr id="18" name="Shape 16"/>
+          <p:cNvSpPr/>
+          <p:nvPr/>
+        </p:nvSpPr>
+        <p:spPr>
+          <a:xfrm>
+            <a:off x="8028432" y="3749040"/>
+            <a:ext cx="3703320" cy="2788920"/>
+          </a:xfrm>
+          <a:prstGeom prst="roundRect">
+            <a:avLst>
+              <a:gd name="adj" fmla="val 4590"/>
+            </a:avLst>
+          </a:prstGeom>
+          <a:solidFill>
+            <a:srgbClr val="FFFFFF"/>
+          </a:solidFill>
+          <a:ln/>
+          <a:effectLst>
+            <a:outerShdw sx="100000" sy="100000" kx="0" ky="0" algn="bl" rotWithShape="0" blurRad="101600" dist="12700" dir="5400000">
+              <a:srgbClr val="9A9A9A">
+                <a:alpha val="18000"/>
+              </a:srgbClr>
+            </a:outerShdw>
+          </a:effectLst>
+        </p:spPr>
+      </p:sp>
+      <p:sp>
+        <p:nvSpPr>
+          <p:cNvPr id="19" name="Text 17"/>
+          <p:cNvSpPr txBox="1"/>
+          <p:nvPr/>
+        </p:nvSpPr>
+        <p:spPr>
+          <a:xfrm>
+            <a:off x="8284464" y="3877056"/>
+            <a:ext cx="3200400" cy="457200"/>
+          </a:xfrm>
+          <a:prstGeom prst="rect">
+            <a:avLst/>
+          </a:prstGeom>
+          <a:noFill/>
+          <a:ln/>
+        </p:spPr>
+        <p:txBody>
+          <a:bodyPr wrap="square" lIns="0" tIns="0" rIns="0" bIns="0" rtlCol="0" anchor="t"/>
+          <a:lstStyle/>
+          <a:p>
+            <a:pPr indent="0" marL="0">
+              <a:lnSpc>
+                <a:spcPct val="100000"/>
+              </a:lnSpc>
+              <a:buNone/>
+            </a:pPr>
+            <a:r>
+              <a:rPr lang="en-US" sz="3000" b="1" dirty="0">
+                <a:solidFill>
+                  <a:srgbClr val="EF3124"/>
+                </a:solidFill>
+                <a:latin typeface="Arial" pitchFamily="34" charset="0"/>
+                <a:ea typeface="Arial" pitchFamily="34" charset="-122"/>
+                <a:cs typeface="Arial" pitchFamily="34" charset="-120"/>
+              </a:rPr>
+              <a:t>Команда</a:t>
+            </a:r>
+            <a:endParaRPr lang="en-US" sz="3000" dirty="0"/>
+          </a:p>
+        </p:txBody>
+      </p:sp>
+      <p:sp>
+        <p:nvSpPr>
+          <p:cNvPr id="20" name="Text 18"/>
+          <p:cNvSpPr txBox="1"/>
+          <p:nvPr/>
+        </p:nvSpPr>
+        <p:spPr>
+          <a:xfrm>
+            <a:off x="8284464" y="4407408"/>
+            <a:ext cx="3246120" cy="1371600"/>
+          </a:xfrm>
+          <a:prstGeom prst="rect">
+            <a:avLst/>
+          </a:prstGeom>
+          <a:noFill/>
+          <a:ln/>
+        </p:spPr>
+        <p:txBody>
+          <a:bodyPr wrap="square" lIns="0" tIns="0" rIns="0" bIns="0" rtlCol="0" anchor="t"/>
+          <a:lstStyle/>
+          <a:p>
+            <a:pPr indent="0" marL="0">
+              <a:lnSpc>
+                <a:spcPct val="100000"/>
+              </a:lnSpc>
+              <a:buNone/>
+            </a:pPr>
+            <a:r>
+              <a:rPr lang="en-US" sz="2200" dirty="0">
+                <a:solidFill>
+                  <a:srgbClr val="3A3A3A"/>
+                </a:solidFill>
+                <a:latin typeface="Arial" pitchFamily="34" charset="0"/>
+                <a:ea typeface="Arial" pitchFamily="34" charset="-122"/>
+                <a:cs typeface="Arial" pitchFamily="34" charset="-120"/>
+              </a:rPr>
+              <a:t>Ольга — данные и ML</a:t>
+            </a:r>
+            <a:endParaRPr lang="en-US" sz="2200" dirty="0"/>
+          </a:p>
+          <a:p>
+            <a:pPr indent="0" marL="0">
+              <a:lnSpc>
+                <a:spcPct val="100000"/>
+              </a:lnSpc>
+              <a:buNone/>
+            </a:pPr>
+            <a:r>
+              <a:rPr lang="en-US" sz="2200" dirty="0">
+                <a:solidFill>
+                  <a:srgbClr val="3A3A3A"/>
+                </a:solidFill>
+                <a:latin typeface="Arial" pitchFamily="34" charset="0"/>
+                <a:ea typeface="Arial" pitchFamily="34" charset="-122"/>
+                <a:cs typeface="Arial" pitchFamily="34" charset="-120"/>
+              </a:rPr>
+              <a:t>Амир — ML</a:t>
+            </a:r>
+            <a:endParaRPr lang="en-US" sz="2200" dirty="0"/>
+          </a:p>
+          <a:p>
+            <a:pPr indent="0" marL="0">
+              <a:lnSpc>
+                <a:spcPct val="100000"/>
+              </a:lnSpc>
+              <a:buNone/>
+            </a:pPr>
+            <a:r>
+              <a:rPr lang="en-US" sz="2200" dirty="0">
+                <a:solidFill>
+                  <a:srgbClr val="3A3A3A"/>
+                </a:solidFill>
+                <a:latin typeface="Arial" pitchFamily="34" charset="0"/>
+                <a:ea typeface="Arial" pitchFamily="34" charset="-122"/>
+                <a:cs typeface="Arial" pitchFamily="34" charset="-120"/>
+              </a:rPr>
+              <a:t>Кирилл — продукт</a:t>
+            </a:r>
+            <a:endParaRPr lang="en-US" sz="2200" dirty="0"/>
+          </a:p>
+        </p:txBody>
+      </p:sp>
+      <p:sp>
+        <p:nvSpPr>
+          <p:cNvPr id="21" name="Text 19"/>
+          <p:cNvSpPr txBox="1"/>
+          <p:nvPr/>
+        </p:nvSpPr>
+        <p:spPr>
+          <a:xfrm>
+            <a:off x="8284464" y="5577840"/>
+            <a:ext cx="3246120" cy="914400"/>
+          </a:xfrm>
+          <a:prstGeom prst="rect">
+            <a:avLst/>
+          </a:prstGeom>
+          <a:noFill/>
+          <a:ln/>
+        </p:spPr>
+        <p:txBody>
+          <a:bodyPr wrap="square" lIns="0" tIns="0" rIns="0" bIns="0" rtlCol="0" anchor="t"/>
+          <a:lstStyle/>
+          <a:p>
+            <a:pPr indent="0" marL="0">
+              <a:lnSpc>
+                <a:spcPct val="100000"/>
+              </a:lnSpc>
+              <a:buNone/>
+            </a:pPr>
+            <a:r>
+              <a:rPr lang="en-US" sz="2200" b="1" dirty="0">
+                <a:solidFill>
+                  <a:srgbClr val="111111"/>
+                </a:solidFill>
+                <a:latin typeface="Arial" pitchFamily="34" charset="0"/>
+                <a:ea typeface="Arial" pitchFamily="34" charset="-122"/>
+                <a:cs typeface="Arial" pitchFamily="34" charset="-120"/>
+              </a:rPr>
+              <a:t>Персоны в прогоне:</a:t>
+            </a:r>
+            <a:endParaRPr lang="en-US" sz="2200" dirty="0"/>
+          </a:p>
+          <a:p>
+            <a:pPr indent="0" marL="0">
+              <a:lnSpc>
+                <a:spcPct val="100000"/>
+              </a:lnSpc>
+              <a:buNone/>
+            </a:pPr>
+            <a:r>
+              <a:rPr lang="en-US" sz="2200" b="1" dirty="0">
+                <a:solidFill>
+                  <a:srgbClr val="111111"/>
+                </a:solidFill>
+                <a:latin typeface="Arial" pitchFamily="34" charset="0"/>
+                <a:ea typeface="Arial" pitchFamily="34" charset="-122"/>
+                <a:cs typeface="Arial" pitchFamily="34" charset="-120"/>
+              </a:rPr>
+              <a:t>Азиз, Далер, Армен</a:t>
+            </a:r>
+            <a:endParaRPr lang="en-US" sz="2200" dirty="0"/>
+          </a:p>
+        </p:txBody>
+      </p:sp>
+    </p:spTree>
+  </p:cSld>
+  <p:clrMapOvr>
+    <a:masterClrMapping/>
+  </p:clrMapOvr>
+</p:sld>
+</file>
+
+<file path=ppt/slides/slide5.xml><?xml version="1.0" encoding="utf-8"?>
+<p:sld xmlns:a="http://schemas.openxmlformats.org/drawingml/2006/main" xmlns:r="http://schemas.openxmlformats.org/officeDocument/2006/relationships" xmlns:p="http://schemas.openxmlformats.org/presentationml/2006/main">
+  <p:cSld name="Slide 5">
+    <p:bg>
+      <p:bgPr>
+        <a:solidFill>
+          <a:srgbClr val="EBEBEB"/>
+        </a:solidFill>
+      </p:bgPr>
+    </p:bg>
+    <p:spTree>
+      <p:nvGrpSpPr>
+        <p:cNvPr id="1" name=""/>
+        <p:cNvGrpSpPr/>
+        <p:nvPr/>
+      </p:nvGrpSpPr>
+      <p:grpSpPr>
+        <a:xfrm>
+          <a:off x="0" y="0"/>
+          <a:ext cx="0" cy="0"/>
+          <a:chOff x="0" y="0"/>
+          <a:chExt cx="0" cy="0"/>
+        </a:xfrm>
+      </p:grpSpPr>
+      <p:sp>
+        <p:nvSpPr>
+          <p:cNvPr id="2" name="Shape 0"/>
+          <p:cNvSpPr/>
+          <p:nvPr/>
+        </p:nvSpPr>
+        <p:spPr>
+          <a:xfrm rot="-300000">
+            <a:off x="10317175" y="219456"/>
+            <a:ext cx="1353312" cy="453542"/>
+          </a:xfrm>
+          <a:prstGeom prst="rect">
+            <a:avLst/>
+          </a:prstGeom>
+          <a:solidFill>
+            <a:srgbClr val="EF3124"/>
+          </a:solidFill>
+          <a:ln/>
+        </p:spPr>
+      </p:sp>
+      <p:sp>
+        <p:nvSpPr>
+          <p:cNvPr id="3" name="Text 1"/>
+          <p:cNvSpPr txBox="1"/>
+          <p:nvPr/>
+        </p:nvSpPr>
+        <p:spPr>
+          <a:xfrm rot="-300000">
+            <a:off x="10317175" y="234086"/>
+            <a:ext cx="1353312" cy="219456"/>
+          </a:xfrm>
+          <a:prstGeom prst="rect">
+            <a:avLst/>
+          </a:prstGeom>
+          <a:noFill/>
+          <a:ln/>
+        </p:spPr>
+        <p:txBody>
+          <a:bodyPr wrap="square" lIns="0" tIns="0" rIns="0" bIns="0" rtlCol="0" anchor="ctr"/>
+          <a:lstStyle/>
+          <a:p>
+            <a:pPr algn="ctr" indent="0" marL="0">
+              <a:buNone/>
+            </a:pPr>
+            <a:r>
+              <a:rPr lang="en-US" sz="1040" b="1" dirty="0">
+                <a:solidFill>
+                  <a:srgbClr val="FFFFFF"/>
+                </a:solidFill>
+                <a:latin typeface="Arial" pitchFamily="34" charset="0"/>
+                <a:ea typeface="Arial" pitchFamily="34" charset="-122"/>
+                <a:cs typeface="Arial" pitchFamily="34" charset="-120"/>
+              </a:rPr>
+              <a:t>АЛЬФА</a:t>
+            </a:r>
+            <a:endParaRPr lang="en-US" sz="1040" dirty="0"/>
+          </a:p>
+        </p:txBody>
+      </p:sp>
+      <p:sp>
+        <p:nvSpPr>
+          <p:cNvPr id="4" name="Text 2"/>
+          <p:cNvSpPr txBox="1"/>
+          <p:nvPr/>
+        </p:nvSpPr>
+        <p:spPr>
+          <a:xfrm rot="-300000">
+            <a:off x="10317175" y="431597"/>
+            <a:ext cx="1353312" cy="219456"/>
+          </a:xfrm>
+          <a:prstGeom prst="rect">
+            <a:avLst/>
+          </a:prstGeom>
+          <a:noFill/>
+          <a:ln/>
+        </p:spPr>
+        <p:txBody>
+          <a:bodyPr wrap="square" lIns="0" tIns="0" rIns="0" bIns="0" rtlCol="0" anchor="ctr"/>
+          <a:lstStyle/>
+          <a:p>
+            <a:pPr algn="ctr" indent="0" marL="0">
+              <a:buNone/>
+            </a:pPr>
+            <a:r>
+              <a:rPr lang="en-US" sz="1040" b="1" dirty="0">
+                <a:solidFill>
+                  <a:srgbClr val="FFFFFF"/>
+                </a:solidFill>
+                <a:latin typeface="Arial" pitchFamily="34" charset="0"/>
+                <a:ea typeface="Arial" pitchFamily="34" charset="-122"/>
+                <a:cs typeface="Arial" pitchFamily="34" charset="-120"/>
+              </a:rPr>
+              <a:t>БУДУЩЕЕ</a:t>
+            </a:r>
+            <a:endParaRPr lang="en-US" sz="1040" dirty="0"/>
+          </a:p>
+        </p:txBody>
+      </p:sp>
+      <p:sp>
+        <p:nvSpPr>
+          <p:cNvPr id="5" name="Text 3"/>
+          <p:cNvSpPr txBox="1"/>
+          <p:nvPr/>
+        </p:nvSpPr>
+        <p:spPr>
+          <a:xfrm>
+            <a:off x="457200" y="256032"/>
+            <a:ext cx="9601200" cy="640080"/>
+          </a:xfrm>
+          <a:prstGeom prst="rect">
+            <a:avLst/>
+          </a:prstGeom>
+          <a:noFill/>
+          <a:ln/>
+        </p:spPr>
+        <p:txBody>
+          <a:bodyPr wrap="square" lIns="0" tIns="0" rIns="0" bIns="0" rtlCol="0" anchor="ctr"/>
+          <a:lstStyle/>
+          <a:p>
+            <a:pPr indent="0" marL="0">
+              <a:buNone/>
+            </a:pPr>
+            <a:r>
+              <a:rPr lang="en-US" sz="3400" b="1" dirty="0">
+                <a:solidFill>
+                  <a:srgbClr val="EF3124"/>
+                </a:solidFill>
+                <a:latin typeface="Arial" pitchFamily="34" charset="0"/>
+                <a:ea typeface="Arial" pitchFamily="34" charset="-122"/>
+                <a:cs typeface="Arial" pitchFamily="34" charset="-120"/>
+              </a:rPr>
+              <a:t>Готовность</a:t>
+            </a:r>
+            <a:pPr indent="0" marL="0">
+              <a:buNone/>
+            </a:pPr>
+            <a:r>
+              <a:rPr lang="en-US" sz="3400" b="1" dirty="0">
+                <a:solidFill>
+                  <a:srgbClr val="111111"/>
+                </a:solidFill>
+                <a:latin typeface="Arial" pitchFamily="34" charset="0"/>
+                <a:ea typeface="Arial" pitchFamily="34" charset="-122"/>
+                <a:cs typeface="Arial" pitchFamily="34" charset="-120"/>
+              </a:rPr>
+              <a:t> и следующий шаг</a:t>
+            </a:r>
+            <a:endParaRPr lang="en-US" sz="3400" dirty="0"/>
+          </a:p>
+        </p:txBody>
+      </p:sp>
+      <p:sp>
+        <p:nvSpPr>
+          <p:cNvPr id="6" name="Shape 4"/>
+          <p:cNvSpPr/>
+          <p:nvPr/>
+        </p:nvSpPr>
+        <p:spPr>
+          <a:xfrm>
+            <a:off x="457200" y="1097280"/>
+            <a:ext cx="5532120" cy="2651760"/>
+          </a:xfrm>
+          <a:prstGeom prst="roundRect">
+            <a:avLst>
+              <a:gd name="adj" fmla="val 4828"/>
+            </a:avLst>
+          </a:prstGeom>
+          <a:solidFill>
+            <a:srgbClr val="FFFFFF"/>
+          </a:solidFill>
+          <a:ln/>
+          <a:effectLst>
+            <a:outerShdw sx="100000" sy="100000" kx="0" ky="0" algn="bl" rotWithShape="0" blurRad="101600" dist="12700" dir="5400000">
+              <a:srgbClr val="9A9A9A">
+                <a:alpha val="18000"/>
+              </a:srgbClr>
+            </a:outerShdw>
+          </a:effectLst>
+        </p:spPr>
+      </p:sp>
+      <p:sp>
+        <p:nvSpPr>
+          <p:cNvPr id="7" name="Text 5"/>
+          <p:cNvSpPr txBox="1"/>
+          <p:nvPr/>
+        </p:nvSpPr>
+        <p:spPr>
+          <a:xfrm>
+            <a:off x="731520" y="1225296"/>
+            <a:ext cx="4983480" cy="457200"/>
+          </a:xfrm>
+          <a:prstGeom prst="rect">
+            <a:avLst/>
+          </a:prstGeom>
+          <a:noFill/>
+          <a:ln/>
+        </p:spPr>
+        <p:txBody>
+          <a:bodyPr wrap="square" lIns="0" tIns="0" rIns="0" bIns="0" rtlCol="0" anchor="t"/>
+          <a:lstStyle/>
+          <a:p>
+            <a:pPr indent="0" marL="0">
+              <a:lnSpc>
+                <a:spcPct val="100000"/>
+              </a:lnSpc>
+              <a:buNone/>
+            </a:pPr>
+            <a:r>
+              <a:rPr lang="en-US" sz="3000" b="1" dirty="0">
+                <a:solidFill>
+                  <a:srgbClr val="EF3124"/>
+                </a:solidFill>
+                <a:latin typeface="Arial" pitchFamily="34" charset="0"/>
+                <a:ea typeface="Arial" pitchFamily="34" charset="-122"/>
+                <a:cs typeface="Arial" pitchFamily="34" charset="-120"/>
+              </a:rPr>
+              <a:t>Готово</a:t>
+            </a:r>
+            <a:endParaRPr lang="en-US" sz="3000" dirty="0"/>
+          </a:p>
+        </p:txBody>
+      </p:sp>
+      <p:sp>
+        <p:nvSpPr>
+          <p:cNvPr id="8" name="Text 6"/>
+          <p:cNvSpPr txBox="1"/>
+          <p:nvPr/>
+        </p:nvSpPr>
+        <p:spPr>
+          <a:xfrm>
+            <a:off x="731520" y="1737360"/>
+            <a:ext cx="4983480" cy="1828800"/>
+          </a:xfrm>
+          <a:prstGeom prst="rect">
+            <a:avLst/>
+          </a:prstGeom>
+          <a:noFill/>
+          <a:ln/>
+        </p:spPr>
+        <p:txBody>
+          <a:bodyPr wrap="square" lIns="0" tIns="0" rIns="0" bIns="0" rtlCol="0" anchor="t"/>
+          <a:lstStyle/>
+          <a:p>
+            <a:pPr indent="0" marL="0">
+              <a:lnSpc>
+                <a:spcPct val="100000"/>
+              </a:lnSpc>
+              <a:buNone/>
+            </a:pPr>
+            <a:r>
+              <a:rPr lang="en-US" sz="3000" dirty="0">
+                <a:solidFill>
+                  <a:srgbClr val="3A3A3A"/>
+                </a:solidFill>
+                <a:latin typeface="Arial" pitchFamily="34" charset="0"/>
+                <a:ea typeface="Arial" pitchFamily="34" charset="-122"/>
+                <a:cs typeface="Arial" pitchFamily="34" charset="-120"/>
+              </a:rPr>
+              <a:t>Сигналы и бэктест</a:t>
+            </a:r>
+            <a:endParaRPr lang="en-US" sz="3000" dirty="0"/>
+          </a:p>
+          <a:p>
+            <a:pPr indent="0" marL="0">
+              <a:lnSpc>
+                <a:spcPct val="100000"/>
+              </a:lnSpc>
+              <a:buNone/>
+            </a:pPr>
+            <a:r>
+              <a:rPr lang="en-US" sz="3000" dirty="0">
+                <a:solidFill>
+                  <a:srgbClr val="3A3A3A"/>
+                </a:solidFill>
+                <a:latin typeface="Arial" pitchFamily="34" charset="0"/>
+                <a:ea typeface="Arial" pitchFamily="34" charset="-122"/>
+                <a:cs typeface="Arial" pitchFamily="34" charset="-120"/>
+              </a:rPr>
+              <a:t>Прототип пути</a:t>
+            </a:r>
+            <a:endParaRPr lang="en-US" sz="3000" dirty="0"/>
+          </a:p>
+          <a:p>
+            <a:pPr indent="0" marL="0">
+              <a:lnSpc>
+                <a:spcPct val="100000"/>
+              </a:lnSpc>
+              <a:buNone/>
+            </a:pPr>
+            <a:r>
+              <a:rPr lang="en-US" sz="3000" dirty="0">
+                <a:solidFill>
+                  <a:srgbClr val="3A3A3A"/>
+                </a:solidFill>
+                <a:latin typeface="Arial" pitchFamily="34" charset="0"/>
+                <a:ea typeface="Arial" pitchFamily="34" charset="-122"/>
+                <a:cs typeface="Arial" pitchFamily="34" charset="-120"/>
+              </a:rPr>
+              <a:t>Тексты на персонах</a:t>
+            </a:r>
+            <a:endParaRPr lang="en-US" sz="3000" dirty="0"/>
+          </a:p>
+          <a:p>
+            <a:pPr indent="0" marL="0">
+              <a:lnSpc>
+                <a:spcPct val="100000"/>
+              </a:lnSpc>
+              <a:buNone/>
+            </a:pPr>
+            <a:r>
+              <a:rPr lang="en-US" sz="3000" dirty="0">
+                <a:solidFill>
+                  <a:srgbClr val="3A3A3A"/>
+                </a:solidFill>
+                <a:latin typeface="Arial" pitchFamily="34" charset="0"/>
+                <a:ea typeface="Arial" pitchFamily="34" charset="-122"/>
+                <a:cs typeface="Arial" pitchFamily="34" charset="-120"/>
+              </a:rPr>
+              <a:t>Предзаполнение формы</a:t>
+            </a:r>
+            <a:endParaRPr lang="en-US" sz="3000" dirty="0"/>
+          </a:p>
+        </p:txBody>
+      </p:sp>
+      <p:sp>
+        <p:nvSpPr>
+          <p:cNvPr id="9" name="Shape 7"/>
+          <p:cNvSpPr/>
+          <p:nvPr/>
+        </p:nvSpPr>
+        <p:spPr>
+          <a:xfrm>
+            <a:off x="6199632" y="1097280"/>
+            <a:ext cx="5532120" cy="2651760"/>
+          </a:xfrm>
+          <a:prstGeom prst="roundRect">
+            <a:avLst>
+              <a:gd name="adj" fmla="val 4828"/>
+            </a:avLst>
+          </a:prstGeom>
+          <a:solidFill>
+            <a:srgbClr val="FFFFFF"/>
+          </a:solidFill>
+          <a:ln/>
+          <a:effectLst>
+            <a:outerShdw sx="100000" sy="100000" kx="0" ky="0" algn="bl" rotWithShape="0" blurRad="101600" dist="12700" dir="5400000">
+              <a:srgbClr val="9A9A9A">
+                <a:alpha val="18000"/>
+              </a:srgbClr>
+            </a:outerShdw>
+          </a:effectLst>
+        </p:spPr>
+      </p:sp>
+      <p:sp>
+        <p:nvSpPr>
+          <p:cNvPr id="10" name="Text 8"/>
+          <p:cNvSpPr txBox="1"/>
+          <p:nvPr/>
+        </p:nvSpPr>
+        <p:spPr>
+          <a:xfrm>
+            <a:off x="6473952" y="1225296"/>
+            <a:ext cx="4983480" cy="457200"/>
+          </a:xfrm>
+          <a:prstGeom prst="rect">
+            <a:avLst/>
+          </a:prstGeom>
+          <a:noFill/>
+          <a:ln/>
+        </p:spPr>
+        <p:txBody>
+          <a:bodyPr wrap="square" lIns="0" tIns="0" rIns="0" bIns="0" rtlCol="0" anchor="t"/>
+          <a:lstStyle/>
+          <a:p>
+            <a:pPr indent="0" marL="0">
+              <a:lnSpc>
+                <a:spcPct val="100000"/>
+              </a:lnSpc>
+              <a:buNone/>
+            </a:pPr>
+            <a:r>
+              <a:rPr lang="en-US" sz="3000" b="1" dirty="0">
+                <a:solidFill>
+                  <a:srgbClr val="EF3124"/>
+                </a:solidFill>
+                <a:latin typeface="Arial" pitchFamily="34" charset="0"/>
+                <a:ea typeface="Arial" pitchFamily="34" charset="-122"/>
+                <a:cs typeface="Arial" pitchFamily="34" charset="-120"/>
+              </a:rPr>
+              <a:t>Пилот — A/B на клиентах</a:t>
+            </a:r>
+            <a:endParaRPr lang="en-US" sz="3000" dirty="0"/>
+          </a:p>
+        </p:txBody>
+      </p:sp>
+      <p:sp>
+        <p:nvSpPr>
+          <p:cNvPr id="11" name="Text 9"/>
+          <p:cNvSpPr txBox="1"/>
+          <p:nvPr/>
+        </p:nvSpPr>
+        <p:spPr>
+          <a:xfrm>
+            <a:off x="6473952" y="1737360"/>
+            <a:ext cx="4983480" cy="1828800"/>
+          </a:xfrm>
+          <a:prstGeom prst="rect">
+            <a:avLst/>
+          </a:prstGeom>
+          <a:noFill/>
+          <a:ln/>
+        </p:spPr>
+        <p:txBody>
+          <a:bodyPr wrap="square" lIns="0" tIns="0" rIns="0" bIns="0" rtlCol="0" anchor="t"/>
+          <a:lstStyle/>
+          <a:p>
+            <a:pPr indent="0" marL="0">
+              <a:lnSpc>
+                <a:spcPct val="100000"/>
+              </a:lnSpc>
+              <a:buNone/>
+            </a:pPr>
+            <a:r>
+              <a:rPr lang="en-US" sz="3000" dirty="0">
+                <a:solidFill>
+                  <a:srgbClr val="3A3A3A"/>
+                </a:solidFill>
+                <a:latin typeface="Arial" pitchFamily="34" charset="0"/>
+                <a:ea typeface="Arial" pitchFamily="34" charset="-122"/>
+                <a:cs typeface="Arial" pitchFamily="34" charset="-120"/>
+              </a:rPr>
+              <a:t>20 000 человек в группу</a:t>
+            </a:r>
+            <a:endParaRPr lang="en-US" sz="3000" dirty="0"/>
+          </a:p>
+          <a:p>
+            <a:pPr indent="0" marL="0">
+              <a:lnSpc>
+                <a:spcPct val="100000"/>
+              </a:lnSpc>
+              <a:buNone/>
+            </a:pPr>
+            <a:r>
+              <a:rPr lang="en-US" sz="3000" dirty="0">
+                <a:solidFill>
+                  <a:srgbClr val="3A3A3A"/>
+                </a:solidFill>
+                <a:latin typeface="Arial" pitchFamily="34" charset="0"/>
+                <a:ea typeface="Arial" pitchFamily="34" charset="-122"/>
+                <a:cs typeface="Arial" pitchFamily="34" charset="-120"/>
+              </a:rPr>
+              <a:t>Поровну, вслепую</a:t>
+            </a:r>
+            <a:endParaRPr lang="en-US" sz="3000" dirty="0"/>
+          </a:p>
+          <a:p>
+            <a:pPr indent="0" marL="0">
+              <a:lnSpc>
+                <a:spcPct val="100000"/>
+              </a:lnSpc>
+              <a:buNone/>
+            </a:pPr>
+            <a:r>
+              <a:rPr lang="en-US" sz="3000" dirty="0">
+                <a:solidFill>
+                  <a:srgbClr val="3A3A3A"/>
+                </a:solidFill>
+                <a:latin typeface="Arial" pitchFamily="34" charset="0"/>
+                <a:ea typeface="Arial" pitchFamily="34" charset="-122"/>
+                <a:cs typeface="Arial" pitchFamily="34" charset="-120"/>
+              </a:rPr>
+              <a:t>3 недели минимум,</a:t>
+            </a:r>
+            <a:endParaRPr lang="en-US" sz="3000" dirty="0"/>
+          </a:p>
+          <a:p>
+            <a:pPr indent="0" marL="0">
+              <a:lnSpc>
+                <a:spcPct val="100000"/>
+              </a:lnSpc>
+              <a:buNone/>
+            </a:pPr>
+            <a:r>
+              <a:rPr lang="en-US" sz="3000" dirty="0">
+                <a:solidFill>
+                  <a:srgbClr val="3A3A3A"/>
+                </a:solidFill>
+                <a:latin typeface="Arial" pitchFamily="34" charset="0"/>
+                <a:ea typeface="Arial" pitchFamily="34" charset="-122"/>
+                <a:cs typeface="Arial" pitchFamily="34" charset="-120"/>
+              </a:rPr>
+              <a:t>квартал полный цикл</a:t>
+            </a:r>
+            <a:endParaRPr lang="en-US" sz="3000" dirty="0"/>
+          </a:p>
+        </p:txBody>
+      </p:sp>
+      <p:sp>
+        <p:nvSpPr>
+          <p:cNvPr id="12" name="Shape 10"/>
+          <p:cNvSpPr/>
+          <p:nvPr/>
+        </p:nvSpPr>
+        <p:spPr>
+          <a:xfrm>
+            <a:off x="457200" y="3931920"/>
+            <a:ext cx="11274552" cy="1600200"/>
+          </a:xfrm>
+          <a:prstGeom prst="roundRect">
+            <a:avLst>
+              <a:gd name="adj" fmla="val 8000"/>
+            </a:avLst>
+          </a:prstGeom>
+          <a:solidFill>
+            <a:srgbClr val="FDEAE8"/>
+          </a:solidFill>
+          <a:ln/>
+          <a:effectLst>
+            <a:outerShdw sx="100000" sy="100000" kx="0" ky="0" algn="bl" rotWithShape="0" blurRad="101600" dist="12700" dir="5400000">
+              <a:srgbClr val="9A9A9A">
+                <a:alpha val="18000"/>
+              </a:srgbClr>
+            </a:outerShdw>
+          </a:effectLst>
+        </p:spPr>
+      </p:sp>
+      <p:sp>
+        <p:nvSpPr>
+          <p:cNvPr id="13" name="Text 11"/>
+          <p:cNvSpPr txBox="1"/>
+          <p:nvPr/>
+        </p:nvSpPr>
+        <p:spPr>
+          <a:xfrm>
+            <a:off x="777240" y="4059936"/>
+            <a:ext cx="10607040" cy="457200"/>
+          </a:xfrm>
+          <a:prstGeom prst="rect">
+            <a:avLst/>
+          </a:prstGeom>
+          <a:noFill/>
+          <a:ln/>
+        </p:spPr>
+        <p:txBody>
+          <a:bodyPr wrap="square" lIns="0" tIns="0" rIns="0" bIns="0" rtlCol="0" anchor="t"/>
+          <a:lstStyle/>
+          <a:p>
+            <a:pPr indent="0" marL="0">
+              <a:lnSpc>
+                <a:spcPct val="100000"/>
+              </a:lnSpc>
+              <a:buNone/>
+            </a:pPr>
+            <a:r>
+              <a:rPr lang="en-US" sz="3000" b="1" dirty="0">
+                <a:solidFill>
+                  <a:srgbClr val="111111"/>
+                </a:solidFill>
+                <a:latin typeface="Arial" pitchFamily="34" charset="0"/>
+                <a:ea typeface="Arial" pitchFamily="34" charset="-122"/>
+                <a:cs typeface="Arial" pitchFamily="34" charset="-120"/>
+              </a:rPr>
+              <a:t>Успех — это три условия сразу</a:t>
+            </a:r>
+            <a:endParaRPr lang="en-US" sz="3000" dirty="0"/>
+          </a:p>
+        </p:txBody>
+      </p:sp>
+      <p:sp>
+        <p:nvSpPr>
+          <p:cNvPr id="14" name="Text 12"/>
+          <p:cNvSpPr txBox="1"/>
+          <p:nvPr/>
+        </p:nvSpPr>
+        <p:spPr>
+          <a:xfrm>
+            <a:off x="777240" y="4572000"/>
+            <a:ext cx="10607040" cy="457200"/>
+          </a:xfrm>
+          <a:prstGeom prst="rect">
+            <a:avLst/>
+          </a:prstGeom>
+          <a:noFill/>
+          <a:ln/>
+        </p:spPr>
+        <p:txBody>
+          <a:bodyPr wrap="square" lIns="0" tIns="0" rIns="0" bIns="0" rtlCol="0" anchor="t"/>
+          <a:lstStyle/>
+          <a:p>
+            <a:pPr indent="0" marL="0">
+              <a:lnSpc>
+                <a:spcPct val="100000"/>
+              </a:lnSpc>
+              <a:buNone/>
+            </a:pPr>
+            <a:r>
+              <a:rPr lang="en-US" sz="3000" dirty="0">
+                <a:solidFill>
+                  <a:srgbClr val="3A3A3A"/>
+                </a:solidFill>
+                <a:latin typeface="Arial" pitchFamily="34" charset="0"/>
+                <a:ea typeface="Arial" pitchFamily="34" charset="-122"/>
+                <a:cs typeface="Arial" pitchFamily="34" charset="-120"/>
+              </a:rPr>
+              <a:t>Клиент получает больше · переводов не меньше ·</a:t>
+            </a:r>
+            <a:endParaRPr lang="en-US" sz="3000" dirty="0"/>
+          </a:p>
+        </p:txBody>
+      </p:sp>
+      <p:sp>
+        <p:nvSpPr>
+          <p:cNvPr id="15" name="Text 13"/>
+          <p:cNvSpPr txBox="1"/>
+          <p:nvPr/>
+        </p:nvSpPr>
+        <p:spPr>
+          <a:xfrm>
+            <a:off x="777240" y="5029200"/>
+            <a:ext cx="10607040" cy="457200"/>
+          </a:xfrm>
+          <a:prstGeom prst="rect">
+            <a:avLst/>
+          </a:prstGeom>
+          <a:noFill/>
+          <a:ln/>
+        </p:spPr>
+        <p:txBody>
+          <a:bodyPr wrap="square" lIns="0" tIns="0" rIns="0" bIns="0" rtlCol="0" anchor="t"/>
+          <a:lstStyle/>
+          <a:p>
+            <a:pPr indent="0" marL="0">
+              <a:lnSpc>
+                <a:spcPct val="100000"/>
+              </a:lnSpc>
+              <a:buNone/>
+            </a:pPr>
+            <a:r>
+              <a:rPr lang="en-US" sz="3000" dirty="0">
+                <a:solidFill>
+                  <a:srgbClr val="3A3A3A"/>
+                </a:solidFill>
+                <a:latin typeface="Arial" pitchFamily="34" charset="0"/>
+                <a:ea typeface="Arial" pitchFamily="34" charset="-122"/>
+                <a:cs typeface="Arial" pitchFamily="34" charset="-120"/>
+              </a:rPr>
+              <a:t>от пушей не отписываются</a:t>
+            </a:r>
+            <a:endParaRPr lang="en-US" sz="3000" dirty="0"/>
+          </a:p>
+        </p:txBody>
+      </p:sp>
+      <p:sp>
+        <p:nvSpPr>
+          <p:cNvPr id="16" name="Shape 14"/>
+          <p:cNvSpPr/>
+          <p:nvPr/>
+        </p:nvSpPr>
+        <p:spPr>
+          <a:xfrm>
+            <a:off x="457200" y="5669280"/>
+            <a:ext cx="11274552" cy="685800"/>
+          </a:xfrm>
+          <a:prstGeom prst="roundRect">
+            <a:avLst>
+              <a:gd name="adj" fmla="val 18667"/>
+            </a:avLst>
+          </a:prstGeom>
+          <a:solidFill>
+            <a:srgbClr val="C3F53C"/>
+          </a:solidFill>
+          <a:ln/>
+        </p:spPr>
+      </p:sp>
+      <p:sp>
+        <p:nvSpPr>
+          <p:cNvPr id="17" name="Text 15"/>
+          <p:cNvSpPr txBox="1"/>
+          <p:nvPr/>
+        </p:nvSpPr>
+        <p:spPr>
+          <a:xfrm>
+            <a:off x="777240" y="5669280"/>
+            <a:ext cx="10607040" cy="685800"/>
+          </a:xfrm>
+          <a:prstGeom prst="rect">
+            <a:avLst/>
+          </a:prstGeom>
+          <a:noFill/>
+          <a:ln/>
+        </p:spPr>
+        <p:txBody>
+          <a:bodyPr wrap="square" lIns="0" tIns="0" rIns="0" bIns="0" rtlCol="0" anchor="ctr"/>
+          <a:lstStyle/>
+          <a:p>
+            <a:pPr indent="0" marL="0">
+              <a:buNone/>
+            </a:pPr>
+            <a:r>
+              <a:rPr lang="en-US" sz="3000" b="1" dirty="0">
+                <a:solidFill>
+                  <a:srgbClr val="111111"/>
+                </a:solidFill>
+                <a:latin typeface="Arial" pitchFamily="34" charset="0"/>
+                <a:ea typeface="Arial" pitchFamily="34" charset="-122"/>
+                <a:cs typeface="Arial" pitchFamily="34" charset="-120"/>
+              </a:rPr>
+              <a:t>Мы не обещаем лучший день. Мы показываем сумму</a:t>
             </a:r>
             <a:endParaRPr lang="en-US" sz="3000" dirty="0"/>
           </a:p>

--- a/docs/presentation/fx-pulse-final-draft.pptx
+++ b/docs/presentation/fx-pulse-final-draft.pptx
@@ -1398,7 +1398,7 @@
         </p:nvSpPr>
         <p:spPr>
           <a:xfrm>
-            <a:off x="640080" y="2286000"/>
+            <a:off x="640080" y="2377440"/>
             <a:ext cx="10881360" cy="1828800"/>
           </a:xfrm>
           <a:prstGeom prst="rect">
@@ -1460,7 +1460,7 @@
         </p:nvSpPr>
         <p:spPr>
           <a:xfrm>
-            <a:off x="658368" y="4297680"/>
+            <a:off x="658368" y="4389120"/>
             <a:ext cx="10881360" cy="502920"/>
           </a:xfrm>
           <a:prstGeom prst="rect">
@@ -1493,36 +1493,14 @@
       </p:sp>
       <p:sp>
         <p:nvSpPr>
-          <p:cNvPr id="9" name="Shape 7"/>
-          <p:cNvSpPr/>
+          <p:cNvPr id="9" name="Text 7"/>
+          <p:cNvSpPr txBox="1"/>
           <p:nvPr/>
         </p:nvSpPr>
         <p:spPr>
           <a:xfrm>
-            <a:off x="640080" y="5257800"/>
-            <a:ext cx="4754880" cy="566928"/>
-          </a:xfrm>
-          <a:prstGeom prst="roundRect">
-            <a:avLst>
-              <a:gd name="adj" fmla="val 22581"/>
-            </a:avLst>
-          </a:prstGeom>
-          <a:solidFill>
-            <a:srgbClr val="C3F53C"/>
-          </a:solidFill>
-          <a:ln/>
-        </p:spPr>
-      </p:sp>
-      <p:sp>
-        <p:nvSpPr>
-          <p:cNvPr id="10" name="Text 8"/>
-          <p:cNvSpPr txBox="1"/>
-          <p:nvPr/>
-        </p:nvSpPr>
-        <p:spPr>
-          <a:xfrm>
-            <a:off x="640080" y="5257800"/>
-            <a:ext cx="4754880" cy="566928"/>
+            <a:off x="658368" y="5440680"/>
+            <a:ext cx="10881360" cy="457200"/>
           </a:xfrm>
           <a:prstGeom prst="rect">
             <a:avLst/>
@@ -1534,50 +1512,11 @@
           <a:bodyPr wrap="square" lIns="0" tIns="0" rIns="0" bIns="0" rtlCol="0" anchor="ctr"/>
           <a:lstStyle/>
           <a:p>
-            <a:pPr algn="ctr" indent="0" marL="0">
-              <a:buNone/>
-            </a:pPr>
-            <a:r>
-              <a:rPr lang="en-US" sz="3000" b="1" dirty="0">
-                <a:solidFill>
-                  <a:srgbClr val="111111"/>
-                </a:solidFill>
-                <a:latin typeface="Arial" pitchFamily="34" charset="0"/>
-                <a:ea typeface="Arial" pitchFamily="34" charset="-122"/>
-                <a:cs typeface="Arial" pitchFamily="34" charset="-120"/>
-              </a:rPr>
-              <a:t>Коридор RUB → UZS</a:t>
-            </a:r>
-            <a:endParaRPr lang="en-US" sz="3000" dirty="0"/>
-          </a:p>
-        </p:txBody>
-      </p:sp>
-      <p:sp>
-        <p:nvSpPr>
-          <p:cNvPr id="11" name="Text 9"/>
-          <p:cNvSpPr txBox="1"/>
-          <p:nvPr/>
-        </p:nvSpPr>
-        <p:spPr>
-          <a:xfrm>
-            <a:off x="5669280" y="5321808"/>
-            <a:ext cx="5943600" cy="457200"/>
-          </a:xfrm>
-          <a:prstGeom prst="rect">
-            <a:avLst/>
-          </a:prstGeom>
-          <a:noFill/>
-          <a:ln/>
-        </p:spPr>
-        <p:txBody>
-          <a:bodyPr wrap="square" lIns="0" tIns="0" rIns="0" bIns="0" rtlCol="0" anchor="ctr"/>
-          <a:lstStyle/>
-          <a:p>
-            <a:pPr algn="r" indent="0" marL="0">
-              <a:buNone/>
-            </a:pPr>
-            <a:r>
-              <a:rPr lang="en-US" sz="2000" dirty="0">
+            <a:pPr indent="0" marL="0">
+              <a:buNone/>
+            </a:pPr>
+            <a:r>
+              <a:rPr lang="en-US" sz="2200" dirty="0">
                 <a:solidFill>
                   <a:srgbClr val="C9B4FF"/>
                 </a:solidFill>
@@ -1587,7 +1526,7 @@
               </a:rPr>
               <a:t>Сырых Ольга · Бикинеев Амир · Немкин Кирилл</a:t>
             </a:r>
-            <a:endParaRPr lang="en-US" sz="2000" dirty="0"/>
+            <a:endParaRPr lang="en-US" sz="2200" dirty="0"/>
           </a:p>
         </p:txBody>
       </p:sp>
@@ -1783,11 +1722,11 @@
         <p:spPr>
           <a:xfrm>
             <a:off x="457200" y="1097280"/>
-            <a:ext cx="5532120" cy="2240280"/>
+            <a:ext cx="5532120" cy="2286000"/>
           </a:xfrm>
           <a:prstGeom prst="roundRect">
             <a:avLst>
-              <a:gd name="adj" fmla="val 5714"/>
+              <a:gd name="adj" fmla="val 5600"/>
             </a:avLst>
           </a:prstGeom>
           <a:solidFill>
@@ -1839,7 +1778,7 @@
                 <a:ea typeface="Arial" pitchFamily="34" charset="-122"/>
                 <a:cs typeface="Arial" pitchFamily="34" charset="-120"/>
               </a:rPr>
-              <a:t>Наш клиент</a:t>
+              <a:t>Трудовой мигрант</a:t>
             </a:r>
             <a:endParaRPr lang="en-US" sz="3000" dirty="0"/>
           </a:p>
@@ -1881,7 +1820,7 @@
                 <a:ea typeface="Arial" pitchFamily="34" charset="-122"/>
                 <a:cs typeface="Arial" pitchFamily="34" charset="-120"/>
               </a:rPr>
-              <a:t>Работает в Москве,</a:t>
+              <a:t>Таджикистан, Узбекистан</a:t>
             </a:r>
             <a:endParaRPr lang="en-US" sz="3000" dirty="0"/>
           </a:p>
@@ -1901,7 +1840,7 @@
                 <a:ea typeface="Arial" pitchFamily="34" charset="-122"/>
                 <a:cs typeface="Arial" pitchFamily="34" charset="-120"/>
               </a:rPr>
-              <a:t>шлёт домой раз в месяц</a:t>
+              <a:t>и Киргизия — 87 % всей</a:t>
             </a:r>
             <a:endParaRPr lang="en-US" sz="3000" dirty="0"/>
           </a:p>
@@ -1921,7 +1860,7 @@
                 <a:ea typeface="Arial" pitchFamily="34" charset="-122"/>
                 <a:cs typeface="Arial" pitchFamily="34" charset="-120"/>
               </a:rPr>
-              <a:t>после расчёта</a:t>
+              <a:t>трудовой миграции в РФ</a:t>
             </a:r>
             <a:endParaRPr lang="en-US" sz="3000" dirty="0"/>
           </a:p>
@@ -1936,11 +1875,11 @@
         <p:spPr>
           <a:xfrm>
             <a:off x="6199632" y="1097280"/>
-            <a:ext cx="5532120" cy="2240280"/>
+            <a:ext cx="5532120" cy="2286000"/>
           </a:xfrm>
           <a:prstGeom prst="roundRect">
             <a:avLst>
-              <a:gd name="adj" fmla="val 5714"/>
+              <a:gd name="adj" fmla="val 5600"/>
             </a:avLst>
           </a:prstGeom>
           <a:solidFill>
@@ -1992,7 +1931,7 @@
                 <a:ea typeface="Arial" pitchFamily="34" charset="-122"/>
                 <a:cs typeface="Arial" pitchFamily="34" charset="-120"/>
               </a:rPr>
-              <a:t>Чего он не видит</a:t>
+              <a:t>Как он переводит</a:t>
             </a:r>
             <a:endParaRPr lang="en-US" sz="3000" dirty="0"/>
           </a:p>
@@ -2034,7 +1973,7 @@
                 <a:ea typeface="Arial" pitchFamily="34" charset="-122"/>
                 <a:cs typeface="Arial" pitchFamily="34" charset="-120"/>
               </a:rPr>
-              <a:t>Сколько дойдёт домой.</a:t>
+              <a:t>Домой, семье, раз в месяц</a:t>
             </a:r>
             <a:endParaRPr lang="en-US" sz="3000" dirty="0"/>
           </a:p>
@@ -2054,7 +1993,7 @@
                 <a:ea typeface="Arial" pitchFamily="34" charset="-122"/>
                 <a:cs typeface="Arial" pitchFamily="34" charset="-120"/>
               </a:rPr>
-              <a:t>В переводе по телефону</a:t>
+              <a:t>после расчёта. День</a:t>
             </a:r>
             <a:endParaRPr lang="en-US" sz="3000" dirty="0"/>
           </a:p>
@@ -2074,7 +2013,7 @@
                 <a:ea typeface="Arial" pitchFamily="34" charset="-122"/>
                 <a:cs typeface="Arial" pitchFamily="34" charset="-120"/>
               </a:rPr>
-              <a:t>курса нет вообще</a:t>
+              <a:t>выбирает наугад</a:t>
             </a:r>
             <a:endParaRPr lang="en-US" sz="3000" dirty="0"/>
           </a:p>
@@ -2088,7 +2027,7 @@
         </p:nvSpPr>
         <p:spPr>
           <a:xfrm>
-            <a:off x="457200" y="3474720"/>
+            <a:off x="457200" y="3520440"/>
             <a:ext cx="11274552" cy="1371600"/>
           </a:xfrm>
           <a:prstGeom prst="roundRect">
@@ -2117,8 +2056,8 @@
         </p:nvSpPr>
         <p:spPr>
           <a:xfrm>
-            <a:off x="777240" y="3602736"/>
-            <a:ext cx="2743200" cy="731520"/>
+            <a:off x="777240" y="3648456"/>
+            <a:ext cx="3108960" cy="731520"/>
           </a:xfrm>
           <a:prstGeom prst="rect">
             <a:avLst/>
@@ -2142,7 +2081,7 @@
                 <a:ea typeface="Arial" pitchFamily="34" charset="-122"/>
                 <a:cs typeface="Arial" pitchFamily="34" charset="-120"/>
               </a:rPr>
-              <a:t>4,87 %</a:t>
+              <a:t>2 200 ₽</a:t>
             </a:r>
             <a:endParaRPr lang="en-US" sz="4400" dirty="0"/>
           </a:p>
@@ -2156,8 +2095,8 @@
         </p:nvSpPr>
         <p:spPr>
           <a:xfrm>
-            <a:off x="3657600" y="3639312"/>
-            <a:ext cx="7863840" cy="457200"/>
+            <a:off x="4114800" y="3685032"/>
+            <a:ext cx="7498080" cy="457200"/>
           </a:xfrm>
           <a:prstGeom prst="rect">
             <a:avLst/>
@@ -2184,7 +2123,7 @@
                 <a:ea typeface="Arial" pitchFamily="34" charset="-122"/>
                 <a:cs typeface="Arial" pitchFamily="34" charset="-120"/>
               </a:rPr>
-              <a:t>столько курс ходит за месяц.</a:t>
+              <a:t>разница между лучшим и худшим днём</a:t>
             </a:r>
             <a:endParaRPr lang="en-US" sz="3000" dirty="0"/>
           </a:p>
@@ -2198,8 +2137,8 @@
         </p:nvSpPr>
         <p:spPr>
           <a:xfrm>
-            <a:off x="3657600" y="4096512"/>
-            <a:ext cx="7863840" cy="457200"/>
+            <a:off x="4114800" y="4142232"/>
+            <a:ext cx="7498080" cy="457200"/>
           </a:xfrm>
           <a:prstGeom prst="rect">
             <a:avLst/>
@@ -2226,7 +2165,7 @@
                 <a:ea typeface="Arial" pitchFamily="34" charset="-122"/>
                 <a:cs typeface="Arial" pitchFamily="34" charset="-120"/>
               </a:rPr>
-              <a:t>Клиент выбирает день вслепую</a:t>
+              <a:t>месяца на переводе 45 000 ₽</a:t>
             </a:r>
             <a:endParaRPr lang="en-US" sz="3000" dirty="0"/>
           </a:p>
@@ -2240,12 +2179,12 @@
         </p:nvSpPr>
         <p:spPr>
           <a:xfrm>
-            <a:off x="457200" y="4983480"/>
-            <a:ext cx="11274552" cy="1371600"/>
+            <a:off x="457200" y="5029200"/>
+            <a:ext cx="11274552" cy="1325880"/>
           </a:xfrm>
           <a:prstGeom prst="roundRect">
             <a:avLst>
-              <a:gd name="adj" fmla="val 9333"/>
+              <a:gd name="adj" fmla="val 9655"/>
             </a:avLst>
           </a:prstGeom>
           <a:solidFill>
@@ -2269,7 +2208,7 @@
         </p:nvSpPr>
         <p:spPr>
           <a:xfrm>
-            <a:off x="777240" y="5120640"/>
+            <a:off x="777240" y="5148072"/>
             <a:ext cx="10607040" cy="457200"/>
           </a:xfrm>
           <a:prstGeom prst="rect">
@@ -2289,7 +2228,7 @@
               <a:buNone/>
             </a:pPr>
             <a:r>
-              <a:rPr lang="en-US" sz="3000" dirty="0">
+              <a:rPr lang="en-US" sz="2600" dirty="0">
                 <a:solidFill>
                   <a:srgbClr val="3A3A3A"/>
                 </a:solidFill>
@@ -2297,9 +2236,9 @@
                 <a:ea typeface="Arial" pitchFamily="34" charset="-122"/>
                 <a:cs typeface="Arial" pitchFamily="34" charset="-120"/>
               </a:rPr>
-              <a:t>Wise и Xe шлют алерт, когда курс дошёл до цели</a:t>
-            </a:r>
-            <a:endParaRPr lang="en-US" sz="3000" dirty="0"/>
+              <a:t>Альтернативы: следить за курсом самому · не делать ничего ·</a:t>
+            </a:r>
+            <a:endParaRPr lang="en-US" sz="2600" dirty="0"/>
           </a:p>
         </p:txBody>
       </p:sp>
@@ -2311,7 +2250,7 @@
         </p:nvSpPr>
         <p:spPr>
           <a:xfrm>
-            <a:off x="777240" y="5623560"/>
+            <a:off x="777240" y="5532120"/>
             <a:ext cx="10607040" cy="457200"/>
           </a:xfrm>
           <a:prstGeom prst="rect">
@@ -2331,7 +2270,49 @@
               <a:buNone/>
             </a:pPr>
             <a:r>
-              <a:rPr lang="en-US" sz="3000" b="1" dirty="0">
+              <a:rPr lang="en-US" sz="2600" dirty="0">
+                <a:solidFill>
+                  <a:srgbClr val="3A3A3A"/>
+                </a:solidFill>
+                <a:latin typeface="Arial" pitchFamily="34" charset="0"/>
+                <a:ea typeface="Arial" pitchFamily="34" charset="-122"/>
+                <a:cs typeface="Arial" pitchFamily="34" charset="-120"/>
+              </a:rPr>
+              <a:t>алерты Wise и Xe, где цель ставит сам клиент</a:t>
+            </a:r>
+            <a:endParaRPr lang="en-US" sz="2600" dirty="0"/>
+          </a:p>
+        </p:txBody>
+      </p:sp>
+      <p:sp>
+        <p:nvSpPr>
+          <p:cNvPr id="19" name="Text 17"/>
+          <p:cNvSpPr txBox="1"/>
+          <p:nvPr/>
+        </p:nvSpPr>
+        <p:spPr>
+          <a:xfrm>
+            <a:off x="777240" y="5916168"/>
+            <a:ext cx="10607040" cy="457200"/>
+          </a:xfrm>
+          <a:prstGeom prst="rect">
+            <a:avLst/>
+          </a:prstGeom>
+          <a:noFill/>
+          <a:ln/>
+        </p:spPr>
+        <p:txBody>
+          <a:bodyPr wrap="square" lIns="0" tIns="0" rIns="0" bIns="0" rtlCol="0" anchor="t"/>
+          <a:lstStyle/>
+          <a:p>
+            <a:pPr indent="0" marL="0">
+              <a:lnSpc>
+                <a:spcPct val="100000"/>
+              </a:lnSpc>
+              <a:buNone/>
+            </a:pPr>
+            <a:r>
+              <a:rPr lang="en-US" sz="2600" b="1" dirty="0">
                 <a:solidFill>
                   <a:srgbClr val="111111"/>
                 </a:solidFill>
@@ -2339,9 +2320,9 @@
                 <a:ea typeface="Arial" pitchFamily="34" charset="-122"/>
                 <a:cs typeface="Arial" pitchFamily="34" charset="-120"/>
               </a:rPr>
-              <a:t>Цель ставит клиент. За него момент не выбирает никто</a:t>
-            </a:r>
-            <a:endParaRPr lang="en-US" sz="3000" dirty="0"/>
+              <a:t>Момент за клиента не выбирает никто</a:t>
+            </a:r>
+            <a:endParaRPr lang="en-US" sz="2600" dirty="0"/>
           </a:p>
         </p:txBody>
       </p:sp>
@@ -2552,10 +2533,10 @@
               <a:tblPr/>
               <a:tblGrid>
                 <a:gridCol w="2743200"/>
-                <a:gridCol w="1463040"/>
+                <a:gridCol w="1554480"/>
+                <a:gridCol w="2103120"/>
                 <a:gridCol w="2194560"/>
-                <a:gridCol w="2560320"/>
-                <a:gridCol w="2313432"/>
+                <a:gridCol w="2679192"/>
               </a:tblGrid>
               <a:tr h="457200">
                 <a:tc>
@@ -2643,7 +2624,7 @@
                           <a:ea typeface="Arial" pitchFamily="34" charset="-122"/>
                           <a:cs typeface="Arial" pitchFamily="34" charset="-120"/>
                         </a:rPr>
-                        <a:t>Lift</a:t>
+                        <a:t>Uplift</a:t>
                       </a:r>
                       <a:endParaRPr lang="en-US" sz="3000" dirty="0">
                         <a:latin typeface="Arial" charset="0"/>
@@ -2779,7 +2760,7 @@
                           <a:ea typeface="Arial" pitchFamily="34" charset="-122"/>
                           <a:cs typeface="Arial" pitchFamily="34" charset="-120"/>
                         </a:rPr>
-                        <a:t>На перевод</a:t>
+                        <a:t>Клиенту</a:t>
                       </a:r>
                       <a:endParaRPr lang="en-US" sz="3000" dirty="0">
                         <a:latin typeface="Arial" charset="0"/>
@@ -2847,7 +2828,7 @@
                           <a:ea typeface="Arial" pitchFamily="34" charset="-122"/>
                           <a:cs typeface="Arial" pitchFamily="34" charset="-120"/>
                         </a:rPr>
-                        <a:t>За год</a:t>
+                        <a:t>Банку</a:t>
                       </a:r>
                       <a:endParaRPr lang="en-US" sz="3000" dirty="0">
                         <a:latin typeface="Arial" charset="0"/>
@@ -2985,7 +2966,7 @@
                           <a:ea typeface="Arial" pitchFamily="34" charset="-122"/>
                           <a:cs typeface="Arial" pitchFamily="34" charset="-120"/>
                         </a:rPr>
-                        <a:t>1,25</a:t>
+                        <a:t>1,56</a:t>
                       </a:r>
                       <a:endParaRPr lang="en-US" sz="3000" dirty="0">
                         <a:latin typeface="Arial" charset="0"/>
@@ -3121,7 +3102,7 @@
                           <a:ea typeface="Arial" pitchFamily="34" charset="-122"/>
                           <a:cs typeface="Arial" pitchFamily="34" charset="-120"/>
                         </a:rPr>
-                        <a:t>117 ₽</a:t>
+                        <a:t>1 053 ₽</a:t>
                       </a:r>
                       <a:endParaRPr lang="en-US" sz="3000" dirty="0">
                         <a:latin typeface="Arial" charset="0"/>
@@ -3189,7 +3170,7 @@
                           <a:ea typeface="Arial" pitchFamily="34" charset="-122"/>
                           <a:cs typeface="Arial" pitchFamily="34" charset="-120"/>
                         </a:rPr>
-                        <a:t>1 053 ₽</a:t>
+                        <a:t>40,5 млн</a:t>
                       </a:r>
                       <a:endParaRPr lang="en-US" sz="3000" dirty="0">
                         <a:latin typeface="Arial" charset="0"/>
@@ -3237,6 +3218,348 @@
                     </a:lnB>
                     <a:solidFill>
                       <a:srgbClr val="C3F53C"/>
+                    </a:solidFill>
+                  </a:tcPr>
+                </a:tc>
+              </a:tr>
+              <a:tr h="457200">
+                <a:tc>
+                  <a:txBody>
+                    <a:bodyPr/>
+                    <a:lstStyle/>
+                    <a:p>
+                      <a:pPr indent="0" marL="0">
+                        <a:buNone/>
+                      </a:pPr>
+                      <a:r>
+                        <a:rPr lang="en-US" sz="3000" dirty="0">
+                          <a:solidFill>
+                            <a:srgbClr val="3A3A3A"/>
+                          </a:solidFill>
+                          <a:latin typeface="Arial" pitchFamily="34" charset="0"/>
+                          <a:ea typeface="Arial" pitchFamily="34" charset="-122"/>
+                          <a:cs typeface="Arial" pitchFamily="34" charset="-120"/>
+                        </a:rPr>
+                        <a:t>Армения</a:t>
+                      </a:r>
+                      <a:endParaRPr lang="en-US" sz="3000" dirty="0">
+                        <a:latin typeface="Arial" charset="0"/>
+                        <a:ea typeface="Arial" charset="0"/>
+                        <a:cs typeface="Arial" charset="0"/>
+                      </a:endParaRPr>
+                    </a:p>
+                  </a:txBody>
+                  <a:tcPr marL="91440" marR="91440" marT="45720" marB="45720" anchor="ctr">
+                    <a:lnL w="12700" cap="flat" cmpd="sng" algn="ctr">
+                      <a:solidFill>
+                        <a:srgbClr val="D6D6D6"/>
+                      </a:solidFill>
+                      <a:prstDash val="solid"/>
+                      <a:round/>
+                      <a:headEnd type="none" w="med" len="med"/>
+                      <a:tailEnd type="none" w="med" len="med"/>
+                    </a:lnL>
+                    <a:lnR w="12700" cap="flat" cmpd="sng" algn="ctr">
+                      <a:solidFill>
+                        <a:srgbClr val="D6D6D6"/>
+                      </a:solidFill>
+                      <a:prstDash val="solid"/>
+                      <a:round/>
+                      <a:headEnd type="none" w="med" len="med"/>
+                      <a:tailEnd type="none" w="med" len="med"/>
+                    </a:lnR>
+                    <a:lnT w="12700" cap="flat" cmpd="sng" algn="ctr">
+                      <a:solidFill>
+                        <a:srgbClr val="D6D6D6"/>
+                      </a:solidFill>
+                      <a:prstDash val="solid"/>
+                      <a:round/>
+                      <a:headEnd type="none" w="med" len="med"/>
+                      <a:tailEnd type="none" w="med" len="med"/>
+                    </a:lnT>
+                    <a:lnB w="12700" cap="flat" cmpd="sng" algn="ctr">
+                      <a:solidFill>
+                        <a:srgbClr val="D6D6D6"/>
+                      </a:solidFill>
+                      <a:prstDash val="solid"/>
+                      <a:round/>
+                      <a:headEnd type="none" w="med" len="med"/>
+                      <a:tailEnd type="none" w="med" len="med"/>
+                    </a:lnB>
+                    <a:solidFill>
+                      <a:srgbClr val="FFFFFF"/>
+                    </a:solidFill>
+                  </a:tcPr>
+                </a:tc>
+                <a:tc>
+                  <a:txBody>
+                    <a:bodyPr/>
+                    <a:lstStyle/>
+                    <a:p>
+                      <a:pPr indent="0" marL="0">
+                        <a:buNone/>
+                      </a:pPr>
+                      <a:r>
+                        <a:rPr lang="en-US" sz="3000" dirty="0">
+                          <a:solidFill>
+                            <a:srgbClr val="3A3A3A"/>
+                          </a:solidFill>
+                          <a:latin typeface="Arial" pitchFamily="34" charset="0"/>
+                          <a:ea typeface="Arial" pitchFamily="34" charset="-122"/>
+                          <a:cs typeface="Arial" pitchFamily="34" charset="-120"/>
+                        </a:rPr>
+                        <a:t>1,44</a:t>
+                      </a:r>
+                      <a:endParaRPr lang="en-US" sz="3000" dirty="0">
+                        <a:latin typeface="Arial" charset="0"/>
+                        <a:ea typeface="Arial" charset="0"/>
+                        <a:cs typeface="Arial" charset="0"/>
+                      </a:endParaRPr>
+                    </a:p>
+                  </a:txBody>
+                  <a:tcPr marL="91440" marR="91440" marT="45720" marB="45720" anchor="ctr">
+                    <a:lnL w="12700" cap="flat" cmpd="sng" algn="ctr">
+                      <a:solidFill>
+                        <a:srgbClr val="D6D6D6"/>
+                      </a:solidFill>
+                      <a:prstDash val="solid"/>
+                      <a:round/>
+                      <a:headEnd type="none" w="med" len="med"/>
+                      <a:tailEnd type="none" w="med" len="med"/>
+                    </a:lnL>
+                    <a:lnR w="12700" cap="flat" cmpd="sng" algn="ctr">
+                      <a:solidFill>
+                        <a:srgbClr val="D6D6D6"/>
+                      </a:solidFill>
+                      <a:prstDash val="solid"/>
+                      <a:round/>
+                      <a:headEnd type="none" w="med" len="med"/>
+                      <a:tailEnd type="none" w="med" len="med"/>
+                    </a:lnR>
+                    <a:lnT w="12700" cap="flat" cmpd="sng" algn="ctr">
+                      <a:solidFill>
+                        <a:srgbClr val="D6D6D6"/>
+                      </a:solidFill>
+                      <a:prstDash val="solid"/>
+                      <a:round/>
+                      <a:headEnd type="none" w="med" len="med"/>
+                      <a:tailEnd type="none" w="med" len="med"/>
+                    </a:lnT>
+                    <a:lnB w="12700" cap="flat" cmpd="sng" algn="ctr">
+                      <a:solidFill>
+                        <a:srgbClr val="D6D6D6"/>
+                      </a:solidFill>
+                      <a:prstDash val="solid"/>
+                      <a:round/>
+                      <a:headEnd type="none" w="med" len="med"/>
+                      <a:tailEnd type="none" w="med" len="med"/>
+                    </a:lnB>
+                    <a:solidFill>
+                      <a:srgbClr val="FFFFFF"/>
+                    </a:solidFill>
+                  </a:tcPr>
+                </a:tc>
+                <a:tc>
+                  <a:txBody>
+                    <a:bodyPr/>
+                    <a:lstStyle/>
+                    <a:p>
+                      <a:pPr indent="0" marL="0">
+                        <a:buNone/>
+                      </a:pPr>
+                      <a:r>
+                        <a:rPr lang="en-US" sz="3000" dirty="0">
+                          <a:solidFill>
+                            <a:srgbClr val="3A3A3A"/>
+                          </a:solidFill>
+                          <a:latin typeface="Arial" pitchFamily="34" charset="0"/>
+                          <a:ea typeface="Arial" pitchFamily="34" charset="-122"/>
+                          <a:cs typeface="Arial" pitchFamily="34" charset="-120"/>
+                        </a:rPr>
+                        <a:t>1,11</a:t>
+                      </a:r>
+                      <a:endParaRPr lang="en-US" sz="3000" dirty="0">
+                        <a:latin typeface="Arial" charset="0"/>
+                        <a:ea typeface="Arial" charset="0"/>
+                        <a:cs typeface="Arial" charset="0"/>
+                      </a:endParaRPr>
+                    </a:p>
+                  </a:txBody>
+                  <a:tcPr marL="91440" marR="91440" marT="45720" marB="45720" anchor="ctr">
+                    <a:lnL w="12700" cap="flat" cmpd="sng" algn="ctr">
+                      <a:solidFill>
+                        <a:srgbClr val="D6D6D6"/>
+                      </a:solidFill>
+                      <a:prstDash val="solid"/>
+                      <a:round/>
+                      <a:headEnd type="none" w="med" len="med"/>
+                      <a:tailEnd type="none" w="med" len="med"/>
+                    </a:lnL>
+                    <a:lnR w="12700" cap="flat" cmpd="sng" algn="ctr">
+                      <a:solidFill>
+                        <a:srgbClr val="D6D6D6"/>
+                      </a:solidFill>
+                      <a:prstDash val="solid"/>
+                      <a:round/>
+                      <a:headEnd type="none" w="med" len="med"/>
+                      <a:tailEnd type="none" w="med" len="med"/>
+                    </a:lnR>
+                    <a:lnT w="12700" cap="flat" cmpd="sng" algn="ctr">
+                      <a:solidFill>
+                        <a:srgbClr val="D6D6D6"/>
+                      </a:solidFill>
+                      <a:prstDash val="solid"/>
+                      <a:round/>
+                      <a:headEnd type="none" w="med" len="med"/>
+                      <a:tailEnd type="none" w="med" len="med"/>
+                    </a:lnT>
+                    <a:lnB w="12700" cap="flat" cmpd="sng" algn="ctr">
+                      <a:solidFill>
+                        <a:srgbClr val="D6D6D6"/>
+                      </a:solidFill>
+                      <a:prstDash val="solid"/>
+                      <a:round/>
+                      <a:headEnd type="none" w="med" len="med"/>
+                      <a:tailEnd type="none" w="med" len="med"/>
+                    </a:lnB>
+                    <a:solidFill>
+                      <a:srgbClr val="FFFFFF"/>
+                    </a:solidFill>
+                  </a:tcPr>
+                </a:tc>
+                <a:tc>
+                  <a:txBody>
+                    <a:bodyPr/>
+                    <a:lstStyle/>
+                    <a:p>
+                      <a:pPr indent="0" marL="0">
+                        <a:buNone/>
+                      </a:pPr>
+                      <a:r>
+                        <a:rPr lang="en-US" sz="3000" dirty="0">
+                          <a:solidFill>
+                            <a:srgbClr val="3A3A3A"/>
+                          </a:solidFill>
+                          <a:latin typeface="Arial" pitchFamily="34" charset="0"/>
+                          <a:ea typeface="Arial" pitchFamily="34" charset="-122"/>
+                          <a:cs typeface="Arial" pitchFamily="34" charset="-120"/>
+                        </a:rPr>
+                        <a:t>450 ₽</a:t>
+                      </a:r>
+                      <a:endParaRPr lang="en-US" sz="3000" dirty="0">
+                        <a:latin typeface="Arial" charset="0"/>
+                        <a:ea typeface="Arial" charset="0"/>
+                        <a:cs typeface="Arial" charset="0"/>
+                      </a:endParaRPr>
+                    </a:p>
+                  </a:txBody>
+                  <a:tcPr marL="91440" marR="91440" marT="45720" marB="45720" anchor="ctr">
+                    <a:lnL w="12700" cap="flat" cmpd="sng" algn="ctr">
+                      <a:solidFill>
+                        <a:srgbClr val="D6D6D6"/>
+                      </a:solidFill>
+                      <a:prstDash val="solid"/>
+                      <a:round/>
+                      <a:headEnd type="none" w="med" len="med"/>
+                      <a:tailEnd type="none" w="med" len="med"/>
+                    </a:lnL>
+                    <a:lnR w="12700" cap="flat" cmpd="sng" algn="ctr">
+                      <a:solidFill>
+                        <a:srgbClr val="D6D6D6"/>
+                      </a:solidFill>
+                      <a:prstDash val="solid"/>
+                      <a:round/>
+                      <a:headEnd type="none" w="med" len="med"/>
+                      <a:tailEnd type="none" w="med" len="med"/>
+                    </a:lnR>
+                    <a:lnT w="12700" cap="flat" cmpd="sng" algn="ctr">
+                      <a:solidFill>
+                        <a:srgbClr val="D6D6D6"/>
+                      </a:solidFill>
+                      <a:prstDash val="solid"/>
+                      <a:round/>
+                      <a:headEnd type="none" w="med" len="med"/>
+                      <a:tailEnd type="none" w="med" len="med"/>
+                    </a:lnT>
+                    <a:lnB w="12700" cap="flat" cmpd="sng" algn="ctr">
+                      <a:solidFill>
+                        <a:srgbClr val="D6D6D6"/>
+                      </a:solidFill>
+                      <a:prstDash val="solid"/>
+                      <a:round/>
+                      <a:headEnd type="none" w="med" len="med"/>
+                      <a:tailEnd type="none" w="med" len="med"/>
+                    </a:lnB>
+                    <a:solidFill>
+                      <a:srgbClr val="FFFFFF"/>
+                    </a:solidFill>
+                  </a:tcPr>
+                </a:tc>
+                <a:tc>
+                  <a:txBody>
+                    <a:bodyPr/>
+                    <a:lstStyle/>
+                    <a:p>
+                      <a:pPr indent="0" marL="0">
+                        <a:buNone/>
+                      </a:pPr>
+                      <a:r>
+                        <a:rPr lang="en-US" sz="3000" dirty="0">
+                          <a:solidFill>
+                            <a:srgbClr val="3A3A3A"/>
+                          </a:solidFill>
+                          <a:latin typeface="Arial" pitchFamily="34" charset="0"/>
+                          <a:ea typeface="Arial" pitchFamily="34" charset="-122"/>
+                          <a:cs typeface="Arial" pitchFamily="34" charset="-120"/>
+                        </a:rPr>
+                        <a:t>31,5 млн</a:t>
+                      </a:r>
+                      <a:endParaRPr lang="en-US" sz="3000" dirty="0">
+                        <a:latin typeface="Arial" charset="0"/>
+                        <a:ea typeface="Arial" charset="0"/>
+                        <a:cs typeface="Arial" charset="0"/>
+                      </a:endParaRPr>
+                    </a:p>
+                  </a:txBody>
+                  <a:tcPr marL="91440" marR="91440" marT="45720" marB="45720" anchor="ctr">
+                    <a:lnL w="12700" cap="flat" cmpd="sng" algn="ctr">
+                      <a:solidFill>
+                        <a:srgbClr val="D6D6D6"/>
+                      </a:solidFill>
+                      <a:prstDash val="solid"/>
+                      <a:round/>
+                      <a:headEnd type="none" w="med" len="med"/>
+                      <a:tailEnd type="none" w="med" len="med"/>
+                    </a:lnL>
+                    <a:lnR w="12700" cap="flat" cmpd="sng" algn="ctr">
+                      <a:solidFill>
+                        <a:srgbClr val="D6D6D6"/>
+                      </a:solidFill>
+                      <a:prstDash val="solid"/>
+                      <a:round/>
+                      <a:headEnd type="none" w="med" len="med"/>
+                      <a:tailEnd type="none" w="med" len="med"/>
+                    </a:lnR>
+                    <a:lnT w="12700" cap="flat" cmpd="sng" algn="ctr">
+                      <a:solidFill>
+                        <a:srgbClr val="D6D6D6"/>
+                      </a:solidFill>
+                      <a:prstDash val="solid"/>
+                      <a:round/>
+                      <a:headEnd type="none" w="med" len="med"/>
+                      <a:tailEnd type="none" w="med" len="med"/>
+                    </a:lnT>
+                    <a:lnB w="12700" cap="flat" cmpd="sng" algn="ctr">
+                      <a:solidFill>
+                        <a:srgbClr val="D6D6D6"/>
+                      </a:solidFill>
+                      <a:prstDash val="solid"/>
+                      <a:round/>
+                      <a:headEnd type="none" w="med" len="med"/>
+                      <a:tailEnd type="none" w="med" len="med"/>
+                    </a:lnB>
+                    <a:solidFill>
+                      <a:srgbClr val="FFFFFF"/>
                     </a:solidFill>
                   </a:tcPr>
                 </a:tc>
@@ -3327,7 +3650,7 @@
                           <a:ea typeface="Arial" pitchFamily="34" charset="-122"/>
                           <a:cs typeface="Arial" pitchFamily="34" charset="-120"/>
                         </a:rPr>
-                        <a:t>1,24</a:t>
+                        <a:t>1,44</a:t>
                       </a:r>
                       <a:endParaRPr lang="en-US" sz="3000" dirty="0">
                         <a:latin typeface="Arial" charset="0"/>
@@ -3463,7 +3786,7 @@
                           <a:ea typeface="Arial" pitchFamily="34" charset="-122"/>
                           <a:cs typeface="Arial" pitchFamily="34" charset="-120"/>
                         </a:rPr>
-                        <a:t>46 ₽</a:t>
+                        <a:t>416 ₽</a:t>
                       </a:r>
                       <a:endParaRPr lang="en-US" sz="3000" dirty="0">
                         <a:latin typeface="Arial" charset="0"/>
@@ -3531,349 +3854,7 @@
                           <a:ea typeface="Arial" pitchFamily="34" charset="-122"/>
                           <a:cs typeface="Arial" pitchFamily="34" charset="-120"/>
                         </a:rPr>
-                        <a:t>416 ₽</a:t>
-                      </a:r>
-                      <a:endParaRPr lang="en-US" sz="3000" dirty="0">
-                        <a:latin typeface="Arial" charset="0"/>
-                        <a:ea typeface="Arial" charset="0"/>
-                        <a:cs typeface="Arial" charset="0"/>
-                      </a:endParaRPr>
-                    </a:p>
-                  </a:txBody>
-                  <a:tcPr marL="91440" marR="91440" marT="45720" marB="45720" anchor="ctr">
-                    <a:lnL w="12700" cap="flat" cmpd="sng" algn="ctr">
-                      <a:solidFill>
-                        <a:srgbClr val="D6D6D6"/>
-                      </a:solidFill>
-                      <a:prstDash val="solid"/>
-                      <a:round/>
-                      <a:headEnd type="none" w="med" len="med"/>
-                      <a:tailEnd type="none" w="med" len="med"/>
-                    </a:lnL>
-                    <a:lnR w="12700" cap="flat" cmpd="sng" algn="ctr">
-                      <a:solidFill>
-                        <a:srgbClr val="D6D6D6"/>
-                      </a:solidFill>
-                      <a:prstDash val="solid"/>
-                      <a:round/>
-                      <a:headEnd type="none" w="med" len="med"/>
-                      <a:tailEnd type="none" w="med" len="med"/>
-                    </a:lnR>
-                    <a:lnT w="12700" cap="flat" cmpd="sng" algn="ctr">
-                      <a:solidFill>
-                        <a:srgbClr val="D6D6D6"/>
-                      </a:solidFill>
-                      <a:prstDash val="solid"/>
-                      <a:round/>
-                      <a:headEnd type="none" w="med" len="med"/>
-                      <a:tailEnd type="none" w="med" len="med"/>
-                    </a:lnT>
-                    <a:lnB w="12700" cap="flat" cmpd="sng" algn="ctr">
-                      <a:solidFill>
-                        <a:srgbClr val="D6D6D6"/>
-                      </a:solidFill>
-                      <a:prstDash val="solid"/>
-                      <a:round/>
-                      <a:headEnd type="none" w="med" len="med"/>
-                      <a:tailEnd type="none" w="med" len="med"/>
-                    </a:lnB>
-                    <a:solidFill>
-                      <a:srgbClr val="FFFFFF"/>
-                    </a:solidFill>
-                  </a:tcPr>
-                </a:tc>
-              </a:tr>
-              <a:tr h="457200">
-                <a:tc>
-                  <a:txBody>
-                    <a:bodyPr/>
-                    <a:lstStyle/>
-                    <a:p>
-                      <a:pPr indent="0" marL="0">
-                        <a:buNone/>
-                      </a:pPr>
-                      <a:r>
-                        <a:rPr lang="en-US" sz="3000" dirty="0">
-                          <a:solidFill>
-                            <a:srgbClr val="3A3A3A"/>
-                          </a:solidFill>
-                          <a:latin typeface="Arial" pitchFamily="34" charset="0"/>
-                          <a:ea typeface="Arial" pitchFamily="34" charset="-122"/>
-                          <a:cs typeface="Arial" pitchFamily="34" charset="-120"/>
-                        </a:rPr>
-                        <a:t>Армения</a:t>
-                      </a:r>
-                      <a:endParaRPr lang="en-US" sz="3000" dirty="0">
-                        <a:latin typeface="Arial" charset="0"/>
-                        <a:ea typeface="Arial" charset="0"/>
-                        <a:cs typeface="Arial" charset="0"/>
-                      </a:endParaRPr>
-                    </a:p>
-                  </a:txBody>
-                  <a:tcPr marL="91440" marR="91440" marT="45720" marB="45720" anchor="ctr">
-                    <a:lnL w="12700" cap="flat" cmpd="sng" algn="ctr">
-                      <a:solidFill>
-                        <a:srgbClr val="D6D6D6"/>
-                      </a:solidFill>
-                      <a:prstDash val="solid"/>
-                      <a:round/>
-                      <a:headEnd type="none" w="med" len="med"/>
-                      <a:tailEnd type="none" w="med" len="med"/>
-                    </a:lnL>
-                    <a:lnR w="12700" cap="flat" cmpd="sng" algn="ctr">
-                      <a:solidFill>
-                        <a:srgbClr val="D6D6D6"/>
-                      </a:solidFill>
-                      <a:prstDash val="solid"/>
-                      <a:round/>
-                      <a:headEnd type="none" w="med" len="med"/>
-                      <a:tailEnd type="none" w="med" len="med"/>
-                    </a:lnR>
-                    <a:lnT w="12700" cap="flat" cmpd="sng" algn="ctr">
-                      <a:solidFill>
-                        <a:srgbClr val="D6D6D6"/>
-                      </a:solidFill>
-                      <a:prstDash val="solid"/>
-                      <a:round/>
-                      <a:headEnd type="none" w="med" len="med"/>
-                      <a:tailEnd type="none" w="med" len="med"/>
-                    </a:lnT>
-                    <a:lnB w="12700" cap="flat" cmpd="sng" algn="ctr">
-                      <a:solidFill>
-                        <a:srgbClr val="D6D6D6"/>
-                      </a:solidFill>
-                      <a:prstDash val="solid"/>
-                      <a:round/>
-                      <a:headEnd type="none" w="med" len="med"/>
-                      <a:tailEnd type="none" w="med" len="med"/>
-                    </a:lnB>
-                    <a:solidFill>
-                      <a:srgbClr val="FFFFFF"/>
-                    </a:solidFill>
-                  </a:tcPr>
-                </a:tc>
-                <a:tc>
-                  <a:txBody>
-                    <a:bodyPr/>
-                    <a:lstStyle/>
-                    <a:p>
-                      <a:pPr indent="0" marL="0">
-                        <a:buNone/>
-                      </a:pPr>
-                      <a:r>
-                        <a:rPr lang="en-US" sz="3000" dirty="0">
-                          <a:solidFill>
-                            <a:srgbClr val="3A3A3A"/>
-                          </a:solidFill>
-                          <a:latin typeface="Arial" pitchFamily="34" charset="0"/>
-                          <a:ea typeface="Arial" pitchFamily="34" charset="-122"/>
-                          <a:cs typeface="Arial" pitchFamily="34" charset="-120"/>
-                        </a:rPr>
-                        <a:t>1,24</a:t>
-                      </a:r>
-                      <a:endParaRPr lang="en-US" sz="3000" dirty="0">
-                        <a:latin typeface="Arial" charset="0"/>
-                        <a:ea typeface="Arial" charset="0"/>
-                        <a:cs typeface="Arial" charset="0"/>
-                      </a:endParaRPr>
-                    </a:p>
-                  </a:txBody>
-                  <a:tcPr marL="91440" marR="91440" marT="45720" marB="45720" anchor="ctr">
-                    <a:lnL w="12700" cap="flat" cmpd="sng" algn="ctr">
-                      <a:solidFill>
-                        <a:srgbClr val="D6D6D6"/>
-                      </a:solidFill>
-                      <a:prstDash val="solid"/>
-                      <a:round/>
-                      <a:headEnd type="none" w="med" len="med"/>
-                      <a:tailEnd type="none" w="med" len="med"/>
-                    </a:lnL>
-                    <a:lnR w="12700" cap="flat" cmpd="sng" algn="ctr">
-                      <a:solidFill>
-                        <a:srgbClr val="D6D6D6"/>
-                      </a:solidFill>
-                      <a:prstDash val="solid"/>
-                      <a:round/>
-                      <a:headEnd type="none" w="med" len="med"/>
-                      <a:tailEnd type="none" w="med" len="med"/>
-                    </a:lnR>
-                    <a:lnT w="12700" cap="flat" cmpd="sng" algn="ctr">
-                      <a:solidFill>
-                        <a:srgbClr val="D6D6D6"/>
-                      </a:solidFill>
-                      <a:prstDash val="solid"/>
-                      <a:round/>
-                      <a:headEnd type="none" w="med" len="med"/>
-                      <a:tailEnd type="none" w="med" len="med"/>
-                    </a:lnT>
-                    <a:lnB w="12700" cap="flat" cmpd="sng" algn="ctr">
-                      <a:solidFill>
-                        <a:srgbClr val="D6D6D6"/>
-                      </a:solidFill>
-                      <a:prstDash val="solid"/>
-                      <a:round/>
-                      <a:headEnd type="none" w="med" len="med"/>
-                      <a:tailEnd type="none" w="med" len="med"/>
-                    </a:lnB>
-                    <a:solidFill>
-                      <a:srgbClr val="FFFFFF"/>
-                    </a:solidFill>
-                  </a:tcPr>
-                </a:tc>
-                <a:tc>
-                  <a:txBody>
-                    <a:bodyPr/>
-                    <a:lstStyle/>
-                    <a:p>
-                      <a:pPr indent="0" marL="0">
-                        <a:buNone/>
-                      </a:pPr>
-                      <a:r>
-                        <a:rPr lang="en-US" sz="3000" dirty="0">
-                          <a:solidFill>
-                            <a:srgbClr val="3A3A3A"/>
-                          </a:solidFill>
-                          <a:latin typeface="Arial" pitchFamily="34" charset="0"/>
-                          <a:ea typeface="Arial" pitchFamily="34" charset="-122"/>
-                          <a:cs typeface="Arial" pitchFamily="34" charset="-120"/>
-                        </a:rPr>
-                        <a:t>1,11</a:t>
-                      </a:r>
-                      <a:endParaRPr lang="en-US" sz="3000" dirty="0">
-                        <a:latin typeface="Arial" charset="0"/>
-                        <a:ea typeface="Arial" charset="0"/>
-                        <a:cs typeface="Arial" charset="0"/>
-                      </a:endParaRPr>
-                    </a:p>
-                  </a:txBody>
-                  <a:tcPr marL="91440" marR="91440" marT="45720" marB="45720" anchor="ctr">
-                    <a:lnL w="12700" cap="flat" cmpd="sng" algn="ctr">
-                      <a:solidFill>
-                        <a:srgbClr val="D6D6D6"/>
-                      </a:solidFill>
-                      <a:prstDash val="solid"/>
-                      <a:round/>
-                      <a:headEnd type="none" w="med" len="med"/>
-                      <a:tailEnd type="none" w="med" len="med"/>
-                    </a:lnL>
-                    <a:lnR w="12700" cap="flat" cmpd="sng" algn="ctr">
-                      <a:solidFill>
-                        <a:srgbClr val="D6D6D6"/>
-                      </a:solidFill>
-                      <a:prstDash val="solid"/>
-                      <a:round/>
-                      <a:headEnd type="none" w="med" len="med"/>
-                      <a:tailEnd type="none" w="med" len="med"/>
-                    </a:lnR>
-                    <a:lnT w="12700" cap="flat" cmpd="sng" algn="ctr">
-                      <a:solidFill>
-                        <a:srgbClr val="D6D6D6"/>
-                      </a:solidFill>
-                      <a:prstDash val="solid"/>
-                      <a:round/>
-                      <a:headEnd type="none" w="med" len="med"/>
-                      <a:tailEnd type="none" w="med" len="med"/>
-                    </a:lnT>
-                    <a:lnB w="12700" cap="flat" cmpd="sng" algn="ctr">
-                      <a:solidFill>
-                        <a:srgbClr val="D6D6D6"/>
-                      </a:solidFill>
-                      <a:prstDash val="solid"/>
-                      <a:round/>
-                      <a:headEnd type="none" w="med" len="med"/>
-                      <a:tailEnd type="none" w="med" len="med"/>
-                    </a:lnB>
-                    <a:solidFill>
-                      <a:srgbClr val="FFFFFF"/>
-                    </a:solidFill>
-                  </a:tcPr>
-                </a:tc>
-                <a:tc>
-                  <a:txBody>
-                    <a:bodyPr/>
-                    <a:lstStyle/>
-                    <a:p>
-                      <a:pPr indent="0" marL="0">
-                        <a:buNone/>
-                      </a:pPr>
-                      <a:r>
-                        <a:rPr lang="en-US" sz="3000" dirty="0">
-                          <a:solidFill>
-                            <a:srgbClr val="3A3A3A"/>
-                          </a:solidFill>
-                          <a:latin typeface="Arial" pitchFamily="34" charset="0"/>
-                          <a:ea typeface="Arial" pitchFamily="34" charset="-122"/>
-                          <a:cs typeface="Arial" pitchFamily="34" charset="-120"/>
-                        </a:rPr>
-                        <a:t>50 ₽</a:t>
-                      </a:r>
-                      <a:endParaRPr lang="en-US" sz="3000" dirty="0">
-                        <a:latin typeface="Arial" charset="0"/>
-                        <a:ea typeface="Arial" charset="0"/>
-                        <a:cs typeface="Arial" charset="0"/>
-                      </a:endParaRPr>
-                    </a:p>
-                  </a:txBody>
-                  <a:tcPr marL="91440" marR="91440" marT="45720" marB="45720" anchor="ctr">
-                    <a:lnL w="12700" cap="flat" cmpd="sng" algn="ctr">
-                      <a:solidFill>
-                        <a:srgbClr val="D6D6D6"/>
-                      </a:solidFill>
-                      <a:prstDash val="solid"/>
-                      <a:round/>
-                      <a:headEnd type="none" w="med" len="med"/>
-                      <a:tailEnd type="none" w="med" len="med"/>
-                    </a:lnL>
-                    <a:lnR w="12700" cap="flat" cmpd="sng" algn="ctr">
-                      <a:solidFill>
-                        <a:srgbClr val="D6D6D6"/>
-                      </a:solidFill>
-                      <a:prstDash val="solid"/>
-                      <a:round/>
-                      <a:headEnd type="none" w="med" len="med"/>
-                      <a:tailEnd type="none" w="med" len="med"/>
-                    </a:lnR>
-                    <a:lnT w="12700" cap="flat" cmpd="sng" algn="ctr">
-                      <a:solidFill>
-                        <a:srgbClr val="D6D6D6"/>
-                      </a:solidFill>
-                      <a:prstDash val="solid"/>
-                      <a:round/>
-                      <a:headEnd type="none" w="med" len="med"/>
-                      <a:tailEnd type="none" w="med" len="med"/>
-                    </a:lnT>
-                    <a:lnB w="12700" cap="flat" cmpd="sng" algn="ctr">
-                      <a:solidFill>
-                        <a:srgbClr val="D6D6D6"/>
-                      </a:solidFill>
-                      <a:prstDash val="solid"/>
-                      <a:round/>
-                      <a:headEnd type="none" w="med" len="med"/>
-                      <a:tailEnd type="none" w="med" len="med"/>
-                    </a:lnB>
-                    <a:solidFill>
-                      <a:srgbClr val="FFFFFF"/>
-                    </a:solidFill>
-                  </a:tcPr>
-                </a:tc>
-                <a:tc>
-                  <a:txBody>
-                    <a:bodyPr/>
-                    <a:lstStyle/>
-                    <a:p>
-                      <a:pPr indent="0" marL="0">
-                        <a:buNone/>
-                      </a:pPr>
-                      <a:r>
-                        <a:rPr lang="en-US" sz="3000" dirty="0">
-                          <a:solidFill>
-                            <a:srgbClr val="3A3A3A"/>
-                          </a:solidFill>
-                          <a:latin typeface="Arial" pitchFamily="34" charset="0"/>
-                          <a:ea typeface="Arial" pitchFamily="34" charset="-122"/>
-                          <a:cs typeface="Arial" pitchFamily="34" charset="-120"/>
-                        </a:rPr>
-                        <a:t>450 ₽</a:t>
+                        <a:t>18,0 млн</a:t>
                       </a:r>
                       <a:endParaRPr lang="en-US" sz="3000" dirty="0">
                         <a:latin typeface="Arial" charset="0"/>
@@ -4011,7 +3992,7 @@
                           <a:ea typeface="Arial" pitchFamily="34" charset="-122"/>
                           <a:cs typeface="Arial" pitchFamily="34" charset="-120"/>
                         </a:rPr>
-                        <a:t>1,20</a:t>
+                        <a:t>1,38</a:t>
                       </a:r>
                       <a:endParaRPr lang="en-US" sz="3000" dirty="0">
                         <a:latin typeface="Arial" charset="0"/>
@@ -4147,7 +4128,7 @@
                           <a:ea typeface="Arial" pitchFamily="34" charset="-122"/>
                           <a:cs typeface="Arial" pitchFamily="34" charset="-120"/>
                         </a:rPr>
-                        <a:t>38 ₽</a:t>
+                        <a:t>341 ₽</a:t>
                       </a:r>
                       <a:endParaRPr lang="en-US" sz="3000" dirty="0">
                         <a:latin typeface="Arial" charset="0"/>
@@ -4215,7 +4196,7 @@
                           <a:ea typeface="Arial" pitchFamily="34" charset="-122"/>
                           <a:cs typeface="Arial" pitchFamily="34" charset="-120"/>
                         </a:rPr>
-                        <a:t>341 ₽</a:t>
+                        <a:t>18,0 млн</a:t>
                       </a:r>
                       <a:endParaRPr lang="en-US" sz="3000" dirty="0">
                         <a:latin typeface="Arial" charset="0"/>
@@ -4353,7 +4334,7 @@
                           <a:ea typeface="Arial" pitchFamily="34" charset="-122"/>
                           <a:cs typeface="Arial" pitchFamily="34" charset="-120"/>
                         </a:rPr>
-                        <a:t>1,13</a:t>
+                        <a:t>1,30</a:t>
                       </a:r>
                       <a:endParaRPr lang="en-US" sz="3000" dirty="0">
                         <a:latin typeface="Arial" charset="0"/>
@@ -4489,7 +4470,7 @@
                           <a:ea typeface="Arial" pitchFamily="34" charset="-122"/>
                           <a:cs typeface="Arial" pitchFamily="34" charset="-120"/>
                         </a:rPr>
-                        <a:t>17 ₽</a:t>
+                        <a:t>153 ₽</a:t>
                       </a:r>
                       <a:endParaRPr lang="en-US" sz="3000" dirty="0">
                         <a:latin typeface="Arial" charset="0"/>
@@ -4557,7 +4538,7 @@
                           <a:ea typeface="Arial" pitchFamily="34" charset="-122"/>
                           <a:cs typeface="Arial" pitchFamily="34" charset="-120"/>
                         </a:rPr>
-                        <a:t>153 ₽</a:t>
+                        <a:t>9,0 млн</a:t>
                       </a:r>
                       <a:endParaRPr lang="en-US" sz="3000" dirty="0">
                         <a:latin typeface="Arial" charset="0"/>
@@ -4622,7 +4603,7 @@
         <p:spPr>
           <a:xfrm>
             <a:off x="457200" y="4617720"/>
-            <a:ext cx="5532120" cy="1737360"/>
+            <a:ext cx="11274552" cy="1737360"/>
           </a:xfrm>
           <a:prstGeom prst="roundRect">
             <a:avLst>
@@ -4650,8 +4631,8 @@
         </p:nvSpPr>
         <p:spPr>
           <a:xfrm>
-            <a:off x="731520" y="4736592"/>
-            <a:ext cx="4983480" cy="457200"/>
+            <a:off x="777240" y="4736592"/>
+            <a:ext cx="10607040" cy="457200"/>
           </a:xfrm>
           <a:prstGeom prst="rect">
             <a:avLst/>
@@ -4670,17 +4651,17 @@
               <a:buNone/>
             </a:pPr>
             <a:r>
-              <a:rPr lang="en-US" sz="3000" b="1" dirty="0">
-                <a:solidFill>
-                  <a:srgbClr val="EF3124"/>
-                </a:solidFill>
-                <a:latin typeface="Arial" pitchFamily="34" charset="0"/>
-                <a:ea typeface="Arial" pitchFamily="34" charset="-122"/>
-                <a:cs typeface="Arial" pitchFamily="34" charset="-120"/>
-              </a:rPr>
-              <a:t>Взяли Узбекистан</a:t>
-            </a:r>
-            <a:endParaRPr lang="en-US" sz="3000" dirty="0"/>
+              <a:rPr lang="en-US" sz="2600" b="1" dirty="0">
+                <a:solidFill>
+                  <a:srgbClr val="111111"/>
+                </a:solidFill>
+                <a:latin typeface="Arial" pitchFamily="34" charset="0"/>
+                <a:ea typeface="Arial" pitchFamily="34" charset="-122"/>
+                <a:cs typeface="Arial" pitchFamily="34" charset="-120"/>
+              </a:rPr>
+              <a:t>Узбекистан выигрывает и по модели, и по деньгам банка</a:t>
+            </a:r>
+            <a:endParaRPr lang="en-US" sz="2600" dirty="0"/>
           </a:p>
         </p:txBody>
       </p:sp>
@@ -4692,8 +4673,8 @@
         </p:nvSpPr>
         <p:spPr>
           <a:xfrm>
-            <a:off x="731520" y="5230368"/>
-            <a:ext cx="4983480" cy="914400"/>
+            <a:off x="777240" y="5175504"/>
+            <a:ext cx="10607040" cy="457200"/>
           </a:xfrm>
           <a:prstGeom prst="rect">
             <a:avLst/>
@@ -4712,7 +4693,7 @@
               <a:buNone/>
             </a:pPr>
             <a:r>
-              <a:rPr lang="en-US" sz="3000" dirty="0">
+              <a:rPr lang="en-US" sz="2600" dirty="0">
                 <a:solidFill>
                   <a:srgbClr val="3A3A3A"/>
                 </a:solidFill>
@@ -4720,10 +4701,32 @@
                 <a:ea typeface="Arial" pitchFamily="34" charset="-122"/>
                 <a:cs typeface="Arial" pitchFamily="34" charset="-120"/>
               </a:rPr>
-              <a:t>Лучшая модель, вдвое</a:t>
-            </a:r>
-            <a:endParaRPr lang="en-US" sz="3000" dirty="0"/>
-          </a:p>
+              <a:t>Клиенту — при 9 переводах в год по 45 000 ₽</a:t>
+            </a:r>
+            <a:endParaRPr lang="en-US" sz="2600" dirty="0"/>
+          </a:p>
+        </p:txBody>
+      </p:sp>
+      <p:sp>
+        <p:nvSpPr>
+          <p:cNvPr id="10" name="Text 7"/>
+          <p:cNvSpPr txBox="1"/>
+          <p:nvPr/>
+        </p:nvSpPr>
+        <p:spPr>
+          <a:xfrm>
+            <a:off x="777240" y="5596128"/>
+            <a:ext cx="10607040" cy="457200"/>
+          </a:xfrm>
+          <a:prstGeom prst="rect">
+            <a:avLst/>
+          </a:prstGeom>
+          <a:noFill/>
+          <a:ln/>
+        </p:spPr>
+        <p:txBody>
+          <a:bodyPr wrap="square" lIns="0" tIns="0" rIns="0" bIns="0" rtlCol="0" anchor="t"/>
+          <a:lstStyle/>
           <a:p>
             <a:pPr indent="0" marL="0">
               <a:lnSpc>
@@ -4732,7 +4735,7 @@
               <a:buNone/>
             </a:pPr>
             <a:r>
-              <a:rPr lang="en-US" sz="3000" dirty="0">
+              <a:rPr lang="en-US" sz="2600" dirty="0">
                 <a:solidFill>
                   <a:srgbClr val="3A3A3A"/>
                 </a:solidFill>
@@ -4740,142 +4743,9 @@
                 <a:ea typeface="Arial" pitchFamily="34" charset="-122"/>
                 <a:cs typeface="Arial" pitchFamily="34" charset="-120"/>
               </a:rPr>
-              <a:t>больше денег клиенту</a:t>
-            </a:r>
-            <a:endParaRPr lang="en-US" sz="3000" dirty="0"/>
-          </a:p>
-        </p:txBody>
-      </p:sp>
-      <p:sp>
-        <p:nvSpPr>
-          <p:cNvPr id="10" name="Shape 7"/>
-          <p:cNvSpPr/>
-          <p:nvPr/>
-        </p:nvSpPr>
-        <p:spPr>
-          <a:xfrm>
-            <a:off x="6199632" y="4617720"/>
-            <a:ext cx="5532120" cy="1737360"/>
-          </a:xfrm>
-          <a:prstGeom prst="roundRect">
-            <a:avLst>
-              <a:gd name="adj" fmla="val 7368"/>
-            </a:avLst>
-          </a:prstGeom>
-          <a:solidFill>
-            <a:srgbClr val="FDEAE8"/>
-          </a:solidFill>
-          <a:ln/>
-          <a:effectLst>
-            <a:outerShdw sx="100000" sy="100000" kx="0" ky="0" algn="bl" rotWithShape="0" blurRad="101600" dist="12700" dir="5400000">
-              <a:srgbClr val="9A9A9A">
-                <a:alpha val="18000"/>
-              </a:srgbClr>
-            </a:outerShdw>
-          </a:effectLst>
-        </p:spPr>
-      </p:sp>
-      <p:sp>
-        <p:nvSpPr>
-          <p:cNvPr id="11" name="Text 8"/>
-          <p:cNvSpPr txBox="1"/>
-          <p:nvPr/>
-        </p:nvSpPr>
-        <p:spPr>
-          <a:xfrm>
-            <a:off x="6473952" y="4736592"/>
-            <a:ext cx="4983480" cy="457200"/>
-          </a:xfrm>
-          <a:prstGeom prst="rect">
-            <a:avLst/>
-          </a:prstGeom>
-          <a:noFill/>
-          <a:ln/>
-        </p:spPr>
-        <p:txBody>
-          <a:bodyPr wrap="square" lIns="0" tIns="0" rIns="0" bIns="0" rtlCol="0" anchor="t"/>
-          <a:lstStyle/>
-          <a:p>
-            <a:pPr indent="0" marL="0">
-              <a:lnSpc>
-                <a:spcPct val="100000"/>
-              </a:lnSpc>
-              <a:buNone/>
-            </a:pPr>
-            <a:r>
-              <a:rPr lang="en-US" sz="3000" b="1" dirty="0">
-                <a:solidFill>
-                  <a:srgbClr val="EF3124"/>
-                </a:solidFill>
-                <a:latin typeface="Arial" pitchFamily="34" charset="0"/>
-                <a:ea typeface="Arial" pitchFamily="34" charset="-122"/>
-                <a:cs typeface="Arial" pitchFamily="34" charset="-120"/>
-              </a:rPr>
-              <a:t>Чем платим</a:t>
-            </a:r>
-            <a:endParaRPr lang="en-US" sz="3000" dirty="0"/>
-          </a:p>
-        </p:txBody>
-      </p:sp>
-      <p:sp>
-        <p:nvSpPr>
-          <p:cNvPr id="12" name="Text 9"/>
-          <p:cNvSpPr txBox="1"/>
-          <p:nvPr/>
-        </p:nvSpPr>
-        <p:spPr>
-          <a:xfrm>
-            <a:off x="6473952" y="5230368"/>
-            <a:ext cx="4983480" cy="914400"/>
-          </a:xfrm>
-          <a:prstGeom prst="rect">
-            <a:avLst/>
-          </a:prstGeom>
-          <a:noFill/>
-          <a:ln/>
-        </p:spPr>
-        <p:txBody>
-          <a:bodyPr wrap="square" lIns="0" tIns="0" rIns="0" bIns="0" rtlCol="0" anchor="t"/>
-          <a:lstStyle/>
-          <a:p>
-            <a:pPr indent="0" marL="0">
-              <a:lnSpc>
-                <a:spcPct val="100000"/>
-              </a:lnSpc>
-              <a:buNone/>
-            </a:pPr>
-            <a:r>
-              <a:rPr lang="en-US" sz="3000" dirty="0">
-                <a:solidFill>
-                  <a:srgbClr val="3A3A3A"/>
-                </a:solidFill>
-                <a:latin typeface="Arial" pitchFamily="34" charset="0"/>
-                <a:ea typeface="Arial" pitchFamily="34" charset="-122"/>
-                <a:cs typeface="Arial" pitchFamily="34" charset="-120"/>
-              </a:rPr>
-              <a:t>0,61 сигнала в неделю</a:t>
-            </a:r>
-            <a:endParaRPr lang="en-US" sz="3000" dirty="0"/>
-          </a:p>
-          <a:p>
-            <a:pPr indent="0" marL="0">
-              <a:lnSpc>
-                <a:spcPct val="100000"/>
-              </a:lnSpc>
-              <a:buNone/>
-            </a:pPr>
-            <a:r>
-              <a:rPr lang="en-US" sz="3000" dirty="0">
-                <a:solidFill>
-                  <a:srgbClr val="3A3A3A"/>
-                </a:solidFill>
-                <a:latin typeface="Arial" pitchFamily="34" charset="0"/>
-                <a:ea typeface="Arial" pitchFamily="34" charset="-122"/>
-                <a:cs typeface="Arial" pitchFamily="34" charset="-120"/>
-              </a:rPr>
-              <a:t>вместо 1–2</a:t>
-            </a:r>
-            <a:endParaRPr lang="en-US" sz="3000" dirty="0"/>
+              <a:t>Банку — на 100 тыс. клиентов, маржа 2 %, рост переводов 5 %</a:t>
+            </a:r>
+            <a:endParaRPr lang="en-US" sz="2600" dirty="0"/>
           </a:p>
         </p:txBody>
       </p:sp>
@@ -5071,11 +4941,11 @@
         <p:spPr>
           <a:xfrm>
             <a:off x="457200" y="1097280"/>
-            <a:ext cx="3703320" cy="2514600"/>
+            <a:ext cx="3703320" cy="2560320"/>
           </a:xfrm>
           <a:prstGeom prst="roundRect">
             <a:avLst>
-              <a:gd name="adj" fmla="val 5091"/>
+              <a:gd name="adj" fmla="val 5000"/>
             </a:avLst>
           </a:prstGeom>
           <a:solidFill>
@@ -5141,8 +5011,8 @@
         </p:nvSpPr>
         <p:spPr>
           <a:xfrm>
-            <a:off x="713232" y="1719072"/>
-            <a:ext cx="3246120" cy="1828800"/>
+            <a:off x="713232" y="1737360"/>
+            <a:ext cx="3291840" cy="1828800"/>
           </a:xfrm>
           <a:prstGeom prst="rect">
             <a:avLst/>
@@ -5161,7 +5031,7 @@
               <a:buNone/>
             </a:pPr>
             <a:r>
-              <a:rPr lang="en-US" sz="3000" dirty="0">
+              <a:rPr lang="en-US" sz="2600" dirty="0">
                 <a:solidFill>
                   <a:srgbClr val="3A3A3A"/>
                 </a:solidFill>
@@ -5169,9 +5039,9 @@
                 <a:ea typeface="Arial" pitchFamily="34" charset="-122"/>
                 <a:cs typeface="Arial" pitchFamily="34" charset="-120"/>
               </a:rPr>
-              <a:t>Курсы ЦБ, 8 лет</a:t>
-            </a:r>
-            <a:endParaRPr lang="en-US" sz="3000" dirty="0"/>
+              <a:t>Курсы ЦБ за 8 лет</a:t>
+            </a:r>
+            <a:endParaRPr lang="en-US" sz="2600" dirty="0"/>
           </a:p>
           <a:p>
             <a:pPr indent="0" marL="0">
@@ -5181,7 +5051,7 @@
               <a:buNone/>
             </a:pPr>
             <a:r>
-              <a:rPr lang="en-US" sz="3000" dirty="0">
+              <a:rPr lang="en-US" sz="2600" dirty="0">
                 <a:solidFill>
                   <a:srgbClr val="3A3A3A"/>
                 </a:solidFill>
@@ -5191,7 +5061,7 @@
               </a:rPr>
               <a:t>Биржа и нацбанки</a:t>
             </a:r>
-            <a:endParaRPr lang="en-US" sz="3000" dirty="0"/>
+            <a:endParaRPr lang="en-US" sz="2600" dirty="0"/>
           </a:p>
           <a:p>
             <a:pPr indent="0" marL="0">
@@ -5201,7 +5071,7 @@
               <a:buNone/>
             </a:pPr>
             <a:r>
-              <a:rPr lang="en-US" sz="3000" dirty="0">
+              <a:rPr lang="en-US" sz="2600" dirty="0">
                 <a:solidFill>
                   <a:srgbClr val="3A3A3A"/>
                 </a:solidFill>
@@ -5209,9 +5079,29 @@
                 <a:ea typeface="Arial" pitchFamily="34" charset="-122"/>
                 <a:cs typeface="Arial" pitchFamily="34" charset="-120"/>
               </a:rPr>
-              <a:t>Новостной фон</a:t>
-            </a:r>
-            <a:endParaRPr lang="en-US" sz="3000" dirty="0"/>
+              <a:t>Регламент курса ЦБ</a:t>
+            </a:r>
+            <a:endParaRPr lang="en-US" sz="2600" dirty="0"/>
+          </a:p>
+          <a:p>
+            <a:pPr indent="0" marL="0">
+              <a:lnSpc>
+                <a:spcPct val="100000"/>
+              </a:lnSpc>
+              <a:buNone/>
+            </a:pPr>
+            <a:r>
+              <a:rPr lang="en-US" sz="2600" dirty="0">
+                <a:solidFill>
+                  <a:srgbClr val="3A3A3A"/>
+                </a:solidFill>
+                <a:latin typeface="Arial" pitchFamily="34" charset="0"/>
+                <a:ea typeface="Arial" pitchFamily="34" charset="-122"/>
+                <a:cs typeface="Arial" pitchFamily="34" charset="-120"/>
+              </a:rPr>
+              <a:t>разобран</a:t>
+            </a:r>
+            <a:endParaRPr lang="en-US" sz="2600" dirty="0"/>
           </a:p>
         </p:txBody>
       </p:sp>
@@ -5224,11 +5114,11 @@
         <p:spPr>
           <a:xfrm>
             <a:off x="4370832" y="1097280"/>
-            <a:ext cx="3703320" cy="2514600"/>
+            <a:ext cx="3703320" cy="2560320"/>
           </a:xfrm>
           <a:prstGeom prst="roundRect">
             <a:avLst>
-              <a:gd name="adj" fmla="val 5091"/>
+              <a:gd name="adj" fmla="val 5000"/>
             </a:avLst>
           </a:prstGeom>
           <a:solidFill>
@@ -5294,8 +5184,8 @@
         </p:nvSpPr>
         <p:spPr>
           <a:xfrm>
-            <a:off x="4626864" y="1719072"/>
-            <a:ext cx="3246120" cy="1828800"/>
+            <a:off x="4626864" y="1737360"/>
+            <a:ext cx="3291840" cy="1828800"/>
           </a:xfrm>
           <a:prstGeom prst="rect">
             <a:avLst/>
@@ -5314,7 +5204,7 @@
               <a:buNone/>
             </a:pPr>
             <a:r>
-              <a:rPr lang="en-US" sz="3000" dirty="0">
+              <a:rPr lang="en-US" sz="2600" dirty="0">
                 <a:solidFill>
                   <a:srgbClr val="3A3A3A"/>
                 </a:solidFill>
@@ -5322,9 +5212,9 @@
                 <a:ea typeface="Arial" pitchFamily="34" charset="-122"/>
                 <a:cs typeface="Arial" pitchFamily="34" charset="-120"/>
               </a:rPr>
-              <a:t>CatBoost</a:t>
-            </a:r>
-            <a:endParaRPr lang="en-US" sz="3000" dirty="0"/>
+              <a:t>CatBoost, 5 дней</a:t>
+            </a:r>
+            <a:endParaRPr lang="en-US" sz="2600" dirty="0"/>
           </a:p>
           <a:p>
             <a:pPr indent="0" marL="0">
@@ -5334,7 +5224,7 @@
               <a:buNone/>
             </a:pPr>
             <a:r>
-              <a:rPr lang="en-US" sz="3000" dirty="0">
+              <a:rPr lang="en-US" sz="2600" dirty="0">
                 <a:solidFill>
                   <a:srgbClr val="3A3A3A"/>
                 </a:solidFill>
@@ -5342,9 +5232,9 @@
                 <a:ea typeface="Arial" pitchFamily="34" charset="-122"/>
                 <a:cs typeface="Arial" pitchFamily="34" charset="-120"/>
               </a:rPr>
-              <a:t>5 торговых дней</a:t>
-            </a:r>
-            <a:endParaRPr lang="en-US" sz="3000" dirty="0"/>
+              <a:t>Проверка на пяти</a:t>
+            </a:r>
+            <a:endParaRPr lang="en-US" sz="2600" dirty="0"/>
           </a:p>
           <a:p>
             <a:pPr indent="0" marL="0">
@@ -5354,7 +5244,7 @@
               <a:buNone/>
             </a:pPr>
             <a:r>
-              <a:rPr lang="en-US" sz="3000" dirty="0">
+              <a:rPr lang="en-US" sz="2600" dirty="0">
                 <a:solidFill>
                   <a:srgbClr val="3A3A3A"/>
                 </a:solidFill>
@@ -5362,9 +5252,9 @@
                 <a:ea typeface="Arial" pitchFamily="34" charset="-122"/>
                 <a:cs typeface="Arial" pitchFamily="34" charset="-120"/>
               </a:rPr>
-              <a:t>Проверка на пяти</a:t>
-            </a:r>
-            <a:endParaRPr lang="en-US" sz="3000" dirty="0"/>
+              <a:t>коридорах</a:t>
+            </a:r>
+            <a:endParaRPr lang="en-US" sz="2600" dirty="0"/>
           </a:p>
           <a:p>
             <a:pPr indent="0" marL="0">
@@ -5374,7 +5264,7 @@
               <a:buNone/>
             </a:pPr>
             <a:r>
-              <a:rPr lang="en-US" sz="3000" dirty="0">
+              <a:rPr lang="en-US" sz="2600" dirty="0">
                 <a:solidFill>
                   <a:srgbClr val="3A3A3A"/>
                 </a:solidFill>
@@ -5382,9 +5272,9 @@
                 <a:ea typeface="Arial" pitchFamily="34" charset="-122"/>
                 <a:cs typeface="Arial" pitchFamily="34" charset="-120"/>
               </a:rPr>
-              <a:t>коридорах</a:t>
-            </a:r>
-            <a:endParaRPr lang="en-US" sz="3000" dirty="0"/>
+              <a:t>175 вариантов</a:t>
+            </a:r>
+            <a:endParaRPr lang="en-US" sz="2600" dirty="0"/>
           </a:p>
         </p:txBody>
       </p:sp>
@@ -5397,11 +5287,11 @@
         <p:spPr>
           <a:xfrm>
             <a:off x="8284464" y="1097280"/>
-            <a:ext cx="3703320" cy="2514600"/>
+            <a:ext cx="3703320" cy="2560320"/>
           </a:xfrm>
           <a:prstGeom prst="roundRect">
             <a:avLst>
-              <a:gd name="adj" fmla="val 5091"/>
+              <a:gd name="adj" fmla="val 5000"/>
             </a:avLst>
           </a:prstGeom>
           <a:solidFill>
@@ -5467,8 +5357,8 @@
         </p:nvSpPr>
         <p:spPr>
           <a:xfrm>
-            <a:off x="8540496" y="1719072"/>
-            <a:ext cx="3246120" cy="1828800"/>
+            <a:off x="8540496" y="1737360"/>
+            <a:ext cx="3291840" cy="1828800"/>
           </a:xfrm>
           <a:prstGeom prst="rect">
             <a:avLst/>
@@ -5487,7 +5377,7 @@
               <a:buNone/>
             </a:pPr>
             <a:r>
-              <a:rPr lang="en-US" sz="3000" dirty="0">
+              <a:rPr lang="en-US" sz="2600" dirty="0">
                 <a:solidFill>
                   <a:srgbClr val="3A3A3A"/>
                 </a:solidFill>
@@ -5495,9 +5385,9 @@
                 <a:ea typeface="Arial" pitchFamily="34" charset="-122"/>
                 <a:cs typeface="Arial" pitchFamily="34" charset="-120"/>
               </a:rPr>
-              <a:t>Угадали 62 из 100</a:t>
-            </a:r>
-            <a:endParaRPr lang="en-US" sz="3000" dirty="0"/>
+              <a:t>Uplift 1,56</a:t>
+            </a:r>
+            <a:endParaRPr lang="en-US" sz="2600" dirty="0"/>
           </a:p>
           <a:p>
             <a:pPr indent="0" marL="0">
@@ -5507,7 +5397,7 @@
               <a:buNone/>
             </a:pPr>
             <a:r>
-              <a:rPr lang="en-US" sz="3000" dirty="0">
+              <a:rPr lang="en-US" sz="2600" dirty="0">
                 <a:solidFill>
                   <a:srgbClr val="3A3A3A"/>
                 </a:solidFill>
@@ -5515,9 +5405,9 @@
                 <a:ea typeface="Arial" pitchFamily="34" charset="-122"/>
                 <a:cs typeface="Arial" pitchFamily="34" charset="-120"/>
               </a:rPr>
-              <a:t>Lift 1,25</a:t>
-            </a:r>
-            <a:endParaRPr lang="en-US" sz="3000" dirty="0"/>
+              <a:t>Точность 62 %</a:t>
+            </a:r>
+            <a:endParaRPr lang="en-US" sz="2600" dirty="0"/>
           </a:p>
           <a:p>
             <a:pPr indent="0" marL="0">
@@ -5527,7 +5417,7 @@
               <a:buNone/>
             </a:pPr>
             <a:r>
-              <a:rPr lang="en-US" sz="3000" dirty="0">
+              <a:rPr lang="en-US" sz="2600" dirty="0">
                 <a:solidFill>
                   <a:srgbClr val="3A3A3A"/>
                 </a:solidFill>
@@ -5535,9 +5425,29 @@
                 <a:ea typeface="Arial" pitchFamily="34" charset="-122"/>
                 <a:cs typeface="Arial" pitchFamily="34" charset="-120"/>
               </a:rPr>
-              <a:t>140 сигналов</a:t>
-            </a:r>
-            <a:endParaRPr lang="en-US" sz="3000" dirty="0"/>
+              <a:t>Выгода 26 бп</a:t>
+            </a:r>
+            <a:endParaRPr lang="en-US" sz="2600" dirty="0"/>
+          </a:p>
+          <a:p>
+            <a:pPr indent="0" marL="0">
+              <a:lnSpc>
+                <a:spcPct val="100000"/>
+              </a:lnSpc>
+              <a:buNone/>
+            </a:pPr>
+            <a:r>
+              <a:rPr lang="en-US" sz="2600" dirty="0">
+                <a:solidFill>
+                  <a:srgbClr val="3A3A3A"/>
+                </a:solidFill>
+                <a:latin typeface="Arial" pitchFamily="34" charset="0"/>
+                <a:ea typeface="Arial" pitchFamily="34" charset="-122"/>
+                <a:cs typeface="Arial" pitchFamily="34" charset="-120"/>
+              </a:rPr>
+              <a:t>0,61 сигнала/нед.</a:t>
+            </a:r>
+            <a:endParaRPr lang="en-US" sz="2600" dirty="0"/>
           </a:p>
         </p:txBody>
       </p:sp>
@@ -5549,12 +5459,12 @@
         </p:nvSpPr>
         <p:spPr>
           <a:xfrm>
-            <a:off x="457200" y="3749040"/>
-            <a:ext cx="7360920" cy="2788920"/>
+            <a:off x="457200" y="3794760"/>
+            <a:ext cx="7360920" cy="2560320"/>
           </a:xfrm>
           <a:prstGeom prst="roundRect">
             <a:avLst>
-              <a:gd name="adj" fmla="val 4590"/>
+              <a:gd name="adj" fmla="val 5000"/>
             </a:avLst>
           </a:prstGeom>
           <a:solidFill>
@@ -5578,7 +5488,7 @@
         </p:nvSpPr>
         <p:spPr>
           <a:xfrm>
-            <a:off x="731520" y="3877056"/>
+            <a:off x="731520" y="3913632"/>
             <a:ext cx="6812280" cy="457200"/>
           </a:xfrm>
           <a:prstGeom prst="rect">
@@ -5606,7 +5516,7 @@
                 <a:ea typeface="Arial" pitchFamily="34" charset="-122"/>
                 <a:cs typeface="Arial" pitchFamily="34" charset="-120"/>
               </a:rPr>
-              <a:t>Чего решение не умеет</a:t>
+              <a:t>Что мы про решение знаем</a:t>
             </a:r>
             <a:endParaRPr lang="en-US" sz="3000" dirty="0"/>
           </a:p>
@@ -5620,8 +5530,8 @@
         </p:nvSpPr>
         <p:spPr>
           <a:xfrm>
-            <a:off x="731520" y="4370832"/>
-            <a:ext cx="6812280" cy="2743200"/>
+            <a:off x="731520" y="4480560"/>
+            <a:ext cx="6812280" cy="2286000"/>
           </a:xfrm>
           <a:prstGeom prst="rect">
             <a:avLst/>
@@ -5648,7 +5558,7 @@
                 <a:ea typeface="Arial" pitchFamily="34" charset="-122"/>
                 <a:cs typeface="Arial" pitchFamily="34" charset="-120"/>
               </a:rPr>
-              <a:t>Не ловит лучший день — берёт 26 из 129</a:t>
+              <a:t>Строгая мера uplift — 1,25</a:t>
             </a:r>
             <a:endParaRPr lang="en-US" sz="2400" dirty="0"/>
           </a:p>
@@ -5677,7 +5587,7 @@
                 <a:ea typeface="Arial" pitchFamily="34" charset="-122"/>
                 <a:cs typeface="Arial" pitchFamily="34" charset="-120"/>
               </a:rPr>
-              <a:t>Пишет реже, чем просит кейс</a:t>
+              <a:t>Берём 26 пунктов из 129</a:t>
             </a:r>
             <a:endParaRPr lang="en-US" sz="2400" dirty="0"/>
           </a:p>
@@ -5706,27 +5616,7 @@
                 <a:ea typeface="Arial" pitchFamily="34" charset="-122"/>
                 <a:cs typeface="Arial" pitchFamily="34" charset="-120"/>
               </a:rPr>
-              <a:t>Курс ЦБ — не тот курс, по которому</a:t>
-            </a:r>
-            <a:endParaRPr lang="en-US" sz="2400" dirty="0"/>
-          </a:p>
-          <a:p>
-            <a:pPr indent="0" marL="0">
-              <a:lnSpc>
-                <a:spcPct val="100000"/>
-              </a:lnSpc>
-              <a:buNone/>
-            </a:pPr>
-            <a:r>
-              <a:rPr lang="en-US" sz="2400" dirty="0">
-                <a:solidFill>
-                  <a:srgbClr val="3A3A3A"/>
-                </a:solidFill>
-                <a:latin typeface="Arial" pitchFamily="34" charset="0"/>
-                <a:ea typeface="Arial" pitchFamily="34" charset="-122"/>
-                <a:cs typeface="Arial" pitchFamily="34" charset="-120"/>
-              </a:rPr>
-              <a:t>клиент реально переводит</a:t>
+              <a:t>Курс ЦБ — не курс сделки</a:t>
             </a:r>
             <a:endParaRPr lang="en-US" sz="2400" dirty="0"/>
           </a:p>
@@ -5740,12 +5630,12 @@
         </p:nvSpPr>
         <p:spPr>
           <a:xfrm>
-            <a:off x="8028432" y="3749040"/>
-            <a:ext cx="3703320" cy="2788920"/>
+            <a:off x="8028432" y="3794760"/>
+            <a:ext cx="3703320" cy="2560320"/>
           </a:xfrm>
           <a:prstGeom prst="roundRect">
             <a:avLst>
-              <a:gd name="adj" fmla="val 4590"/>
+              <a:gd name="adj" fmla="val 5000"/>
             </a:avLst>
           </a:prstGeom>
           <a:solidFill>
@@ -5769,7 +5659,7 @@
         </p:nvSpPr>
         <p:spPr>
           <a:xfrm>
-            <a:off x="8284464" y="3877056"/>
+            <a:off x="8284464" y="3913632"/>
             <a:ext cx="3200400" cy="457200"/>
           </a:xfrm>
           <a:prstGeom prst="rect">
@@ -5893,7 +5783,7 @@
         </p:nvSpPr>
         <p:spPr>
           <a:xfrm>
-            <a:off x="8284464" y="5577840"/>
+            <a:off x="8284464" y="5532120"/>
             <a:ext cx="3246120" cy="914400"/>
           </a:xfrm>
           <a:prstGeom prst="rect">
@@ -6541,7 +6431,7 @@
                 <a:ea typeface="Arial" pitchFamily="34" charset="-122"/>
                 <a:cs typeface="Arial" pitchFamily="34" charset="-120"/>
               </a:rPr>
-              <a:t>Успех — это три условия сразу</a:t>
+              <a:t>Успех — переводов стало значимо больше</a:t>
             </a:r>
             <a:endParaRPr lang="en-US" sz="3000" dirty="0"/>
           </a:p>
@@ -6575,7 +6465,7 @@
               <a:buNone/>
             </a:pPr>
             <a:r>
-              <a:rPr lang="en-US" sz="3000" dirty="0">
+              <a:rPr lang="en-US" sz="2600" dirty="0">
                 <a:solidFill>
                   <a:srgbClr val="3A3A3A"/>
                 </a:solidFill>
@@ -6583,9 +6473,9 @@
                 <a:ea typeface="Arial" pitchFamily="34" charset="-122"/>
                 <a:cs typeface="Arial" pitchFamily="34" charset="-120"/>
               </a:rPr>
-              <a:t>Клиент получает больше · переводов не меньше ·</a:t>
-            </a:r>
-            <a:endParaRPr lang="en-US" sz="3000" dirty="0"/>
+              <a:t>Тест на 20 000 в группе различает прирост от 2,9 %.</a:t>
+            </a:r>
+            <a:endParaRPr lang="en-US" sz="2600" dirty="0"/>
           </a:p>
         </p:txBody>
       </p:sp>
@@ -6597,7 +6487,7 @@
         </p:nvSpPr>
         <p:spPr>
           <a:xfrm>
-            <a:off x="777240" y="5029200"/>
+            <a:off x="777240" y="4992624"/>
             <a:ext cx="10607040" cy="457200"/>
           </a:xfrm>
           <a:prstGeom prst="rect">
@@ -6617,7 +6507,7 @@
               <a:buNone/>
             </a:pPr>
             <a:r>
-              <a:rPr lang="en-US" sz="3000" dirty="0">
+              <a:rPr lang="en-US" sz="2600" dirty="0">
                 <a:solidFill>
                   <a:srgbClr val="3A3A3A"/>
                 </a:solidFill>
@@ -6625,9 +6515,9 @@
                 <a:ea typeface="Arial" pitchFamily="34" charset="-122"/>
                 <a:cs typeface="Arial" pitchFamily="34" charset="-120"/>
               </a:rPr>
-              <a:t>от пушей не отписываются</a:t>
-            </a:r>
-            <a:endParaRPr lang="en-US" sz="3000" dirty="0"/>
+              <a:t>Меньше — не отличим от шума, и это не успех</a:t>
+            </a:r>
+            <a:endParaRPr lang="en-US" sz="2600" dirty="0"/>
           </a:p>
         </p:txBody>
       </p:sp>

--- a/docs/presentation/fx-pulse-final-draft.pptx
+++ b/docs/presentation/fx-pulse-final-draft.pptx
@@ -2828,7 +2828,7 @@
                           <a:ea typeface="Arial" pitchFamily="34" charset="-122"/>
                           <a:cs typeface="Arial" pitchFamily="34" charset="-120"/>
                         </a:rPr>
-                        <a:t>Банку</a:t>
+                        <a:t>Рынок</a:t>
                       </a:r>
                       <a:endParaRPr lang="en-US" sz="3000" dirty="0">
                         <a:latin typeface="Arial" charset="0"/>
@@ -3170,7 +3170,7 @@
                           <a:ea typeface="Arial" pitchFamily="34" charset="-122"/>
                           <a:cs typeface="Arial" pitchFamily="34" charset="-120"/>
                         </a:rPr>
-                        <a:t>40,5 млн</a:t>
+                        <a:t>608 млн</a:t>
                       </a:r>
                       <a:endParaRPr lang="en-US" sz="3000" dirty="0">
                         <a:latin typeface="Arial" charset="0"/>
@@ -3240,7 +3240,7 @@
                           <a:ea typeface="Arial" pitchFamily="34" charset="-122"/>
                           <a:cs typeface="Arial" pitchFamily="34" charset="-120"/>
                         </a:rPr>
-                        <a:t>Армения</a:t>
+                        <a:t>Таджикистан</a:t>
                       </a:r>
                       <a:endParaRPr lang="en-US" sz="3000" dirty="0">
                         <a:latin typeface="Arial" charset="0"/>
@@ -3376,348 +3376,6 @@
                           <a:ea typeface="Arial" pitchFamily="34" charset="-122"/>
                           <a:cs typeface="Arial" pitchFamily="34" charset="-120"/>
                         </a:rPr>
-                        <a:t>1,11</a:t>
-                      </a:r>
-                      <a:endParaRPr lang="en-US" sz="3000" dirty="0">
-                        <a:latin typeface="Arial" charset="0"/>
-                        <a:ea typeface="Arial" charset="0"/>
-                        <a:cs typeface="Arial" charset="0"/>
-                      </a:endParaRPr>
-                    </a:p>
-                  </a:txBody>
-                  <a:tcPr marL="91440" marR="91440" marT="45720" marB="45720" anchor="ctr">
-                    <a:lnL w="12700" cap="flat" cmpd="sng" algn="ctr">
-                      <a:solidFill>
-                        <a:srgbClr val="D6D6D6"/>
-                      </a:solidFill>
-                      <a:prstDash val="solid"/>
-                      <a:round/>
-                      <a:headEnd type="none" w="med" len="med"/>
-                      <a:tailEnd type="none" w="med" len="med"/>
-                    </a:lnL>
-                    <a:lnR w="12700" cap="flat" cmpd="sng" algn="ctr">
-                      <a:solidFill>
-                        <a:srgbClr val="D6D6D6"/>
-                      </a:solidFill>
-                      <a:prstDash val="solid"/>
-                      <a:round/>
-                      <a:headEnd type="none" w="med" len="med"/>
-                      <a:tailEnd type="none" w="med" len="med"/>
-                    </a:lnR>
-                    <a:lnT w="12700" cap="flat" cmpd="sng" algn="ctr">
-                      <a:solidFill>
-                        <a:srgbClr val="D6D6D6"/>
-                      </a:solidFill>
-                      <a:prstDash val="solid"/>
-                      <a:round/>
-                      <a:headEnd type="none" w="med" len="med"/>
-                      <a:tailEnd type="none" w="med" len="med"/>
-                    </a:lnT>
-                    <a:lnB w="12700" cap="flat" cmpd="sng" algn="ctr">
-                      <a:solidFill>
-                        <a:srgbClr val="D6D6D6"/>
-                      </a:solidFill>
-                      <a:prstDash val="solid"/>
-                      <a:round/>
-                      <a:headEnd type="none" w="med" len="med"/>
-                      <a:tailEnd type="none" w="med" len="med"/>
-                    </a:lnB>
-                    <a:solidFill>
-                      <a:srgbClr val="FFFFFF"/>
-                    </a:solidFill>
-                  </a:tcPr>
-                </a:tc>
-                <a:tc>
-                  <a:txBody>
-                    <a:bodyPr/>
-                    <a:lstStyle/>
-                    <a:p>
-                      <a:pPr indent="0" marL="0">
-                        <a:buNone/>
-                      </a:pPr>
-                      <a:r>
-                        <a:rPr lang="en-US" sz="3000" dirty="0">
-                          <a:solidFill>
-                            <a:srgbClr val="3A3A3A"/>
-                          </a:solidFill>
-                          <a:latin typeface="Arial" pitchFamily="34" charset="0"/>
-                          <a:ea typeface="Arial" pitchFamily="34" charset="-122"/>
-                          <a:cs typeface="Arial" pitchFamily="34" charset="-120"/>
-                        </a:rPr>
-                        <a:t>450 ₽</a:t>
-                      </a:r>
-                      <a:endParaRPr lang="en-US" sz="3000" dirty="0">
-                        <a:latin typeface="Arial" charset="0"/>
-                        <a:ea typeface="Arial" charset="0"/>
-                        <a:cs typeface="Arial" charset="0"/>
-                      </a:endParaRPr>
-                    </a:p>
-                  </a:txBody>
-                  <a:tcPr marL="91440" marR="91440" marT="45720" marB="45720" anchor="ctr">
-                    <a:lnL w="12700" cap="flat" cmpd="sng" algn="ctr">
-                      <a:solidFill>
-                        <a:srgbClr val="D6D6D6"/>
-                      </a:solidFill>
-                      <a:prstDash val="solid"/>
-                      <a:round/>
-                      <a:headEnd type="none" w="med" len="med"/>
-                      <a:tailEnd type="none" w="med" len="med"/>
-                    </a:lnL>
-                    <a:lnR w="12700" cap="flat" cmpd="sng" algn="ctr">
-                      <a:solidFill>
-                        <a:srgbClr val="D6D6D6"/>
-                      </a:solidFill>
-                      <a:prstDash val="solid"/>
-                      <a:round/>
-                      <a:headEnd type="none" w="med" len="med"/>
-                      <a:tailEnd type="none" w="med" len="med"/>
-                    </a:lnR>
-                    <a:lnT w="12700" cap="flat" cmpd="sng" algn="ctr">
-                      <a:solidFill>
-                        <a:srgbClr val="D6D6D6"/>
-                      </a:solidFill>
-                      <a:prstDash val="solid"/>
-                      <a:round/>
-                      <a:headEnd type="none" w="med" len="med"/>
-                      <a:tailEnd type="none" w="med" len="med"/>
-                    </a:lnT>
-                    <a:lnB w="12700" cap="flat" cmpd="sng" algn="ctr">
-                      <a:solidFill>
-                        <a:srgbClr val="D6D6D6"/>
-                      </a:solidFill>
-                      <a:prstDash val="solid"/>
-                      <a:round/>
-                      <a:headEnd type="none" w="med" len="med"/>
-                      <a:tailEnd type="none" w="med" len="med"/>
-                    </a:lnB>
-                    <a:solidFill>
-                      <a:srgbClr val="FFFFFF"/>
-                    </a:solidFill>
-                  </a:tcPr>
-                </a:tc>
-                <a:tc>
-                  <a:txBody>
-                    <a:bodyPr/>
-                    <a:lstStyle/>
-                    <a:p>
-                      <a:pPr indent="0" marL="0">
-                        <a:buNone/>
-                      </a:pPr>
-                      <a:r>
-                        <a:rPr lang="en-US" sz="3000" dirty="0">
-                          <a:solidFill>
-                            <a:srgbClr val="3A3A3A"/>
-                          </a:solidFill>
-                          <a:latin typeface="Arial" pitchFamily="34" charset="0"/>
-                          <a:ea typeface="Arial" pitchFamily="34" charset="-122"/>
-                          <a:cs typeface="Arial" pitchFamily="34" charset="-120"/>
-                        </a:rPr>
-                        <a:t>31,5 млн</a:t>
-                      </a:r>
-                      <a:endParaRPr lang="en-US" sz="3000" dirty="0">
-                        <a:latin typeface="Arial" charset="0"/>
-                        <a:ea typeface="Arial" charset="0"/>
-                        <a:cs typeface="Arial" charset="0"/>
-                      </a:endParaRPr>
-                    </a:p>
-                  </a:txBody>
-                  <a:tcPr marL="91440" marR="91440" marT="45720" marB="45720" anchor="ctr">
-                    <a:lnL w="12700" cap="flat" cmpd="sng" algn="ctr">
-                      <a:solidFill>
-                        <a:srgbClr val="D6D6D6"/>
-                      </a:solidFill>
-                      <a:prstDash val="solid"/>
-                      <a:round/>
-                      <a:headEnd type="none" w="med" len="med"/>
-                      <a:tailEnd type="none" w="med" len="med"/>
-                    </a:lnL>
-                    <a:lnR w="12700" cap="flat" cmpd="sng" algn="ctr">
-                      <a:solidFill>
-                        <a:srgbClr val="D6D6D6"/>
-                      </a:solidFill>
-                      <a:prstDash val="solid"/>
-                      <a:round/>
-                      <a:headEnd type="none" w="med" len="med"/>
-                      <a:tailEnd type="none" w="med" len="med"/>
-                    </a:lnR>
-                    <a:lnT w="12700" cap="flat" cmpd="sng" algn="ctr">
-                      <a:solidFill>
-                        <a:srgbClr val="D6D6D6"/>
-                      </a:solidFill>
-                      <a:prstDash val="solid"/>
-                      <a:round/>
-                      <a:headEnd type="none" w="med" len="med"/>
-                      <a:tailEnd type="none" w="med" len="med"/>
-                    </a:lnT>
-                    <a:lnB w="12700" cap="flat" cmpd="sng" algn="ctr">
-                      <a:solidFill>
-                        <a:srgbClr val="D6D6D6"/>
-                      </a:solidFill>
-                      <a:prstDash val="solid"/>
-                      <a:round/>
-                      <a:headEnd type="none" w="med" len="med"/>
-                      <a:tailEnd type="none" w="med" len="med"/>
-                    </a:lnB>
-                    <a:solidFill>
-                      <a:srgbClr val="FFFFFF"/>
-                    </a:solidFill>
-                  </a:tcPr>
-                </a:tc>
-              </a:tr>
-              <a:tr h="457200">
-                <a:tc>
-                  <a:txBody>
-                    <a:bodyPr/>
-                    <a:lstStyle/>
-                    <a:p>
-                      <a:pPr indent="0" marL="0">
-                        <a:buNone/>
-                      </a:pPr>
-                      <a:r>
-                        <a:rPr lang="en-US" sz="3000" dirty="0">
-                          <a:solidFill>
-                            <a:srgbClr val="3A3A3A"/>
-                          </a:solidFill>
-                          <a:latin typeface="Arial" pitchFamily="34" charset="0"/>
-                          <a:ea typeface="Arial" pitchFamily="34" charset="-122"/>
-                          <a:cs typeface="Arial" pitchFamily="34" charset="-120"/>
-                        </a:rPr>
-                        <a:t>Таджикистан</a:t>
-                      </a:r>
-                      <a:endParaRPr lang="en-US" sz="3000" dirty="0">
-                        <a:latin typeface="Arial" charset="0"/>
-                        <a:ea typeface="Arial" charset="0"/>
-                        <a:cs typeface="Arial" charset="0"/>
-                      </a:endParaRPr>
-                    </a:p>
-                  </a:txBody>
-                  <a:tcPr marL="91440" marR="91440" marT="45720" marB="45720" anchor="ctr">
-                    <a:lnL w="12700" cap="flat" cmpd="sng" algn="ctr">
-                      <a:solidFill>
-                        <a:srgbClr val="D6D6D6"/>
-                      </a:solidFill>
-                      <a:prstDash val="solid"/>
-                      <a:round/>
-                      <a:headEnd type="none" w="med" len="med"/>
-                      <a:tailEnd type="none" w="med" len="med"/>
-                    </a:lnL>
-                    <a:lnR w="12700" cap="flat" cmpd="sng" algn="ctr">
-                      <a:solidFill>
-                        <a:srgbClr val="D6D6D6"/>
-                      </a:solidFill>
-                      <a:prstDash val="solid"/>
-                      <a:round/>
-                      <a:headEnd type="none" w="med" len="med"/>
-                      <a:tailEnd type="none" w="med" len="med"/>
-                    </a:lnR>
-                    <a:lnT w="12700" cap="flat" cmpd="sng" algn="ctr">
-                      <a:solidFill>
-                        <a:srgbClr val="D6D6D6"/>
-                      </a:solidFill>
-                      <a:prstDash val="solid"/>
-                      <a:round/>
-                      <a:headEnd type="none" w="med" len="med"/>
-                      <a:tailEnd type="none" w="med" len="med"/>
-                    </a:lnT>
-                    <a:lnB w="12700" cap="flat" cmpd="sng" algn="ctr">
-                      <a:solidFill>
-                        <a:srgbClr val="D6D6D6"/>
-                      </a:solidFill>
-                      <a:prstDash val="solid"/>
-                      <a:round/>
-                      <a:headEnd type="none" w="med" len="med"/>
-                      <a:tailEnd type="none" w="med" len="med"/>
-                    </a:lnB>
-                    <a:solidFill>
-                      <a:srgbClr val="FFFFFF"/>
-                    </a:solidFill>
-                  </a:tcPr>
-                </a:tc>
-                <a:tc>
-                  <a:txBody>
-                    <a:bodyPr/>
-                    <a:lstStyle/>
-                    <a:p>
-                      <a:pPr indent="0" marL="0">
-                        <a:buNone/>
-                      </a:pPr>
-                      <a:r>
-                        <a:rPr lang="en-US" sz="3000" dirty="0">
-                          <a:solidFill>
-                            <a:srgbClr val="3A3A3A"/>
-                          </a:solidFill>
-                          <a:latin typeface="Arial" pitchFamily="34" charset="0"/>
-                          <a:ea typeface="Arial" pitchFamily="34" charset="-122"/>
-                          <a:cs typeface="Arial" pitchFamily="34" charset="-120"/>
-                        </a:rPr>
-                        <a:t>1,44</a:t>
-                      </a:r>
-                      <a:endParaRPr lang="en-US" sz="3000" dirty="0">
-                        <a:latin typeface="Arial" charset="0"/>
-                        <a:ea typeface="Arial" charset="0"/>
-                        <a:cs typeface="Arial" charset="0"/>
-                      </a:endParaRPr>
-                    </a:p>
-                  </a:txBody>
-                  <a:tcPr marL="91440" marR="91440" marT="45720" marB="45720" anchor="ctr">
-                    <a:lnL w="12700" cap="flat" cmpd="sng" algn="ctr">
-                      <a:solidFill>
-                        <a:srgbClr val="D6D6D6"/>
-                      </a:solidFill>
-                      <a:prstDash val="solid"/>
-                      <a:round/>
-                      <a:headEnd type="none" w="med" len="med"/>
-                      <a:tailEnd type="none" w="med" len="med"/>
-                    </a:lnL>
-                    <a:lnR w="12700" cap="flat" cmpd="sng" algn="ctr">
-                      <a:solidFill>
-                        <a:srgbClr val="D6D6D6"/>
-                      </a:solidFill>
-                      <a:prstDash val="solid"/>
-                      <a:round/>
-                      <a:headEnd type="none" w="med" len="med"/>
-                      <a:tailEnd type="none" w="med" len="med"/>
-                    </a:lnR>
-                    <a:lnT w="12700" cap="flat" cmpd="sng" algn="ctr">
-                      <a:solidFill>
-                        <a:srgbClr val="D6D6D6"/>
-                      </a:solidFill>
-                      <a:prstDash val="solid"/>
-                      <a:round/>
-                      <a:headEnd type="none" w="med" len="med"/>
-                      <a:tailEnd type="none" w="med" len="med"/>
-                    </a:lnT>
-                    <a:lnB w="12700" cap="flat" cmpd="sng" algn="ctr">
-                      <a:solidFill>
-                        <a:srgbClr val="D6D6D6"/>
-                      </a:solidFill>
-                      <a:prstDash val="solid"/>
-                      <a:round/>
-                      <a:headEnd type="none" w="med" len="med"/>
-                      <a:tailEnd type="none" w="med" len="med"/>
-                    </a:lnB>
-                    <a:solidFill>
-                      <a:srgbClr val="FFFFFF"/>
-                    </a:solidFill>
-                  </a:tcPr>
-                </a:tc>
-                <a:tc>
-                  <a:txBody>
-                    <a:bodyPr/>
-                    <a:lstStyle/>
-                    <a:p>
-                      <a:pPr indent="0" marL="0">
-                        <a:buNone/>
-                      </a:pPr>
-                      <a:r>
-                        <a:rPr lang="en-US" sz="3000" dirty="0">
-                          <a:solidFill>
-                            <a:srgbClr val="3A3A3A"/>
-                          </a:solidFill>
-                          <a:latin typeface="Arial" pitchFamily="34" charset="0"/>
-                          <a:ea typeface="Arial" pitchFamily="34" charset="-122"/>
-                          <a:cs typeface="Arial" pitchFamily="34" charset="-120"/>
-                        </a:rPr>
                         <a:t>1,14</a:t>
                       </a:r>
                       <a:endParaRPr lang="en-US" sz="3000" dirty="0">
@@ -3854,7 +3512,7 @@
                           <a:ea typeface="Arial" pitchFamily="34" charset="-122"/>
                           <a:cs typeface="Arial" pitchFamily="34" charset="-120"/>
                         </a:rPr>
-                        <a:t>18,0 млн</a:t>
+                        <a:t>248 млн</a:t>
                       </a:r>
                       <a:endParaRPr lang="en-US" sz="3000" dirty="0">
                         <a:latin typeface="Arial" charset="0"/>
@@ -4196,7 +3854,349 @@
                           <a:ea typeface="Arial" pitchFamily="34" charset="-122"/>
                           <a:cs typeface="Arial" pitchFamily="34" charset="-120"/>
                         </a:rPr>
-                        <a:t>18,0 млн</a:t>
+                        <a:t>244 млн</a:t>
+                      </a:r>
+                      <a:endParaRPr lang="en-US" sz="3000" dirty="0">
+                        <a:latin typeface="Arial" charset="0"/>
+                        <a:ea typeface="Arial" charset="0"/>
+                        <a:cs typeface="Arial" charset="0"/>
+                      </a:endParaRPr>
+                    </a:p>
+                  </a:txBody>
+                  <a:tcPr marL="91440" marR="91440" marT="45720" marB="45720" anchor="ctr">
+                    <a:lnL w="12700" cap="flat" cmpd="sng" algn="ctr">
+                      <a:solidFill>
+                        <a:srgbClr val="D6D6D6"/>
+                      </a:solidFill>
+                      <a:prstDash val="solid"/>
+                      <a:round/>
+                      <a:headEnd type="none" w="med" len="med"/>
+                      <a:tailEnd type="none" w="med" len="med"/>
+                    </a:lnL>
+                    <a:lnR w="12700" cap="flat" cmpd="sng" algn="ctr">
+                      <a:solidFill>
+                        <a:srgbClr val="D6D6D6"/>
+                      </a:solidFill>
+                      <a:prstDash val="solid"/>
+                      <a:round/>
+                      <a:headEnd type="none" w="med" len="med"/>
+                      <a:tailEnd type="none" w="med" len="med"/>
+                    </a:lnR>
+                    <a:lnT w="12700" cap="flat" cmpd="sng" algn="ctr">
+                      <a:solidFill>
+                        <a:srgbClr val="D6D6D6"/>
+                      </a:solidFill>
+                      <a:prstDash val="solid"/>
+                      <a:round/>
+                      <a:headEnd type="none" w="med" len="med"/>
+                      <a:tailEnd type="none" w="med" len="med"/>
+                    </a:lnT>
+                    <a:lnB w="12700" cap="flat" cmpd="sng" algn="ctr">
+                      <a:solidFill>
+                        <a:srgbClr val="D6D6D6"/>
+                      </a:solidFill>
+                      <a:prstDash val="solid"/>
+                      <a:round/>
+                      <a:headEnd type="none" w="med" len="med"/>
+                      <a:tailEnd type="none" w="med" len="med"/>
+                    </a:lnB>
+                    <a:solidFill>
+                      <a:srgbClr val="FFFFFF"/>
+                    </a:solidFill>
+                  </a:tcPr>
+                </a:tc>
+              </a:tr>
+              <a:tr h="457200">
+                <a:tc>
+                  <a:txBody>
+                    <a:bodyPr/>
+                    <a:lstStyle/>
+                    <a:p>
+                      <a:pPr indent="0" marL="0">
+                        <a:buNone/>
+                      </a:pPr>
+                      <a:r>
+                        <a:rPr lang="en-US" sz="3000" dirty="0">
+                          <a:solidFill>
+                            <a:srgbClr val="3A3A3A"/>
+                          </a:solidFill>
+                          <a:latin typeface="Arial" pitchFamily="34" charset="0"/>
+                          <a:ea typeface="Arial" pitchFamily="34" charset="-122"/>
+                          <a:cs typeface="Arial" pitchFamily="34" charset="-120"/>
+                        </a:rPr>
+                        <a:t>Армения</a:t>
+                      </a:r>
+                      <a:endParaRPr lang="en-US" sz="3000" dirty="0">
+                        <a:latin typeface="Arial" charset="0"/>
+                        <a:ea typeface="Arial" charset="0"/>
+                        <a:cs typeface="Arial" charset="0"/>
+                      </a:endParaRPr>
+                    </a:p>
+                  </a:txBody>
+                  <a:tcPr marL="91440" marR="91440" marT="45720" marB="45720" anchor="ctr">
+                    <a:lnL w="12700" cap="flat" cmpd="sng" algn="ctr">
+                      <a:solidFill>
+                        <a:srgbClr val="D6D6D6"/>
+                      </a:solidFill>
+                      <a:prstDash val="solid"/>
+                      <a:round/>
+                      <a:headEnd type="none" w="med" len="med"/>
+                      <a:tailEnd type="none" w="med" len="med"/>
+                    </a:lnL>
+                    <a:lnR w="12700" cap="flat" cmpd="sng" algn="ctr">
+                      <a:solidFill>
+                        <a:srgbClr val="D6D6D6"/>
+                      </a:solidFill>
+                      <a:prstDash val="solid"/>
+                      <a:round/>
+                      <a:headEnd type="none" w="med" len="med"/>
+                      <a:tailEnd type="none" w="med" len="med"/>
+                    </a:lnR>
+                    <a:lnT w="12700" cap="flat" cmpd="sng" algn="ctr">
+                      <a:solidFill>
+                        <a:srgbClr val="D6D6D6"/>
+                      </a:solidFill>
+                      <a:prstDash val="solid"/>
+                      <a:round/>
+                      <a:headEnd type="none" w="med" len="med"/>
+                      <a:tailEnd type="none" w="med" len="med"/>
+                    </a:lnT>
+                    <a:lnB w="12700" cap="flat" cmpd="sng" algn="ctr">
+                      <a:solidFill>
+                        <a:srgbClr val="D6D6D6"/>
+                      </a:solidFill>
+                      <a:prstDash val="solid"/>
+                      <a:round/>
+                      <a:headEnd type="none" w="med" len="med"/>
+                      <a:tailEnd type="none" w="med" len="med"/>
+                    </a:lnB>
+                    <a:solidFill>
+                      <a:srgbClr val="FFFFFF"/>
+                    </a:solidFill>
+                  </a:tcPr>
+                </a:tc>
+                <a:tc>
+                  <a:txBody>
+                    <a:bodyPr/>
+                    <a:lstStyle/>
+                    <a:p>
+                      <a:pPr indent="0" marL="0">
+                        <a:buNone/>
+                      </a:pPr>
+                      <a:r>
+                        <a:rPr lang="en-US" sz="3000" dirty="0">
+                          <a:solidFill>
+                            <a:srgbClr val="3A3A3A"/>
+                          </a:solidFill>
+                          <a:latin typeface="Arial" pitchFamily="34" charset="0"/>
+                          <a:ea typeface="Arial" pitchFamily="34" charset="-122"/>
+                          <a:cs typeface="Arial" pitchFamily="34" charset="-120"/>
+                        </a:rPr>
+                        <a:t>1,44</a:t>
+                      </a:r>
+                      <a:endParaRPr lang="en-US" sz="3000" dirty="0">
+                        <a:latin typeface="Arial" charset="0"/>
+                        <a:ea typeface="Arial" charset="0"/>
+                        <a:cs typeface="Arial" charset="0"/>
+                      </a:endParaRPr>
+                    </a:p>
+                  </a:txBody>
+                  <a:tcPr marL="91440" marR="91440" marT="45720" marB="45720" anchor="ctr">
+                    <a:lnL w="12700" cap="flat" cmpd="sng" algn="ctr">
+                      <a:solidFill>
+                        <a:srgbClr val="D6D6D6"/>
+                      </a:solidFill>
+                      <a:prstDash val="solid"/>
+                      <a:round/>
+                      <a:headEnd type="none" w="med" len="med"/>
+                      <a:tailEnd type="none" w="med" len="med"/>
+                    </a:lnL>
+                    <a:lnR w="12700" cap="flat" cmpd="sng" algn="ctr">
+                      <a:solidFill>
+                        <a:srgbClr val="D6D6D6"/>
+                      </a:solidFill>
+                      <a:prstDash val="solid"/>
+                      <a:round/>
+                      <a:headEnd type="none" w="med" len="med"/>
+                      <a:tailEnd type="none" w="med" len="med"/>
+                    </a:lnR>
+                    <a:lnT w="12700" cap="flat" cmpd="sng" algn="ctr">
+                      <a:solidFill>
+                        <a:srgbClr val="D6D6D6"/>
+                      </a:solidFill>
+                      <a:prstDash val="solid"/>
+                      <a:round/>
+                      <a:headEnd type="none" w="med" len="med"/>
+                      <a:tailEnd type="none" w="med" len="med"/>
+                    </a:lnT>
+                    <a:lnB w="12700" cap="flat" cmpd="sng" algn="ctr">
+                      <a:solidFill>
+                        <a:srgbClr val="D6D6D6"/>
+                      </a:solidFill>
+                      <a:prstDash val="solid"/>
+                      <a:round/>
+                      <a:headEnd type="none" w="med" len="med"/>
+                      <a:tailEnd type="none" w="med" len="med"/>
+                    </a:lnB>
+                    <a:solidFill>
+                      <a:srgbClr val="FFFFFF"/>
+                    </a:solidFill>
+                  </a:tcPr>
+                </a:tc>
+                <a:tc>
+                  <a:txBody>
+                    <a:bodyPr/>
+                    <a:lstStyle/>
+                    <a:p>
+                      <a:pPr indent="0" marL="0">
+                        <a:buNone/>
+                      </a:pPr>
+                      <a:r>
+                        <a:rPr lang="en-US" sz="3000" dirty="0">
+                          <a:solidFill>
+                            <a:srgbClr val="3A3A3A"/>
+                          </a:solidFill>
+                          <a:latin typeface="Arial" pitchFamily="34" charset="0"/>
+                          <a:ea typeface="Arial" pitchFamily="34" charset="-122"/>
+                          <a:cs typeface="Arial" pitchFamily="34" charset="-120"/>
+                        </a:rPr>
+                        <a:t>1,11</a:t>
+                      </a:r>
+                      <a:endParaRPr lang="en-US" sz="3000" dirty="0">
+                        <a:latin typeface="Arial" charset="0"/>
+                        <a:ea typeface="Arial" charset="0"/>
+                        <a:cs typeface="Arial" charset="0"/>
+                      </a:endParaRPr>
+                    </a:p>
+                  </a:txBody>
+                  <a:tcPr marL="91440" marR="91440" marT="45720" marB="45720" anchor="ctr">
+                    <a:lnL w="12700" cap="flat" cmpd="sng" algn="ctr">
+                      <a:solidFill>
+                        <a:srgbClr val="D6D6D6"/>
+                      </a:solidFill>
+                      <a:prstDash val="solid"/>
+                      <a:round/>
+                      <a:headEnd type="none" w="med" len="med"/>
+                      <a:tailEnd type="none" w="med" len="med"/>
+                    </a:lnL>
+                    <a:lnR w="12700" cap="flat" cmpd="sng" algn="ctr">
+                      <a:solidFill>
+                        <a:srgbClr val="D6D6D6"/>
+                      </a:solidFill>
+                      <a:prstDash val="solid"/>
+                      <a:round/>
+                      <a:headEnd type="none" w="med" len="med"/>
+                      <a:tailEnd type="none" w="med" len="med"/>
+                    </a:lnR>
+                    <a:lnT w="12700" cap="flat" cmpd="sng" algn="ctr">
+                      <a:solidFill>
+                        <a:srgbClr val="D6D6D6"/>
+                      </a:solidFill>
+                      <a:prstDash val="solid"/>
+                      <a:round/>
+                      <a:headEnd type="none" w="med" len="med"/>
+                      <a:tailEnd type="none" w="med" len="med"/>
+                    </a:lnT>
+                    <a:lnB w="12700" cap="flat" cmpd="sng" algn="ctr">
+                      <a:solidFill>
+                        <a:srgbClr val="D6D6D6"/>
+                      </a:solidFill>
+                      <a:prstDash val="solid"/>
+                      <a:round/>
+                      <a:headEnd type="none" w="med" len="med"/>
+                      <a:tailEnd type="none" w="med" len="med"/>
+                    </a:lnB>
+                    <a:solidFill>
+                      <a:srgbClr val="FFFFFF"/>
+                    </a:solidFill>
+                  </a:tcPr>
+                </a:tc>
+                <a:tc>
+                  <a:txBody>
+                    <a:bodyPr/>
+                    <a:lstStyle/>
+                    <a:p>
+                      <a:pPr indent="0" marL="0">
+                        <a:buNone/>
+                      </a:pPr>
+                      <a:r>
+                        <a:rPr lang="en-US" sz="3000" dirty="0">
+                          <a:solidFill>
+                            <a:srgbClr val="3A3A3A"/>
+                          </a:solidFill>
+                          <a:latin typeface="Arial" pitchFamily="34" charset="0"/>
+                          <a:ea typeface="Arial" pitchFamily="34" charset="-122"/>
+                          <a:cs typeface="Arial" pitchFamily="34" charset="-120"/>
+                        </a:rPr>
+                        <a:t>450 ₽</a:t>
+                      </a:r>
+                      <a:endParaRPr lang="en-US" sz="3000" dirty="0">
+                        <a:latin typeface="Arial" charset="0"/>
+                        <a:ea typeface="Arial" charset="0"/>
+                        <a:cs typeface="Arial" charset="0"/>
+                      </a:endParaRPr>
+                    </a:p>
+                  </a:txBody>
+                  <a:tcPr marL="91440" marR="91440" marT="45720" marB="45720" anchor="ctr">
+                    <a:lnL w="12700" cap="flat" cmpd="sng" algn="ctr">
+                      <a:solidFill>
+                        <a:srgbClr val="D6D6D6"/>
+                      </a:solidFill>
+                      <a:prstDash val="solid"/>
+                      <a:round/>
+                      <a:headEnd type="none" w="med" len="med"/>
+                      <a:tailEnd type="none" w="med" len="med"/>
+                    </a:lnL>
+                    <a:lnR w="12700" cap="flat" cmpd="sng" algn="ctr">
+                      <a:solidFill>
+                        <a:srgbClr val="D6D6D6"/>
+                      </a:solidFill>
+                      <a:prstDash val="solid"/>
+                      <a:round/>
+                      <a:headEnd type="none" w="med" len="med"/>
+                      <a:tailEnd type="none" w="med" len="med"/>
+                    </a:lnR>
+                    <a:lnT w="12700" cap="flat" cmpd="sng" algn="ctr">
+                      <a:solidFill>
+                        <a:srgbClr val="D6D6D6"/>
+                      </a:solidFill>
+                      <a:prstDash val="solid"/>
+                      <a:round/>
+                      <a:headEnd type="none" w="med" len="med"/>
+                      <a:tailEnd type="none" w="med" len="med"/>
+                    </a:lnT>
+                    <a:lnB w="12700" cap="flat" cmpd="sng" algn="ctr">
+                      <a:solidFill>
+                        <a:srgbClr val="D6D6D6"/>
+                      </a:solidFill>
+                      <a:prstDash val="solid"/>
+                      <a:round/>
+                      <a:headEnd type="none" w="med" len="med"/>
+                      <a:tailEnd type="none" w="med" len="med"/>
+                    </a:lnB>
+                    <a:solidFill>
+                      <a:srgbClr val="FFFFFF"/>
+                    </a:solidFill>
+                  </a:tcPr>
+                </a:tc>
+                <a:tc>
+                  <a:txBody>
+                    <a:bodyPr/>
+                    <a:lstStyle/>
+                    <a:p>
+                      <a:pPr indent="0" marL="0">
+                        <a:buNone/>
+                      </a:pPr>
+                      <a:r>
+                        <a:rPr lang="en-US" sz="3000" dirty="0">
+                          <a:solidFill>
+                            <a:srgbClr val="3A3A3A"/>
+                          </a:solidFill>
+                          <a:latin typeface="Arial" pitchFamily="34" charset="0"/>
+                          <a:ea typeface="Arial" pitchFamily="34" charset="-122"/>
+                          <a:cs typeface="Arial" pitchFamily="34" charset="-120"/>
+                        </a:rPr>
+                        <a:t>94 млн</a:t>
                       </a:r>
                       <a:endParaRPr lang="en-US" sz="3000" dirty="0">
                         <a:latin typeface="Arial" charset="0"/>
@@ -4538,7 +4538,7 @@
                           <a:ea typeface="Arial" pitchFamily="34" charset="-122"/>
                           <a:cs typeface="Arial" pitchFamily="34" charset="-120"/>
                         </a:rPr>
-                        <a:t>9,0 млн</a:t>
+                        <a:t>62 млн</a:t>
                       </a:r>
                       <a:endParaRPr lang="en-US" sz="3000" dirty="0">
                         <a:latin typeface="Arial" charset="0"/>
@@ -4659,7 +4659,7 @@
                 <a:ea typeface="Arial" pitchFamily="34" charset="-122"/>
                 <a:cs typeface="Arial" pitchFamily="34" charset="-120"/>
               </a:rPr>
-              <a:t>Узбекистан выигрывает и по модели, и по деньгам банка</a:t>
+              <a:t>Узбекистан: вдвое больше клиенту, вшестеро больше рынок</a:t>
             </a:r>
             <a:endParaRPr lang="en-US" sz="2600" dirty="0"/>
           </a:p>
@@ -4701,7 +4701,7 @@
                 <a:ea typeface="Arial" pitchFamily="34" charset="-122"/>
                 <a:cs typeface="Arial" pitchFamily="34" charset="-120"/>
               </a:rPr>
-              <a:t>Клиенту — при 9 переводах в год по 45 000 ₽</a:t>
+              <a:t>Рынок — весь коридор в год при росте переводов 5 % и марже 2 %</a:t>
             </a:r>
             <a:endParaRPr lang="en-US" sz="2600" dirty="0"/>
           </a:p>
@@ -4743,7 +4743,7 @@
                 <a:ea typeface="Arial" pitchFamily="34" charset="-122"/>
                 <a:cs typeface="Arial" pitchFamily="34" charset="-120"/>
               </a:rPr>
-              <a:t>Банку — на 100 тыс. клиентов, маржа 2 %, рост переводов 5 %</a:t>
+              <a:t>Армения — другой клиент: там релокация, а не трудовая миграция</a:t>
             </a:r>
             <a:endParaRPr lang="en-US" sz="2600" dirty="0"/>
           </a:p>

--- a/docs/presentation/fx-pulse-final-draft.pptx
+++ b/docs/presentation/fx-pulse-final-draft.pptx
@@ -4743,7 +4743,7 @@
                 <a:ea typeface="Arial" pitchFamily="34" charset="-122"/>
                 <a:cs typeface="Arial" pitchFamily="34" charset="-120"/>
               </a:rPr>
-              <a:t>Армения — другой клиент: там релокация, а не трудовая миграция</a:t>
+              <a:t>Армения и Казахстан — другой отправитель, не трудовая миграция</a:t>
             </a:r>
             <a:endParaRPr lang="en-US" sz="2600" dirty="0"/>
           </a:p>

--- a/docs/presentation/fx-pulse-final-draft.pptx
+++ b/docs/presentation/fx-pulse-final-draft.pptx
@@ -1485,7 +1485,7 @@
                 <a:ea typeface="Arial" pitchFamily="34" charset="-122"/>
                 <a:cs typeface="Arial" pitchFamily="34" charset="-120"/>
               </a:rPr>
-              <a:t>Когда подсказать клиенту момент для перевода домой</a:t>
+              <a:t>Пуш о моменте для перевода, под капотом ML-модель</a:t>
             </a:r>
             <a:endParaRPr lang="en-US" sz="3000" dirty="0"/>
           </a:p>
@@ -1973,7 +1973,7 @@
                 <a:ea typeface="Arial" pitchFamily="34" charset="-122"/>
                 <a:cs typeface="Arial" pitchFamily="34" charset="-120"/>
               </a:rPr>
-              <a:t>Домой, семье, раз в месяц</a:t>
+              <a:t>Семье, раз в месяц после</a:t>
             </a:r>
             <a:endParaRPr lang="en-US" sz="3000" dirty="0"/>
           </a:p>
@@ -1993,7 +1993,7 @@
                 <a:ea typeface="Arial" pitchFamily="34" charset="-122"/>
                 <a:cs typeface="Arial" pitchFamily="34" charset="-120"/>
               </a:rPr>
-              <a:t>после расчёта. День</a:t>
+              <a:t>расчёта. В приложении</a:t>
             </a:r>
             <a:endParaRPr lang="en-US" sz="3000" dirty="0"/>
           </a:p>
@@ -2013,7 +2013,7 @@
                 <a:ea typeface="Arial" pitchFamily="34" charset="-122"/>
                 <a:cs typeface="Arial" pitchFamily="34" charset="-120"/>
               </a:rPr>
-              <a:t>выбирает наугад</a:t>
+              <a:t>не видно, сколько дойдёт</a:t>
             </a:r>
             <a:endParaRPr lang="en-US" sz="3000" dirty="0"/>
           </a:p>
@@ -2123,7 +2123,7 @@
                 <a:ea typeface="Arial" pitchFamily="34" charset="-122"/>
                 <a:cs typeface="Arial" pitchFamily="34" charset="-120"/>
               </a:rPr>
-              <a:t>разница между лучшим и худшим днём</a:t>
+              <a:t>между лучшим и худшим днём месяца</a:t>
             </a:r>
             <a:endParaRPr lang="en-US" sz="3000" dirty="0"/>
           </a:p>
@@ -2165,7 +2165,7 @@
                 <a:ea typeface="Arial" pitchFamily="34" charset="-122"/>
                 <a:cs typeface="Arial" pitchFamily="34" charset="-120"/>
               </a:rPr>
-              <a:t>месяца на переводе 45 000 ₽</a:t>
+              <a:t>на среднем переводе в 45 000 ₽</a:t>
             </a:r>
             <a:endParaRPr lang="en-US" sz="3000" dirty="0"/>
           </a:p>
@@ -2320,7 +2320,7 @@
                 <a:ea typeface="Arial" pitchFamily="34" charset="-122"/>
                 <a:cs typeface="Arial" pitchFamily="34" charset="-120"/>
               </a:rPr>
-              <a:t>Момент за клиента не выбирает никто</a:t>
+              <a:t>Порог задаёт клиент. Момент за него не выбирает никто</a:t>
             </a:r>
             <a:endParaRPr lang="en-US" sz="2600" dirty="0"/>
           </a:p>
@@ -2692,7 +2692,7 @@
                           <a:ea typeface="Arial" pitchFamily="34" charset="-122"/>
                           <a:cs typeface="Arial" pitchFamily="34" charset="-120"/>
                         </a:rPr>
-                        <a:t>Сигналов</a:t>
+                        <a:t>В неделю</a:t>
                       </a:r>
                       <a:endParaRPr lang="en-US" sz="3000" dirty="0">
                         <a:latin typeface="Arial" charset="0"/>
@@ -4659,7 +4659,7 @@
                 <a:ea typeface="Arial" pitchFamily="34" charset="-122"/>
                 <a:cs typeface="Arial" pitchFamily="34" charset="-120"/>
               </a:rPr>
-              <a:t>Узбекистан: вдвое больше клиенту, вшестеро больше рынок</a:t>
+              <a:t>Узбекистан: лучший uplift, вдвое клиенту, вшестеро рынок</a:t>
             </a:r>
             <a:endParaRPr lang="en-US" sz="2600" dirty="0"/>
           </a:p>
@@ -4701,7 +4701,7 @@
                 <a:ea typeface="Arial" pitchFamily="34" charset="-122"/>
                 <a:cs typeface="Arial" pitchFamily="34" charset="-120"/>
               </a:rPr>
-              <a:t>Рынок — весь коридор в год при росте переводов 5 % и марже 2 %</a:t>
+              <a:t>Клиенту — за год при 9 переводах. Рынок — коридор целиком в год</a:t>
             </a:r>
             <a:endParaRPr lang="en-US" sz="2600" dirty="0"/>
           </a:p>
@@ -5079,7 +5079,7 @@
                 <a:ea typeface="Arial" pitchFamily="34" charset="-122"/>
                 <a:cs typeface="Arial" pitchFamily="34" charset="-120"/>
               </a:rPr>
-              <a:t>Регламент курса ЦБ</a:t>
+              <a:t>Всё открытое</a:t>
             </a:r>
             <a:endParaRPr lang="en-US" sz="2600" dirty="0"/>
           </a:p>
@@ -5099,7 +5099,7 @@
                 <a:ea typeface="Arial" pitchFamily="34" charset="-122"/>
                 <a:cs typeface="Arial" pitchFamily="34" charset="-120"/>
               </a:rPr>
-              <a:t>разобран</a:t>
+              <a:t>и воспроизводимое</a:t>
             </a:r>
             <a:endParaRPr lang="en-US" sz="2600" dirty="0"/>
           </a:p>
@@ -5232,7 +5232,7 @@
                 <a:ea typeface="Arial" pitchFamily="34" charset="-122"/>
                 <a:cs typeface="Arial" pitchFamily="34" charset="-120"/>
               </a:rPr>
-              <a:t>Проверка на пяти</a:t>
+              <a:t>Подтверждение</a:t>
             </a:r>
             <a:endParaRPr lang="en-US" sz="2600" dirty="0"/>
           </a:p>
@@ -5252,7 +5252,7 @@
                 <a:ea typeface="Arial" pitchFamily="34" charset="-122"/>
                 <a:cs typeface="Arial" pitchFamily="34" charset="-120"/>
               </a:rPr>
-              <a:t>коридорах</a:t>
+              <a:t>пятью коридорами</a:t>
             </a:r>
             <a:endParaRPr lang="en-US" sz="2600" dirty="0"/>
           </a:p>
@@ -5445,7 +5445,7 @@
                 <a:ea typeface="Arial" pitchFamily="34" charset="-122"/>
                 <a:cs typeface="Arial" pitchFamily="34" charset="-120"/>
               </a:rPr>
-              <a:t>0,61 сигнала/нед.</a:t>
+              <a:t>Без заглядывания</a:t>
             </a:r>
             <a:endParaRPr lang="en-US" sz="2600" dirty="0"/>
           </a:p>
@@ -5516,7 +5516,7 @@
                 <a:ea typeface="Arial" pitchFamily="34" charset="-122"/>
                 <a:cs typeface="Arial" pitchFamily="34" charset="-120"/>
               </a:rPr>
-              <a:t>Что мы про решение знаем</a:t>
+              <a:t>Что решение не умеет</a:t>
             </a:r>
             <a:endParaRPr lang="en-US" sz="3000" dirty="0"/>
           </a:p>
@@ -5558,7 +5558,7 @@
                 <a:ea typeface="Arial" pitchFamily="34" charset="-122"/>
                 <a:cs typeface="Arial" pitchFamily="34" charset="-120"/>
               </a:rPr>
-              <a:t>Строгая мера uplift — 1,25</a:t>
+              <a:t>Не ловит дно: берём 26 бп из 129</a:t>
             </a:r>
             <a:endParaRPr lang="en-US" sz="2400" dirty="0"/>
           </a:p>
@@ -5587,7 +5587,7 @@
                 <a:ea typeface="Arial" pitchFamily="34" charset="-122"/>
                 <a:cs typeface="Arial" pitchFamily="34" charset="-120"/>
               </a:rPr>
-              <a:t>Берём 26 пунктов из 129</a:t>
+              <a:t>Строгая мера uplift 1,25, не 1,56</a:t>
             </a:r>
             <a:endParaRPr lang="en-US" sz="2400" dirty="0"/>
           </a:p>
@@ -5616,7 +5616,7 @@
                 <a:ea typeface="Arial" pitchFamily="34" charset="-122"/>
                 <a:cs typeface="Arial" pitchFamily="34" charset="-120"/>
               </a:rPr>
-              <a:t>Курс ЦБ — не курс сделки</a:t>
+              <a:t>Курс ЦБ — не курс сделки, спред 9 %</a:t>
             </a:r>
             <a:endParaRPr lang="en-US" sz="2400" dirty="0"/>
           </a:p>
@@ -6147,7 +6147,7 @@
                 <a:ea typeface="Arial" pitchFamily="34" charset="-122"/>
                 <a:cs typeface="Arial" pitchFamily="34" charset="-120"/>
               </a:rPr>
-              <a:t>Прототип пути</a:t>
+              <a:t>Расчёт на любую дату</a:t>
             </a:r>
             <a:endParaRPr lang="en-US" sz="3000" dirty="0"/>
           </a:p>
@@ -6167,7 +6167,7 @@
                 <a:ea typeface="Arial" pitchFamily="34" charset="-122"/>
                 <a:cs typeface="Arial" pitchFamily="34" charset="-120"/>
               </a:rPr>
-              <a:t>Тексты на персонах</a:t>
+              <a:t>Прототип пути</a:t>
             </a:r>
             <a:endParaRPr lang="en-US" sz="3000" dirty="0"/>
           </a:p>
@@ -6187,7 +6187,7 @@
                 <a:ea typeface="Arial" pitchFamily="34" charset="-122"/>
                 <a:cs typeface="Arial" pitchFamily="34" charset="-120"/>
               </a:rPr>
-              <a:t>Предзаполнение формы</a:t>
+              <a:t>Тексты на персонах</a:t>
             </a:r>
             <a:endParaRPr lang="en-US" sz="3000" dirty="0"/>
           </a:p>
@@ -6300,7 +6300,7 @@
                 <a:ea typeface="Arial" pitchFamily="34" charset="-122"/>
                 <a:cs typeface="Arial" pitchFamily="34" charset="-120"/>
               </a:rPr>
-              <a:t>20 000 человек в группу</a:t>
+              <a:t>20 000 клиентов в группу</a:t>
             </a:r>
             <a:endParaRPr lang="en-US" sz="3000" dirty="0"/>
           </a:p>
@@ -6320,7 +6320,7 @@
                 <a:ea typeface="Arial" pitchFamily="34" charset="-122"/>
                 <a:cs typeface="Arial" pitchFamily="34" charset="-120"/>
               </a:rPr>
-              <a:t>Поровну, вслепую</a:t>
+              <a:t>Сигнал виден за 3 недели</a:t>
             </a:r>
             <a:endParaRPr lang="en-US" sz="3000" dirty="0"/>
           </a:p>
@@ -6340,7 +6340,7 @@
                 <a:ea typeface="Arial" pitchFamily="34" charset="-122"/>
                 <a:cs typeface="Arial" pitchFamily="34" charset="-120"/>
               </a:rPr>
-              <a:t>3 недели минимум,</a:t>
+              <a:t>Поведение — за квартал</a:t>
             </a:r>
             <a:endParaRPr lang="en-US" sz="3000" dirty="0"/>
           </a:p>
@@ -6360,7 +6360,7 @@
                 <a:ea typeface="Arial" pitchFamily="34" charset="-122"/>
                 <a:cs typeface="Arial" pitchFamily="34" charset="-120"/>
               </a:rPr>
-              <a:t>квартал полный цикл</a:t>
+              <a:t>Первым проверяем спред</a:t>
             </a:r>
             <a:endParaRPr lang="en-US" sz="3000" dirty="0"/>
           </a:p>
@@ -6473,7 +6473,7 @@
                 <a:ea typeface="Arial" pitchFamily="34" charset="-122"/>
                 <a:cs typeface="Arial" pitchFamily="34" charset="-120"/>
               </a:rPr>
-              <a:t>Тест на 20 000 в группе различает прирост от 2,9 %.</a:t>
+              <a:t>Порог различимости при 20 000 в группе — 2,9 %.</a:t>
             </a:r>
             <a:endParaRPr lang="en-US" sz="2600" dirty="0"/>
           </a:p>
@@ -6515,7 +6515,7 @@
                 <a:ea typeface="Arial" pitchFamily="34" charset="-122"/>
                 <a:cs typeface="Arial" pitchFamily="34" charset="-120"/>
               </a:rPr>
-              <a:t>Меньше — не отличим от шума, и это не успех</a:t>
+              <a:t>Меньше не отличим от шума и успехом не считаем</a:t>
             </a:r>
             <a:endParaRPr lang="en-US" sz="2600" dirty="0"/>
           </a:p>
@@ -6576,7 +6576,7 @@
                 <a:ea typeface="Arial" pitchFamily="34" charset="-122"/>
                 <a:cs typeface="Arial" pitchFamily="34" charset="-120"/>
               </a:rPr>
-              <a:t>Мы не обещаем лучший день. Мы показываем сумму</a:t>
+              <a:t>Не предсказываем курс. Показываем сумму</a:t>
             </a:r>
             <a:endParaRPr lang="en-US" sz="3000" dirty="0"/>
           </a:p>

--- a/docs/presentation/fx-pulse-final-draft.pptx
+++ b/docs/presentation/fx-pulse-final-draft.pptx
@@ -4631,7 +4631,7 @@
         </p:nvSpPr>
         <p:spPr>
           <a:xfrm>
-            <a:off x="777240" y="4736592"/>
+            <a:off x="777240" y="4718304"/>
             <a:ext cx="10607040" cy="457200"/>
           </a:xfrm>
           <a:prstGeom prst="rect">
@@ -4693,7 +4693,7 @@
               <a:buNone/>
             </a:pPr>
             <a:r>
-              <a:rPr lang="en-US" sz="2600" dirty="0">
+              <a:rPr lang="en-US" sz="2400" dirty="0">
                 <a:solidFill>
                   <a:srgbClr val="3A3A3A"/>
                 </a:solidFill>
@@ -4701,9 +4701,9 @@
                 <a:ea typeface="Arial" pitchFamily="34" charset="-122"/>
                 <a:cs typeface="Arial" pitchFamily="34" charset="-120"/>
               </a:rPr>
-              <a:t>Клиенту — за год при 9 переводах. Рынок — коридор целиком в год</a:t>
-            </a:r>
-            <a:endParaRPr lang="en-US" sz="2600" dirty="0"/>
+              <a:t>Клиенту — за год при 9 переводах по 45 000 ₽</a:t>
+            </a:r>
+            <a:endParaRPr lang="en-US" sz="2400" dirty="0"/>
           </a:p>
         </p:txBody>
       </p:sp>
@@ -4715,7 +4715,7 @@
         </p:nvSpPr>
         <p:spPr>
           <a:xfrm>
-            <a:off x="777240" y="5596128"/>
+            <a:off x="777240" y="5559552"/>
             <a:ext cx="10607040" cy="457200"/>
           </a:xfrm>
           <a:prstGeom prst="rect">
@@ -4735,7 +4735,7 @@
               <a:buNone/>
             </a:pPr>
             <a:r>
-              <a:rPr lang="en-US" sz="2600" dirty="0">
+              <a:rPr lang="en-US" sz="2400" dirty="0">
                 <a:solidFill>
                   <a:srgbClr val="3A3A3A"/>
                 </a:solidFill>
@@ -4743,9 +4743,51 @@
                 <a:ea typeface="Arial" pitchFamily="34" charset="-122"/>
                 <a:cs typeface="Arial" pitchFamily="34" charset="-120"/>
               </a:rPr>
+              <a:t>Рынок — весь коридор: операции × чек × 5 % прироста × 2 % маржи</a:t>
+            </a:r>
+            <a:endParaRPr lang="en-US" sz="2400" dirty="0"/>
+          </a:p>
+        </p:txBody>
+      </p:sp>
+      <p:sp>
+        <p:nvSpPr>
+          <p:cNvPr id="11" name="Text 8"/>
+          <p:cNvSpPr txBox="1"/>
+          <p:nvPr/>
+        </p:nvSpPr>
+        <p:spPr>
+          <a:xfrm>
+            <a:off x="777240" y="5943600"/>
+            <a:ext cx="10607040" cy="457200"/>
+          </a:xfrm>
+          <a:prstGeom prst="rect">
+            <a:avLst/>
+          </a:prstGeom>
+          <a:noFill/>
+          <a:ln/>
+        </p:spPr>
+        <p:txBody>
+          <a:bodyPr wrap="square" lIns="0" tIns="0" rIns="0" bIns="0" rtlCol="0" anchor="t"/>
+          <a:lstStyle/>
+          <a:p>
+            <a:pPr indent="0" marL="0">
+              <a:lnSpc>
+                <a:spcPct val="100000"/>
+              </a:lnSpc>
+              <a:buNone/>
+            </a:pPr>
+            <a:r>
+              <a:rPr lang="en-US" sz="2400" dirty="0">
+                <a:solidFill>
+                  <a:srgbClr val="3A3A3A"/>
+                </a:solidFill>
+                <a:latin typeface="Arial" pitchFamily="34" charset="0"/>
+                <a:ea typeface="Arial" pitchFamily="34" charset="-122"/>
+                <a:cs typeface="Arial" pitchFamily="34" charset="-120"/>
+              </a:rPr>
               <a:t>Армения и Казахстан — другой отправитель, не трудовая миграция</a:t>
             </a:r>
-            <a:endParaRPr lang="en-US" sz="2600" dirty="0"/>
+            <a:endParaRPr lang="en-US" sz="2400" dirty="0"/>
           </a:p>
         </p:txBody>
       </p:sp>
